--- a/GosBank.pptx
+++ b/GosBank.pptx
@@ -11,7 +11,7 @@
     <p:sldId id="256" r:id="rId2"/>
     <p:sldId id="257" r:id="rId3"/>
     <p:sldId id="258" r:id="rId4"/>
-    <p:sldId id="269" r:id="rId5"/>
+    <p:sldId id="273" r:id="rId5"/>
     <p:sldId id="270" r:id="rId6"/>
     <p:sldId id="260" r:id="rId7"/>
     <p:sldId id="272" r:id="rId8"/>
@@ -29,18 +29,11 @@
   <p:notesSz cx="6858000" cy="9144000"/>
   <p:embeddedFontLst>
     <p:embeddedFont>
-      <p:font typeface="Inter" panose="020B0604020202020204" charset="0"/>
+      <p:font typeface="Calibri" panose="020F0502020204030204" pitchFamily="34" charset="0"/>
       <p:regular r:id="rId19"/>
       <p:bold r:id="rId20"/>
       <p:italic r:id="rId21"/>
       <p:boldItalic r:id="rId22"/>
-    </p:embeddedFont>
-    <p:embeddedFont>
-      <p:font typeface="Montserrat" panose="00000500000000000000" pitchFamily="2" charset="-52"/>
-      <p:regular r:id="rId23"/>
-      <p:bold r:id="rId24"/>
-      <p:italic r:id="rId25"/>
-      <p:boldItalic r:id="rId26"/>
     </p:embeddedFont>
   </p:embeddedFontLst>
   <p:defaultTextStyle>
@@ -1871,7 +1864,7 @@
     </p:spTree>
     <p:extLst>
       <p:ext uri="{BB962C8B-B14F-4D97-AF65-F5344CB8AC3E}">
-        <p14:creationId xmlns:p14="http://schemas.microsoft.com/office/powerpoint/2010/main" val="4283540030"/>
+        <p14:creationId xmlns:p14="http://schemas.microsoft.com/office/powerpoint/2010/main" val="451022646"/>
       </p:ext>
     </p:extLst>
   </p:cSld>
@@ -12449,98 +12442,6 @@
       </p:sp>
       <p:sp>
         <p:nvSpPr>
-          <p:cNvPr id="4" name="Прямоугольник 3">
-            <a:extLst>
-              <a:ext uri="{FF2B5EF4-FFF2-40B4-BE49-F238E27FC236}">
-                <a16:creationId xmlns:a16="http://schemas.microsoft.com/office/drawing/2014/main" id="{D1510284-BC8E-3867-421B-50214D97E2C9}"/>
-              </a:ext>
-            </a:extLst>
-          </p:cNvPr>
-          <p:cNvSpPr/>
-          <p:nvPr/>
-        </p:nvSpPr>
-        <p:spPr>
-          <a:xfrm>
-            <a:off x="495298" y="3429000"/>
-            <a:ext cx="2374899" cy="2400300"/>
-          </a:xfrm>
-          <a:prstGeom prst="rect">
-            <a:avLst/>
-          </a:prstGeom>
-        </p:spPr>
-        <p:style>
-          <a:lnRef idx="2">
-            <a:schemeClr val="accent1">
-              <a:shade val="15000"/>
-            </a:schemeClr>
-          </a:lnRef>
-          <a:fillRef idx="1">
-            <a:schemeClr val="accent1"/>
-          </a:fillRef>
-          <a:effectRef idx="0">
-            <a:schemeClr val="accent1"/>
-          </a:effectRef>
-          <a:fontRef idx="minor">
-            <a:schemeClr val="lt1"/>
-          </a:fontRef>
-        </p:style>
-        <p:txBody>
-          <a:bodyPr rtlCol="0" anchor="ctr"/>
-          <a:lstStyle/>
-          <a:p>
-            <a:pPr algn="ctr"/>
-            <a:endParaRPr lang="ru-RU"/>
-          </a:p>
-        </p:txBody>
-      </p:sp>
-      <p:sp>
-        <p:nvSpPr>
-          <p:cNvPr id="5" name="Прямоугольник 4">
-            <a:extLst>
-              <a:ext uri="{FF2B5EF4-FFF2-40B4-BE49-F238E27FC236}">
-                <a16:creationId xmlns:a16="http://schemas.microsoft.com/office/drawing/2014/main" id="{95CD578B-69ED-BC2B-8086-BF7231FFF8E5}"/>
-              </a:ext>
-            </a:extLst>
-          </p:cNvPr>
-          <p:cNvSpPr/>
-          <p:nvPr/>
-        </p:nvSpPr>
-        <p:spPr>
-          <a:xfrm>
-            <a:off x="9169400" y="3581400"/>
-            <a:ext cx="2527300" cy="2377503"/>
-          </a:xfrm>
-          <a:prstGeom prst="rect">
-            <a:avLst/>
-          </a:prstGeom>
-        </p:spPr>
-        <p:style>
-          <a:lnRef idx="2">
-            <a:schemeClr val="accent1">
-              <a:shade val="15000"/>
-            </a:schemeClr>
-          </a:lnRef>
-          <a:fillRef idx="1">
-            <a:schemeClr val="accent1"/>
-          </a:fillRef>
-          <a:effectRef idx="0">
-            <a:schemeClr val="accent1"/>
-          </a:effectRef>
-          <a:fontRef idx="minor">
-            <a:schemeClr val="lt1"/>
-          </a:fontRef>
-        </p:style>
-        <p:txBody>
-          <a:bodyPr rtlCol="0" anchor="ctr"/>
-          <a:lstStyle/>
-          <a:p>
-            <a:pPr algn="ctr"/>
-            <a:endParaRPr lang="ru-RU"/>
-          </a:p>
-        </p:txBody>
-      </p:sp>
-      <p:sp>
-        <p:nvSpPr>
           <p:cNvPr id="6" name="TextBox 5">
             <a:extLst>
               <a:ext uri="{FF2B5EF4-FFF2-40B4-BE49-F238E27FC236}">
@@ -12594,10 +12495,62 @@
       </p:sp>
       <p:sp>
         <p:nvSpPr>
-          <p:cNvPr id="7" name="TextBox 6">
+          <p:cNvPr id="10" name="Прямоугольник 9">
             <a:extLst>
               <a:ext uri="{FF2B5EF4-FFF2-40B4-BE49-F238E27FC236}">
-                <a16:creationId xmlns:a16="http://schemas.microsoft.com/office/drawing/2014/main" id="{3582E733-AE69-34B7-2459-E53589764F0F}"/>
+                <a16:creationId xmlns:a16="http://schemas.microsoft.com/office/drawing/2014/main" id="{7B6CEC3B-FE66-4AB5-BF05-3C641A456146}"/>
+              </a:ext>
+            </a:extLst>
+          </p:cNvPr>
+          <p:cNvSpPr/>
+          <p:nvPr/>
+        </p:nvSpPr>
+        <p:spPr>
+          <a:xfrm>
+            <a:off x="9169400" y="3581400"/>
+            <a:ext cx="2527300" cy="2377503"/>
+          </a:xfrm>
+          <a:prstGeom prst="rect">
+            <a:avLst/>
+          </a:prstGeom>
+        </p:spPr>
+        <p:style>
+          <a:lnRef idx="2">
+            <a:schemeClr val="accent1">
+              <a:shade val="15000"/>
+            </a:schemeClr>
+          </a:lnRef>
+          <a:fillRef idx="1">
+            <a:schemeClr val="accent1"/>
+          </a:fillRef>
+          <a:effectRef idx="0">
+            <a:schemeClr val="accent1"/>
+          </a:effectRef>
+          <a:fontRef idx="minor">
+            <a:schemeClr val="lt1"/>
+          </a:fontRef>
+        </p:style>
+        <p:txBody>
+          <a:bodyPr rtlCol="0" anchor="ctr"/>
+          <a:lstStyle/>
+          <a:p>
+            <a:pPr algn="ctr"/>
+            <a:endParaRPr lang="ru-RU">
+              <a:solidFill>
+                <a:schemeClr val="tx1"/>
+              </a:solidFill>
+              <a:latin typeface="Times New Roman" panose="02020603050405020304" pitchFamily="18" charset="0"/>
+              <a:cs typeface="Times New Roman" panose="02020603050405020304" pitchFamily="18" charset="0"/>
+            </a:endParaRPr>
+          </a:p>
+        </p:txBody>
+      </p:sp>
+      <p:sp>
+        <p:nvSpPr>
+          <p:cNvPr id="11" name="TextBox 10">
+            <a:extLst>
+              <a:ext uri="{FF2B5EF4-FFF2-40B4-BE49-F238E27FC236}">
+                <a16:creationId xmlns:a16="http://schemas.microsoft.com/office/drawing/2014/main" id="{DF9A3305-741A-4294-B91D-424F1EFB68EC}"/>
               </a:ext>
             </a:extLst>
           </p:cNvPr>
@@ -12624,9 +12577,7 @@
             <a:r>
               <a:rPr lang="ru-RU" sz="2400" dirty="0">
                 <a:solidFill>
-                  <a:schemeClr val="bg1">
-                    <a:lumMod val="95000"/>
-                  </a:schemeClr>
+                  <a:schemeClr val="bg1"/>
                 </a:solidFill>
                 <a:latin typeface="Times New Roman" panose="02020603050405020304" pitchFamily="18" charset="0"/>
                 <a:cs typeface="Times New Roman" panose="02020603050405020304" pitchFamily="18" charset="0"/>
@@ -12636,6 +12587,118 @@
           </a:p>
         </p:txBody>
       </p:sp>
+      <p:pic>
+        <p:nvPicPr>
+          <p:cNvPr id="12" name="Рисунок 11">
+            <a:extLst>
+              <a:ext uri="{FF2B5EF4-FFF2-40B4-BE49-F238E27FC236}">
+                <a16:creationId xmlns:a16="http://schemas.microsoft.com/office/drawing/2014/main" id="{0B665979-89A1-462D-AD49-91018D0571E7}"/>
+              </a:ext>
+            </a:extLst>
+          </p:cNvPr>
+          <p:cNvPicPr>
+            <a:picLocks noChangeAspect="1"/>
+          </p:cNvPicPr>
+          <p:nvPr/>
+        </p:nvPicPr>
+        <p:blipFill>
+          <a:blip r:embed="rId4"/>
+          <a:stretch>
+            <a:fillRect/>
+          </a:stretch>
+        </p:blipFill>
+        <p:spPr>
+          <a:xfrm>
+            <a:off x="9253453" y="3636995"/>
+            <a:ext cx="2359194" cy="2266312"/>
+          </a:xfrm>
+          <a:prstGeom prst="rect">
+            <a:avLst/>
+          </a:prstGeom>
+        </p:spPr>
+      </p:pic>
+      <p:sp>
+        <p:nvSpPr>
+          <p:cNvPr id="15" name="Прямоугольник 14">
+            <a:extLst>
+              <a:ext uri="{FF2B5EF4-FFF2-40B4-BE49-F238E27FC236}">
+                <a16:creationId xmlns:a16="http://schemas.microsoft.com/office/drawing/2014/main" id="{CA5B64D7-D33C-4D9B-BBD6-2FBE8F320909}"/>
+              </a:ext>
+            </a:extLst>
+          </p:cNvPr>
+          <p:cNvSpPr/>
+          <p:nvPr/>
+        </p:nvSpPr>
+        <p:spPr>
+          <a:xfrm>
+            <a:off x="579352" y="3581400"/>
+            <a:ext cx="2443247" cy="2377503"/>
+          </a:xfrm>
+          <a:prstGeom prst="rect">
+            <a:avLst/>
+          </a:prstGeom>
+        </p:spPr>
+        <p:style>
+          <a:lnRef idx="2">
+            <a:schemeClr val="accent1">
+              <a:shade val="15000"/>
+            </a:schemeClr>
+          </a:lnRef>
+          <a:fillRef idx="1">
+            <a:schemeClr val="accent1"/>
+          </a:fillRef>
+          <a:effectRef idx="0">
+            <a:schemeClr val="accent1"/>
+          </a:effectRef>
+          <a:fontRef idx="minor">
+            <a:schemeClr val="lt1"/>
+          </a:fontRef>
+        </p:style>
+        <p:txBody>
+          <a:bodyPr rtlCol="0" anchor="ctr"/>
+          <a:lstStyle/>
+          <a:p>
+            <a:pPr algn="ctr"/>
+            <a:endParaRPr lang="ru-RU">
+              <a:solidFill>
+                <a:schemeClr val="tx1"/>
+              </a:solidFill>
+              <a:latin typeface="Times New Roman" panose="02020603050405020304" pitchFamily="18" charset="0"/>
+              <a:cs typeface="Times New Roman" panose="02020603050405020304" pitchFamily="18" charset="0"/>
+            </a:endParaRPr>
+          </a:p>
+        </p:txBody>
+      </p:sp>
+      <p:pic>
+        <p:nvPicPr>
+          <p:cNvPr id="16" name="Рисунок 15">
+            <a:extLst>
+              <a:ext uri="{FF2B5EF4-FFF2-40B4-BE49-F238E27FC236}">
+                <a16:creationId xmlns:a16="http://schemas.microsoft.com/office/drawing/2014/main" id="{A358E4B6-759E-4E55-9E39-42FECAA5DA2E}"/>
+              </a:ext>
+            </a:extLst>
+          </p:cNvPr>
+          <p:cNvPicPr>
+            <a:picLocks noChangeAspect="1"/>
+          </p:cNvPicPr>
+          <p:nvPr/>
+        </p:nvPicPr>
+        <p:blipFill>
+          <a:blip r:embed="rId5"/>
+          <a:stretch>
+            <a:fillRect/>
+          </a:stretch>
+        </p:blipFill>
+        <p:spPr>
+          <a:xfrm>
+            <a:off x="624629" y="3636995"/>
+            <a:ext cx="2349552" cy="2266312"/>
+          </a:xfrm>
+          <a:prstGeom prst="rect">
+            <a:avLst/>
+          </a:prstGeom>
+        </p:spPr>
+      </p:pic>
     </p:spTree>
   </p:cSld>
   <p:clrMapOvr>
@@ -12670,7 +12733,7 @@
         <p:spPr>
           <a:xfrm>
             <a:off x="714375" y="476250"/>
-            <a:ext cx="11451431" cy="419100"/>
+            <a:ext cx="11451431" cy="615553"/>
           </a:xfrm>
           <a:prstGeom prst="rect">
             <a:avLst/>
@@ -12686,41 +12749,43 @@
           </a:bodyPr>
           <a:lstStyle/>
           <a:p>
-            <a:pPr marL="0" marR="0" lvl="0" indent="0" algn="l" rtl="0">
-              <a:spcBef>
-                <a:spcPts val="0"/>
-              </a:spcBef>
-              <a:spcAft>
-                <a:spcPts val="0"/>
-              </a:spcAft>
-              <a:buNone/>
-            </a:pPr>
             <a:r>
-              <a:rPr lang="en-US" sz="2700" b="1" i="0" u="none" strike="noStrike" cap="none">
+              <a:rPr lang="ru-RU" sz="4000" b="1" dirty="0">
                 <a:solidFill>
                   <a:srgbClr val="0F172A"/>
                 </a:solidFill>
-                <a:latin typeface="Montserrat"/>
-                <a:ea typeface="Montserrat"/>
-                <a:cs typeface="Montserrat"/>
+                <a:latin typeface="Times New Roman" panose="02020603050405020304" pitchFamily="18" charset="0"/>
+                <a:cs typeface="Times New Roman" panose="02020603050405020304" pitchFamily="18" charset="0"/>
                 <a:sym typeface="Montserrat"/>
               </a:rPr>
-              <a:t>Решение Проблем (Раздел РО)</a:t>
+              <a:t>Решение проблем в Руководстве оператора</a:t>
             </a:r>
-            <a:endParaRPr/>
+            <a:endParaRPr sz="4000" b="1" dirty="0">
+              <a:solidFill>
+                <a:srgbClr val="0F172A"/>
+              </a:solidFill>
+              <a:latin typeface="Times New Roman" panose="02020603050405020304" pitchFamily="18" charset="0"/>
+              <a:cs typeface="Times New Roman" panose="02020603050405020304" pitchFamily="18" charset="0"/>
+            </a:endParaRPr>
           </a:p>
         </p:txBody>
       </p:sp>
       <p:sp>
         <p:nvSpPr>
-          <p:cNvPr id="207" name="Google Shape;207;p19"/>
+          <p:cNvPr id="5" name="Google Shape;107;p14">
+            <a:extLst>
+              <a:ext uri="{FF2B5EF4-FFF2-40B4-BE49-F238E27FC236}">
+                <a16:creationId xmlns:a16="http://schemas.microsoft.com/office/drawing/2014/main" id="{E7C64204-7924-4082-A30D-7079A984F7C9}"/>
+              </a:ext>
+            </a:extLst>
+          </p:cNvPr>
           <p:cNvSpPr/>
           <p:nvPr/>
         </p:nvSpPr>
         <p:spPr>
           <a:xfrm>
-            <a:off x="571500" y="476250"/>
-            <a:ext cx="57150" cy="419100"/>
+            <a:off x="628650" y="476250"/>
+            <a:ext cx="59530" cy="597694"/>
           </a:xfrm>
           <a:prstGeom prst="rect">
             <a:avLst/>
@@ -12747,13 +12812,13 @@
               </a:spcAft>
               <a:buNone/>
             </a:pPr>
-            <a:endParaRPr sz="1800" b="0" i="0" u="none" strike="noStrike" cap="none">
+            <a:endParaRPr sz="2800" b="0" i="0" u="none" strike="noStrike" cap="none">
               <a:solidFill>
                 <a:schemeClr val="dk1"/>
               </a:solidFill>
-              <a:latin typeface="Calibri"/>
+              <a:latin typeface="Times New Roman" panose="02020603050405020304" pitchFamily="18" charset="0"/>
               <a:ea typeface="Calibri"/>
-              <a:cs typeface="Calibri"/>
+              <a:cs typeface="Times New Roman" panose="02020603050405020304" pitchFamily="18" charset="0"/>
               <a:sym typeface="Calibri"/>
             </a:endParaRPr>
           </a:p>
@@ -12761,10 +12826,10 @@
       </p:sp>
       <p:sp>
         <p:nvSpPr>
-          <p:cNvPr id="2" name="TextBox 1">
+          <p:cNvPr id="3" name="TextBox 2">
             <a:extLst>
               <a:ext uri="{FF2B5EF4-FFF2-40B4-BE49-F238E27FC236}">
-                <a16:creationId xmlns:a16="http://schemas.microsoft.com/office/drawing/2014/main" id="{57374E03-0352-ABDF-F81A-8961FD2B636D}"/>
+                <a16:creationId xmlns:a16="http://schemas.microsoft.com/office/drawing/2014/main" id="{72F40350-9FA2-4D73-B331-FFAFF32CE2A1}"/>
               </a:ext>
             </a:extLst>
           </p:cNvPr>
@@ -12773,8 +12838,8 @@
         </p:nvSpPr>
         <p:spPr>
           <a:xfrm>
-            <a:off x="5548184" y="2137719"/>
-            <a:ext cx="2909771" cy="307777"/>
+            <a:off x="899885" y="1598682"/>
+            <a:ext cx="5928226" cy="400110"/>
           </a:xfrm>
           <a:prstGeom prst="rect">
             <a:avLst/>
@@ -12788,9 +12853,143 @@
           <a:lstStyle/>
           <a:p>
             <a:r>
-              <a:rPr lang="ru-RU" dirty="0"/>
-              <a:t>ПРОБЛЕМЫ И КАК ИХ РЕШИТЬ</a:t>
+              <a:rPr lang="ru-RU" sz="2000" dirty="0">
+                <a:latin typeface="Times New Roman" panose="02020603050405020304" pitchFamily="18" charset="0"/>
+                <a:cs typeface="Times New Roman" panose="02020603050405020304" pitchFamily="18" charset="0"/>
+              </a:rPr>
+              <a:t>Основная проблема это </a:t>
             </a:r>
+            <a:r>
+              <a:rPr lang="ru-RU" sz="2000" dirty="0">
+                <a:solidFill>
+                  <a:srgbClr val="0D0D0D"/>
+                </a:solidFill>
+                <a:effectLst/>
+                <a:latin typeface="Times New Roman" panose="02020603050405020304" pitchFamily="18" charset="0"/>
+                <a:ea typeface="Calibri" panose="020F0502020204030204" pitchFamily="34" charset="0"/>
+                <a:cs typeface="Times New Roman" panose="02020603050405020304" pitchFamily="18" charset="0"/>
+              </a:rPr>
+              <a:t>Неверный логин или пароль</a:t>
+            </a:r>
+            <a:endParaRPr lang="ru-RU" sz="2000" dirty="0">
+              <a:latin typeface="Times New Roman" panose="02020603050405020304" pitchFamily="18" charset="0"/>
+              <a:cs typeface="Times New Roman" panose="02020603050405020304" pitchFamily="18" charset="0"/>
+            </a:endParaRPr>
+          </a:p>
+        </p:txBody>
+      </p:sp>
+      <p:sp>
+        <p:nvSpPr>
+          <p:cNvPr id="7" name="TextBox 6">
+            <a:extLst>
+              <a:ext uri="{FF2B5EF4-FFF2-40B4-BE49-F238E27FC236}">
+                <a16:creationId xmlns:a16="http://schemas.microsoft.com/office/drawing/2014/main" id="{5D20B2B6-7A33-4090-852B-B0654170B0D2}"/>
+              </a:ext>
+            </a:extLst>
+          </p:cNvPr>
+          <p:cNvSpPr txBox="1"/>
+          <p:nvPr/>
+        </p:nvSpPr>
+        <p:spPr>
+          <a:xfrm>
+            <a:off x="7097486" y="3672114"/>
+            <a:ext cx="1388522" cy="307777"/>
+          </a:xfrm>
+          <a:prstGeom prst="rect">
+            <a:avLst/>
+          </a:prstGeom>
+          <a:noFill/>
+        </p:spPr>
+        <p:txBody>
+          <a:bodyPr wrap="none" rtlCol="0">
+            <a:spAutoFit/>
+          </a:bodyPr>
+          <a:lstStyle/>
+          <a:p>
+            <a:r>
+              <a:rPr lang="ru-RU" dirty="0">
+                <a:latin typeface="Times New Roman" panose="02020603050405020304" pitchFamily="18" charset="0"/>
+                <a:cs typeface="Times New Roman" panose="02020603050405020304" pitchFamily="18" charset="0"/>
+              </a:rPr>
+              <a:t>Пример </a:t>
+            </a:r>
+            <a:r>
+              <a:rPr lang="ru-RU" dirty="0" err="1">
+                <a:latin typeface="Times New Roman" panose="02020603050405020304" pitchFamily="18" charset="0"/>
+                <a:cs typeface="Times New Roman" panose="02020603050405020304" pitchFamily="18" charset="0"/>
+              </a:rPr>
+              <a:t>гифкой</a:t>
+            </a:r>
+            <a:endParaRPr lang="ru-RU" dirty="0">
+              <a:latin typeface="Times New Roman" panose="02020603050405020304" pitchFamily="18" charset="0"/>
+              <a:cs typeface="Times New Roman" panose="02020603050405020304" pitchFamily="18" charset="0"/>
+            </a:endParaRPr>
+          </a:p>
+        </p:txBody>
+      </p:sp>
+      <p:sp>
+        <p:nvSpPr>
+          <p:cNvPr id="11" name="TextBox 10">
+            <a:extLst>
+              <a:ext uri="{FF2B5EF4-FFF2-40B4-BE49-F238E27FC236}">
+                <a16:creationId xmlns:a16="http://schemas.microsoft.com/office/drawing/2014/main" id="{4EED0227-0C84-4EF2-86BC-C05BEAEBB9E0}"/>
+              </a:ext>
+            </a:extLst>
+          </p:cNvPr>
+          <p:cNvSpPr txBox="1"/>
+          <p:nvPr/>
+        </p:nvSpPr>
+        <p:spPr>
+          <a:xfrm>
+            <a:off x="899885" y="2474893"/>
+            <a:ext cx="3860801" cy="3170099"/>
+          </a:xfrm>
+          <a:prstGeom prst="rect">
+            <a:avLst/>
+          </a:prstGeom>
+          <a:noFill/>
+        </p:spPr>
+        <p:txBody>
+          <a:bodyPr wrap="square">
+            <a:spAutoFit/>
+          </a:bodyPr>
+          <a:lstStyle/>
+          <a:p>
+            <a:r>
+              <a:rPr lang="ru-RU" sz="2000" dirty="0">
+                <a:effectLst/>
+                <a:latin typeface="Times New Roman" panose="02020603050405020304" pitchFamily="18" charset="0"/>
+                <a:ea typeface="Calibri" panose="020F0502020204030204" pitchFamily="34" charset="0"/>
+                <a:cs typeface="Times New Roman" panose="02020603050405020304" pitchFamily="18" charset="0"/>
+              </a:rPr>
+              <a:t>Данное сообщение об ошибке выводится на экран оператору при вводе неверных данных аутентификации. </a:t>
+            </a:r>
+          </a:p>
+          <a:p>
+            <a:r>
+              <a:rPr lang="ru-RU" sz="2000" dirty="0">
+                <a:effectLst/>
+                <a:latin typeface="Times New Roman" panose="02020603050405020304" pitchFamily="18" charset="0"/>
+                <a:ea typeface="Calibri" panose="020F0502020204030204" pitchFamily="34" charset="0"/>
+                <a:cs typeface="Times New Roman" panose="02020603050405020304" pitchFamily="18" charset="0"/>
+              </a:rPr>
+              <a:t>Требуется проверить корректность введенных учетных данных. </a:t>
+            </a:r>
+          </a:p>
+          <a:p>
+            <a:r>
+              <a:rPr lang="ru-RU" sz="2000" dirty="0">
+                <a:effectLst/>
+                <a:latin typeface="Times New Roman" panose="02020603050405020304" pitchFamily="18" charset="0"/>
+                <a:ea typeface="Calibri" panose="020F0502020204030204" pitchFamily="34" charset="0"/>
+                <a:cs typeface="Times New Roman" panose="02020603050405020304" pitchFamily="18" charset="0"/>
+              </a:rPr>
+              <a:t>В случае повторения ошибки необходимо обратиться к системному администратору</a:t>
+            </a:r>
+            <a:endParaRPr lang="ru-RU" sz="2000" dirty="0">
+              <a:latin typeface="Times New Roman" panose="02020603050405020304" pitchFamily="18" charset="0"/>
+              <a:cs typeface="Times New Roman" panose="02020603050405020304" pitchFamily="18" charset="0"/>
+            </a:endParaRPr>
           </a:p>
         </p:txBody>
       </p:sp>
@@ -12828,7 +13027,7 @@
         <p:spPr>
           <a:xfrm>
             <a:off x="714375" y="476250"/>
-            <a:ext cx="11451431" cy="419100"/>
+            <a:ext cx="11451431" cy="615553"/>
           </a:xfrm>
           <a:prstGeom prst="rect">
             <a:avLst/>
@@ -12844,41 +13043,43 @@
           </a:bodyPr>
           <a:lstStyle/>
           <a:p>
-            <a:pPr marL="0" marR="0" lvl="0" indent="0" algn="l" rtl="0">
-              <a:spcBef>
-                <a:spcPts val="0"/>
-              </a:spcBef>
-              <a:spcAft>
-                <a:spcPts val="0"/>
-              </a:spcAft>
-              <a:buNone/>
-            </a:pPr>
             <a:r>
-              <a:rPr lang="en-US" sz="2700" b="1" i="0" u="none" strike="noStrike" cap="none">
+              <a:rPr lang="ru-RU" sz="4000" b="1" dirty="0">
                 <a:solidFill>
                   <a:srgbClr val="0F172A"/>
                 </a:solidFill>
-                <a:latin typeface="Montserrat"/>
-                <a:ea typeface="Montserrat"/>
-                <a:cs typeface="Montserrat"/>
+                <a:latin typeface="Times New Roman" panose="02020603050405020304" pitchFamily="18" charset="0"/>
+                <a:cs typeface="Times New Roman" panose="02020603050405020304" pitchFamily="18" charset="0"/>
                 <a:sym typeface="Montserrat"/>
               </a:rPr>
-              <a:t>Измеримые Критерии Качества</a:t>
+              <a:t>Измеримые критерии качества</a:t>
             </a:r>
-            <a:endParaRPr/>
+            <a:endParaRPr sz="4000" b="1" dirty="0">
+              <a:solidFill>
+                <a:srgbClr val="0F172A"/>
+              </a:solidFill>
+              <a:latin typeface="Times New Roman" panose="02020603050405020304" pitchFamily="18" charset="0"/>
+              <a:cs typeface="Times New Roman" panose="02020603050405020304" pitchFamily="18" charset="0"/>
+            </a:endParaRPr>
           </a:p>
         </p:txBody>
       </p:sp>
       <p:sp>
         <p:nvSpPr>
-          <p:cNvPr id="226" name="Google Shape;226;p20"/>
+          <p:cNvPr id="5" name="Google Shape;107;p14">
+            <a:extLst>
+              <a:ext uri="{FF2B5EF4-FFF2-40B4-BE49-F238E27FC236}">
+                <a16:creationId xmlns:a16="http://schemas.microsoft.com/office/drawing/2014/main" id="{DF10A318-E27A-41C1-AFAC-998B96072AA4}"/>
+              </a:ext>
+            </a:extLst>
+          </p:cNvPr>
           <p:cNvSpPr/>
           <p:nvPr/>
         </p:nvSpPr>
         <p:spPr>
           <a:xfrm>
-            <a:off x="571500" y="476250"/>
-            <a:ext cx="57150" cy="419100"/>
+            <a:off x="628650" y="476250"/>
+            <a:ext cx="59530" cy="597694"/>
           </a:xfrm>
           <a:prstGeom prst="rect">
             <a:avLst/>
@@ -12905,24 +13106,54 @@
               </a:spcAft>
               <a:buNone/>
             </a:pPr>
-            <a:endParaRPr sz="1800" b="0" i="0" u="none" strike="noStrike" cap="none">
+            <a:endParaRPr sz="2800" b="0" i="0" u="none" strike="noStrike" cap="none">
               <a:solidFill>
                 <a:schemeClr val="dk1"/>
               </a:solidFill>
-              <a:latin typeface="Calibri"/>
+              <a:latin typeface="Times New Roman" panose="02020603050405020304" pitchFamily="18" charset="0"/>
               <a:ea typeface="Calibri"/>
-              <a:cs typeface="Calibri"/>
+              <a:cs typeface="Times New Roman" panose="02020603050405020304" pitchFamily="18" charset="0"/>
               <a:sym typeface="Calibri"/>
             </a:endParaRPr>
           </a:p>
         </p:txBody>
       </p:sp>
+      <p:pic>
+        <p:nvPicPr>
+          <p:cNvPr id="7" name="Рисунок 6">
+            <a:extLst>
+              <a:ext uri="{FF2B5EF4-FFF2-40B4-BE49-F238E27FC236}">
+                <a16:creationId xmlns:a16="http://schemas.microsoft.com/office/drawing/2014/main" id="{8972D311-EA15-476F-879B-86E141B393FA}"/>
+              </a:ext>
+            </a:extLst>
+          </p:cNvPr>
+          <p:cNvPicPr>
+            <a:picLocks noChangeAspect="1"/>
+          </p:cNvPicPr>
+          <p:nvPr/>
+        </p:nvPicPr>
+        <p:blipFill>
+          <a:blip r:embed="rId3"/>
+          <a:stretch>
+            <a:fillRect/>
+          </a:stretch>
+        </p:blipFill>
+        <p:spPr>
+          <a:xfrm>
+            <a:off x="1071917" y="1738708"/>
+            <a:ext cx="4648849" cy="4077269"/>
+          </a:xfrm>
+          <a:prstGeom prst="rect">
+            <a:avLst/>
+          </a:prstGeom>
+        </p:spPr>
+      </p:pic>
       <p:sp>
         <p:nvSpPr>
-          <p:cNvPr id="2" name="TextBox 1">
+          <p:cNvPr id="11" name="TextBox 10">
             <a:extLst>
               <a:ext uri="{FF2B5EF4-FFF2-40B4-BE49-F238E27FC236}">
-                <a16:creationId xmlns:a16="http://schemas.microsoft.com/office/drawing/2014/main" id="{8ABE882C-2F17-CD65-D3B7-540814218660}"/>
+                <a16:creationId xmlns:a16="http://schemas.microsoft.com/office/drawing/2014/main" id="{B52E5441-2903-403F-AA3F-AC790A1B065F}"/>
               </a:ext>
             </a:extLst>
           </p:cNvPr>
@@ -12931,8 +13162,8 @@
         </p:nvSpPr>
         <p:spPr>
           <a:xfrm>
-            <a:off x="6005384" y="3039762"/>
-            <a:ext cx="1252266" cy="307777"/>
+            <a:off x="6096000" y="1144626"/>
+            <a:ext cx="6096000" cy="400110"/>
           </a:xfrm>
           <a:prstGeom prst="rect">
             <a:avLst/>
@@ -12940,20 +13171,250 @@
           <a:noFill/>
         </p:spPr>
         <p:txBody>
-          <a:bodyPr wrap="none" rtlCol="0">
+          <a:bodyPr wrap="square">
             <a:spAutoFit/>
           </a:bodyPr>
           <a:lstStyle/>
           <a:p>
+            <a:pPr algn="l"/>
             <a:r>
-              <a:rPr lang="ru-RU" dirty="0"/>
-              <a:t>Метрика </a:t>
+              <a:rPr lang="ru-RU" sz="2000" dirty="0">
+                <a:latin typeface="Times New Roman" panose="02020603050405020304" pitchFamily="18" charset="0"/>
+                <a:cs typeface="Times New Roman" panose="02020603050405020304" pitchFamily="18" charset="0"/>
+              </a:rPr>
+              <a:t>Надёжность</a:t>
+            </a:r>
+          </a:p>
+        </p:txBody>
+      </p:sp>
+      <p:sp>
+        <p:nvSpPr>
+          <p:cNvPr id="13" name="TextBox 12">
+            <a:extLst>
+              <a:ext uri="{FF2B5EF4-FFF2-40B4-BE49-F238E27FC236}">
+                <a16:creationId xmlns:a16="http://schemas.microsoft.com/office/drawing/2014/main" id="{FB81B18A-25A4-4BBB-9A24-FA7B5718E9EB}"/>
+              </a:ext>
+            </a:extLst>
+          </p:cNvPr>
+          <p:cNvSpPr txBox="1"/>
+          <p:nvPr/>
+        </p:nvSpPr>
+        <p:spPr>
+          <a:xfrm>
+            <a:off x="6135290" y="4035003"/>
+            <a:ext cx="6096000" cy="400110"/>
+          </a:xfrm>
+          <a:prstGeom prst="rect">
+            <a:avLst/>
+          </a:prstGeom>
+          <a:noFill/>
+        </p:spPr>
+        <p:txBody>
+          <a:bodyPr wrap="square">
+            <a:spAutoFit/>
+          </a:bodyPr>
+          <a:lstStyle/>
+          <a:p>
+            <a:pPr algn="l"/>
+            <a:r>
+              <a:rPr lang="ru-RU" sz="2000" dirty="0">
+                <a:latin typeface="Times New Roman" panose="02020603050405020304" pitchFamily="18" charset="0"/>
+                <a:cs typeface="Times New Roman" panose="02020603050405020304" pitchFamily="18" charset="0"/>
+              </a:rPr>
+              <a:t>Удобство использования</a:t>
+            </a:r>
+          </a:p>
+        </p:txBody>
+      </p:sp>
+      <p:sp>
+        <p:nvSpPr>
+          <p:cNvPr id="10" name="TextBox 9">
+            <a:extLst>
+              <a:ext uri="{FF2B5EF4-FFF2-40B4-BE49-F238E27FC236}">
+                <a16:creationId xmlns:a16="http://schemas.microsoft.com/office/drawing/2014/main" id="{15473D8B-BB3C-46BA-8A37-7BFAA9F47281}"/>
+              </a:ext>
+            </a:extLst>
+          </p:cNvPr>
+          <p:cNvSpPr txBox="1"/>
+          <p:nvPr/>
+        </p:nvSpPr>
+        <p:spPr>
+          <a:xfrm>
+            <a:off x="6440090" y="1680247"/>
+            <a:ext cx="5486400" cy="2246769"/>
+          </a:xfrm>
+          <a:prstGeom prst="rect">
+            <a:avLst/>
+          </a:prstGeom>
+          <a:noFill/>
+        </p:spPr>
+        <p:txBody>
+          <a:bodyPr wrap="square" rtlCol="0">
+            <a:spAutoFit/>
+          </a:bodyPr>
+          <a:lstStyle/>
+          <a:p>
+            <a:pPr algn="l">
+              <a:buFont typeface="Arial" panose="020B0604020202020204" pitchFamily="34" charset="0"/>
+              <a:buChar char="•"/>
+            </a:pPr>
+            <a:r>
+              <a:rPr lang="ru-RU" sz="2000" dirty="0">
+                <a:latin typeface="Times New Roman" panose="02020603050405020304" pitchFamily="18" charset="0"/>
+                <a:cs typeface="Times New Roman" panose="02020603050405020304" pitchFamily="18" charset="0"/>
+              </a:rPr>
+              <a:t>Кнопка «Зарегистрироваться» серая до тех пор, пока все обязательные поля не заполнены корректно.</a:t>
+            </a:r>
+          </a:p>
+          <a:p>
+            <a:pPr algn="l">
+              <a:buFont typeface="Arial" panose="020B0604020202020204" pitchFamily="34" charset="0"/>
+              <a:buChar char="•"/>
+            </a:pPr>
+            <a:r>
+              <a:rPr lang="ru-RU" sz="2000" dirty="0">
+                <a:latin typeface="Times New Roman" panose="02020603050405020304" pitchFamily="18" charset="0"/>
+                <a:cs typeface="Times New Roman" panose="02020603050405020304" pitchFamily="18" charset="0"/>
+              </a:rPr>
+              <a:t>При обрыве соединения данные формы сохраняются.</a:t>
+            </a:r>
+          </a:p>
+          <a:p>
+            <a:pPr algn="l">
+              <a:buFont typeface="Arial" panose="020B0604020202020204" pitchFamily="34" charset="0"/>
+              <a:buChar char="•"/>
+            </a:pPr>
+            <a:r>
+              <a:rPr lang="ru-RU" sz="2000" dirty="0">
+                <a:latin typeface="Times New Roman" panose="02020603050405020304" pitchFamily="18" charset="0"/>
+                <a:cs typeface="Times New Roman" panose="02020603050405020304" pitchFamily="18" charset="0"/>
+              </a:rPr>
+              <a:t>В случае кибератаки применяется механизм </a:t>
             </a:r>
             <a:r>
-              <a:rPr lang="en-US" dirty="0"/>
-              <a:t>ISO</a:t>
+              <a:rPr lang="ru-RU" sz="2000" dirty="0" err="1">
+                <a:latin typeface="Times New Roman" panose="02020603050405020304" pitchFamily="18" charset="0"/>
+                <a:cs typeface="Times New Roman" panose="02020603050405020304" pitchFamily="18" charset="0"/>
+              </a:rPr>
+              <a:t>Wipe</a:t>
             </a:r>
-            <a:endParaRPr lang="ru-RU" dirty="0"/>
+            <a:r>
+              <a:rPr lang="ru-RU" sz="2000" dirty="0">
+                <a:latin typeface="Times New Roman" panose="02020603050405020304" pitchFamily="18" charset="0"/>
+                <a:cs typeface="Times New Roman" panose="02020603050405020304" pitchFamily="18" charset="0"/>
+              </a:rPr>
+              <a:t> </a:t>
+            </a:r>
+            <a:r>
+              <a:rPr lang="ru-RU" sz="2000" dirty="0" err="1">
+                <a:latin typeface="Times New Roman" panose="02020603050405020304" pitchFamily="18" charset="0"/>
+                <a:cs typeface="Times New Roman" panose="02020603050405020304" pitchFamily="18" charset="0"/>
+              </a:rPr>
+              <a:t>and</a:t>
+            </a:r>
+            <a:r>
+              <a:rPr lang="ru-RU" sz="2000" dirty="0">
+                <a:latin typeface="Times New Roman" panose="02020603050405020304" pitchFamily="18" charset="0"/>
+                <a:cs typeface="Times New Roman" panose="02020603050405020304" pitchFamily="18" charset="0"/>
+              </a:rPr>
+              <a:t> </a:t>
+            </a:r>
+            <a:r>
+              <a:rPr lang="ru-RU" sz="2000" dirty="0" err="1">
+                <a:latin typeface="Times New Roman" panose="02020603050405020304" pitchFamily="18" charset="0"/>
+                <a:cs typeface="Times New Roman" panose="02020603050405020304" pitchFamily="18" charset="0"/>
+              </a:rPr>
+              <a:t>Rebuild</a:t>
+            </a:r>
+            <a:r>
+              <a:rPr lang="ru-RU" sz="2000" dirty="0">
+                <a:latin typeface="Times New Roman" panose="02020603050405020304" pitchFamily="18" charset="0"/>
+                <a:cs typeface="Times New Roman" panose="02020603050405020304" pitchFamily="18" charset="0"/>
+              </a:rPr>
+              <a:t>.</a:t>
+            </a:r>
+          </a:p>
+        </p:txBody>
+      </p:sp>
+      <p:sp>
+        <p:nvSpPr>
+          <p:cNvPr id="12" name="TextBox 11">
+            <a:extLst>
+              <a:ext uri="{FF2B5EF4-FFF2-40B4-BE49-F238E27FC236}">
+                <a16:creationId xmlns:a16="http://schemas.microsoft.com/office/drawing/2014/main" id="{ADA65D82-CBD0-4D60-A1A5-8F09C48AF3C6}"/>
+              </a:ext>
+            </a:extLst>
+          </p:cNvPr>
+          <p:cNvSpPr txBox="1"/>
+          <p:nvPr/>
+        </p:nvSpPr>
+        <p:spPr>
+          <a:xfrm>
+            <a:off x="6440091" y="4442758"/>
+            <a:ext cx="5791200" cy="1938992"/>
+          </a:xfrm>
+          <a:prstGeom prst="rect">
+            <a:avLst/>
+          </a:prstGeom>
+          <a:noFill/>
+        </p:spPr>
+        <p:txBody>
+          <a:bodyPr wrap="square" rtlCol="0">
+            <a:spAutoFit/>
+          </a:bodyPr>
+          <a:lstStyle/>
+          <a:p>
+            <a:pPr algn="l">
+              <a:buFont typeface="Arial" panose="020B0604020202020204" pitchFamily="34" charset="0"/>
+              <a:buChar char="•"/>
+            </a:pPr>
+            <a:r>
+              <a:rPr lang="ru-RU" sz="2000" dirty="0">
+                <a:latin typeface="Times New Roman" panose="02020603050405020304" pitchFamily="18" charset="0"/>
+                <a:cs typeface="Times New Roman" panose="02020603050405020304" pitchFamily="18" charset="0"/>
+              </a:rPr>
+              <a:t>Автофокус при ошибке оно подсвечивается красным.</a:t>
+            </a:r>
+          </a:p>
+          <a:p>
+            <a:pPr algn="l">
+              <a:buFont typeface="Arial" panose="020B0604020202020204" pitchFamily="34" charset="0"/>
+              <a:buChar char="•"/>
+            </a:pPr>
+            <a:r>
+              <a:rPr lang="ru-RU" sz="2000" dirty="0">
+                <a:latin typeface="Times New Roman" panose="02020603050405020304" pitchFamily="18" charset="0"/>
+                <a:cs typeface="Times New Roman" panose="02020603050405020304" pitchFamily="18" charset="0"/>
+              </a:rPr>
+              <a:t>Подсказки в полях «</a:t>
+            </a:r>
+            <a:r>
+              <a:rPr lang="ru-RU" sz="2000" dirty="0" err="1">
+                <a:latin typeface="Times New Roman" panose="02020603050405020304" pitchFamily="18" charset="0"/>
+                <a:cs typeface="Times New Roman" panose="02020603050405020304" pitchFamily="18" charset="0"/>
+              </a:rPr>
+              <a:t>Email</a:t>
+            </a:r>
+            <a:r>
+              <a:rPr lang="ru-RU" sz="2000" dirty="0">
+                <a:latin typeface="Times New Roman" panose="02020603050405020304" pitchFamily="18" charset="0"/>
+                <a:cs typeface="Times New Roman" panose="02020603050405020304" pitchFamily="18" charset="0"/>
+              </a:rPr>
+              <a:t>», «Пароль», «Возраст» отображается серый текст-пример.</a:t>
+            </a:r>
+          </a:p>
+          <a:p>
+            <a:pPr algn="l">
+              <a:buFont typeface="Arial" panose="020B0604020202020204" pitchFamily="34" charset="0"/>
+              <a:buChar char="•"/>
+            </a:pPr>
+            <a:r>
+              <a:rPr lang="ru-RU" sz="2000" dirty="0">
+                <a:latin typeface="Times New Roman" panose="02020603050405020304" pitchFamily="18" charset="0"/>
+                <a:cs typeface="Times New Roman" panose="02020603050405020304" pitchFamily="18" charset="0"/>
+              </a:rPr>
+              <a:t>Сообщения об ошибках под полем выводится текст с описанием проблемы.</a:t>
+            </a:r>
           </a:p>
         </p:txBody>
       </p:sp>
@@ -12991,7 +13452,7 @@
         <p:spPr>
           <a:xfrm>
             <a:off x="714375" y="476250"/>
-            <a:ext cx="11451431" cy="419100"/>
+            <a:ext cx="11451431" cy="615553"/>
           </a:xfrm>
           <a:prstGeom prst="rect">
             <a:avLst/>
@@ -13007,41 +13468,43 @@
           </a:bodyPr>
           <a:lstStyle/>
           <a:p>
-            <a:pPr marL="0" marR="0" lvl="0" indent="0" algn="l" rtl="0">
-              <a:spcBef>
-                <a:spcPts val="0"/>
-              </a:spcBef>
-              <a:spcAft>
-                <a:spcPts val="0"/>
-              </a:spcAft>
-              <a:buNone/>
-            </a:pPr>
             <a:r>
-              <a:rPr lang="en-US" sz="2700" b="1" i="0" u="none" strike="noStrike" cap="none">
+              <a:rPr lang="ru-RU" sz="4000" b="1" dirty="0">
                 <a:solidFill>
                   <a:srgbClr val="0F172A"/>
                 </a:solidFill>
-                <a:latin typeface="Montserrat"/>
-                <a:ea typeface="Montserrat"/>
-                <a:cs typeface="Montserrat"/>
+                <a:latin typeface="Times New Roman" panose="02020603050405020304" pitchFamily="18" charset="0"/>
+                <a:cs typeface="Times New Roman" panose="02020603050405020304" pitchFamily="18" charset="0"/>
                 <a:sym typeface="Montserrat"/>
               </a:rPr>
-              <a:t>Методы и Техники Тестирования</a:t>
+              <a:t>Методы и Техники тестирования</a:t>
             </a:r>
-            <a:endParaRPr/>
+            <a:endParaRPr sz="4000" b="1" dirty="0">
+              <a:solidFill>
+                <a:srgbClr val="0F172A"/>
+              </a:solidFill>
+              <a:latin typeface="Times New Roman" panose="02020603050405020304" pitchFamily="18" charset="0"/>
+              <a:cs typeface="Times New Roman" panose="02020603050405020304" pitchFamily="18" charset="0"/>
+            </a:endParaRPr>
           </a:p>
         </p:txBody>
       </p:sp>
       <p:sp>
         <p:nvSpPr>
-          <p:cNvPr id="247" name="Google Shape;247;p21"/>
+          <p:cNvPr id="4" name="Google Shape;107;p14">
+            <a:extLst>
+              <a:ext uri="{FF2B5EF4-FFF2-40B4-BE49-F238E27FC236}">
+                <a16:creationId xmlns:a16="http://schemas.microsoft.com/office/drawing/2014/main" id="{441E503D-6A10-4F3F-AB77-EB69A93355E8}"/>
+              </a:ext>
+            </a:extLst>
+          </p:cNvPr>
           <p:cNvSpPr/>
           <p:nvPr/>
         </p:nvSpPr>
         <p:spPr>
           <a:xfrm>
-            <a:off x="571500" y="476250"/>
-            <a:ext cx="57150" cy="419100"/>
+            <a:off x="628650" y="476250"/>
+            <a:ext cx="59530" cy="597694"/>
           </a:xfrm>
           <a:prstGeom prst="rect">
             <a:avLst/>
@@ -13068,13 +13531,13 @@
               </a:spcAft>
               <a:buNone/>
             </a:pPr>
-            <a:endParaRPr sz="1800" b="0" i="0" u="none" strike="noStrike" cap="none">
+            <a:endParaRPr sz="2800" b="0" i="0" u="none" strike="noStrike" cap="none">
               <a:solidFill>
                 <a:schemeClr val="dk1"/>
               </a:solidFill>
-              <a:latin typeface="Calibri"/>
+              <a:latin typeface="Times New Roman" panose="02020603050405020304" pitchFamily="18" charset="0"/>
               <a:ea typeface="Calibri"/>
-              <a:cs typeface="Calibri"/>
+              <a:cs typeface="Times New Roman" panose="02020603050405020304" pitchFamily="18" charset="0"/>
               <a:sym typeface="Calibri"/>
             </a:endParaRPr>
           </a:p>
@@ -13114,7 +13577,7 @@
         <p:spPr>
           <a:xfrm>
             <a:off x="714375" y="476250"/>
-            <a:ext cx="11451431" cy="419100"/>
+            <a:ext cx="11451431" cy="615553"/>
           </a:xfrm>
           <a:prstGeom prst="rect">
             <a:avLst/>
@@ -13130,65 +13593,65 @@
           </a:bodyPr>
           <a:lstStyle/>
           <a:p>
-            <a:pPr marL="0" marR="0" lvl="0" indent="0" algn="l" rtl="0">
-              <a:spcBef>
-                <a:spcPts val="0"/>
-              </a:spcBef>
-              <a:spcAft>
-                <a:spcPts val="0"/>
-              </a:spcAft>
-              <a:buNone/>
-            </a:pPr>
             <a:r>
-              <a:rPr lang="en-US" sz="2700" b="1" i="0" u="none" strike="noStrike" cap="none" dirty="0" err="1">
+              <a:rPr lang="ru-RU" sz="4000" b="1" dirty="0">
                 <a:solidFill>
                   <a:srgbClr val="0F172A"/>
                 </a:solidFill>
-                <a:latin typeface="Montserrat"/>
-                <a:ea typeface="Montserrat"/>
-                <a:cs typeface="Montserrat"/>
+                <a:latin typeface="Times New Roman" panose="02020603050405020304" pitchFamily="18" charset="0"/>
+                <a:cs typeface="Times New Roman" panose="02020603050405020304" pitchFamily="18" charset="0"/>
                 <a:sym typeface="Montserrat"/>
               </a:rPr>
-              <a:t>Тест-Кейс</a:t>
+              <a:t>Тест-Кейсы</a:t>
             </a:r>
             <a:r>
-              <a:rPr lang="en-US" sz="2700" b="1" dirty="0">
+              <a:rPr lang="en-US" sz="4000" b="1" dirty="0">
                 <a:solidFill>
                   <a:srgbClr val="0F172A"/>
                 </a:solidFill>
-                <a:latin typeface="Montserrat"/>
-                <a:ea typeface="Montserrat"/>
-                <a:cs typeface="Montserrat"/>
+                <a:latin typeface="Times New Roman" panose="02020603050405020304" pitchFamily="18" charset="0"/>
+                <a:cs typeface="Times New Roman" panose="02020603050405020304" pitchFamily="18" charset="0"/>
                 <a:sym typeface="Montserrat"/>
               </a:rPr>
               <a:t> </a:t>
             </a:r>
             <a:r>
-              <a:rPr lang="ru-RU" sz="2700" b="1" dirty="0">
+              <a:rPr lang="ru-RU" sz="4000" b="1" dirty="0">
                 <a:solidFill>
                   <a:srgbClr val="0F172A"/>
                 </a:solidFill>
-                <a:latin typeface="Montserrat"/>
-                <a:ea typeface="Montserrat"/>
-                <a:cs typeface="Montserrat"/>
+                <a:latin typeface="Times New Roman" panose="02020603050405020304" pitchFamily="18" charset="0"/>
+                <a:cs typeface="Times New Roman" panose="02020603050405020304" pitchFamily="18" charset="0"/>
                 <a:sym typeface="Montserrat"/>
               </a:rPr>
               <a:t>Пример заполнения регистрации</a:t>
             </a:r>
-            <a:endParaRPr dirty="0"/>
+            <a:endParaRPr sz="4000" b="1" dirty="0">
+              <a:solidFill>
+                <a:srgbClr val="0F172A"/>
+              </a:solidFill>
+              <a:latin typeface="Times New Roman" panose="02020603050405020304" pitchFamily="18" charset="0"/>
+              <a:cs typeface="Times New Roman" panose="02020603050405020304" pitchFamily="18" charset="0"/>
+            </a:endParaRPr>
           </a:p>
         </p:txBody>
       </p:sp>
       <p:sp>
         <p:nvSpPr>
-          <p:cNvPr id="274" name="Google Shape;274;p22"/>
+          <p:cNvPr id="4" name="Google Shape;107;p14">
+            <a:extLst>
+              <a:ext uri="{FF2B5EF4-FFF2-40B4-BE49-F238E27FC236}">
+                <a16:creationId xmlns:a16="http://schemas.microsoft.com/office/drawing/2014/main" id="{27B5CF70-89DC-41E5-904D-42A5AA2EFF57}"/>
+              </a:ext>
+            </a:extLst>
+          </p:cNvPr>
           <p:cNvSpPr/>
           <p:nvPr/>
         </p:nvSpPr>
         <p:spPr>
           <a:xfrm>
-            <a:off x="571500" y="476250"/>
-            <a:ext cx="57150" cy="419100"/>
+            <a:off x="628650" y="476250"/>
+            <a:ext cx="59530" cy="597694"/>
           </a:xfrm>
           <a:prstGeom prst="rect">
             <a:avLst/>
@@ -13215,13 +13678,13 @@
               </a:spcAft>
               <a:buNone/>
             </a:pPr>
-            <a:endParaRPr sz="1800" b="0" i="0" u="none" strike="noStrike" cap="none">
+            <a:endParaRPr sz="2800" b="0" i="0" u="none" strike="noStrike" cap="none">
               <a:solidFill>
                 <a:schemeClr val="dk1"/>
               </a:solidFill>
-              <a:latin typeface="Calibri"/>
+              <a:latin typeface="Times New Roman" panose="02020603050405020304" pitchFamily="18" charset="0"/>
               <a:ea typeface="Calibri"/>
-              <a:cs typeface="Calibri"/>
+              <a:cs typeface="Times New Roman" panose="02020603050405020304" pitchFamily="18" charset="0"/>
               <a:sym typeface="Calibri"/>
             </a:endParaRPr>
           </a:p>
@@ -13261,7 +13724,7 @@
         <p:spPr>
           <a:xfrm>
             <a:off x="714375" y="476250"/>
-            <a:ext cx="11451431" cy="419100"/>
+            <a:ext cx="11451431" cy="615553"/>
           </a:xfrm>
           <a:prstGeom prst="rect">
             <a:avLst/>
@@ -13277,111 +13740,56 @@
           </a:bodyPr>
           <a:lstStyle/>
           <a:p>
-            <a:pPr marL="0" marR="0" lvl="0" indent="0" algn="l" rtl="0">
-              <a:spcBef>
-                <a:spcPts val="0"/>
-              </a:spcBef>
-              <a:spcAft>
-                <a:spcPts val="0"/>
-              </a:spcAft>
-              <a:buNone/>
-            </a:pPr>
             <a:r>
-              <a:rPr lang="en-US" sz="2700" b="1" i="0" u="none" strike="noStrike" cap="none" dirty="0" err="1">
+              <a:rPr lang="ru-RU" sz="4000" b="1" dirty="0">
                 <a:solidFill>
                   <a:srgbClr val="0F172A"/>
                 </a:solidFill>
-                <a:latin typeface="Montserrat"/>
-                <a:ea typeface="Montserrat"/>
-                <a:cs typeface="Montserrat"/>
+                <a:latin typeface="Times New Roman" panose="02020603050405020304" pitchFamily="18" charset="0"/>
+                <a:cs typeface="Times New Roman" panose="02020603050405020304" pitchFamily="18" charset="0"/>
                 <a:sym typeface="Montserrat"/>
               </a:rPr>
               <a:t>Тестовое</a:t>
             </a:r>
             <a:r>
-              <a:rPr lang="en-US" sz="2700" b="1" i="0" u="none" strike="noStrike" cap="none" dirty="0">
+              <a:rPr lang="en-US" sz="4000" b="1" dirty="0">
                 <a:solidFill>
                   <a:srgbClr val="0F172A"/>
                 </a:solidFill>
-                <a:latin typeface="Montserrat"/>
-                <a:ea typeface="Montserrat"/>
-                <a:cs typeface="Montserrat"/>
+                <a:latin typeface="Times New Roman" panose="02020603050405020304" pitchFamily="18" charset="0"/>
+                <a:cs typeface="Times New Roman" panose="02020603050405020304" pitchFamily="18" charset="0"/>
                 <a:sym typeface="Montserrat"/>
               </a:rPr>
               <a:t> </a:t>
             </a:r>
             <a:r>
-              <a:rPr lang="en-US" sz="2700" b="1" i="0" u="none" strike="noStrike" cap="none" dirty="0" err="1">
+              <a:rPr lang="ru-RU" sz="4000" b="1" dirty="0">
                 <a:solidFill>
                   <a:srgbClr val="0F172A"/>
                 </a:solidFill>
-                <a:latin typeface="Montserrat"/>
-                <a:ea typeface="Montserrat"/>
-                <a:cs typeface="Montserrat"/>
+                <a:latin typeface="Times New Roman" panose="02020603050405020304" pitchFamily="18" charset="0"/>
+                <a:cs typeface="Times New Roman" panose="02020603050405020304" pitchFamily="18" charset="0"/>
                 <a:sym typeface="Montserrat"/>
               </a:rPr>
               <a:t>Покрытие</a:t>
             </a:r>
             <a:r>
-              <a:rPr lang="en-US" sz="2700" b="1" i="0" u="none" strike="noStrike" cap="none" dirty="0">
+              <a:rPr lang="en-US" sz="4000" b="1" dirty="0">
                 <a:solidFill>
                   <a:srgbClr val="0F172A"/>
                 </a:solidFill>
-                <a:latin typeface="Montserrat"/>
-                <a:ea typeface="Montserrat"/>
-                <a:cs typeface="Montserrat"/>
+                <a:latin typeface="Times New Roman" panose="02020603050405020304" pitchFamily="18" charset="0"/>
+                <a:cs typeface="Times New Roman" panose="02020603050405020304" pitchFamily="18" charset="0"/>
                 <a:sym typeface="Montserrat"/>
               </a:rPr>
               <a:t> </a:t>
             </a:r>
-            <a:endParaRPr dirty="0"/>
-          </a:p>
-        </p:txBody>
-      </p:sp>
-      <p:sp>
-        <p:nvSpPr>
-          <p:cNvPr id="283" name="Google Shape;283;p23"/>
-          <p:cNvSpPr/>
-          <p:nvPr/>
-        </p:nvSpPr>
-        <p:spPr>
-          <a:xfrm>
-            <a:off x="571500" y="476250"/>
-            <a:ext cx="57150" cy="419100"/>
-          </a:xfrm>
-          <a:prstGeom prst="rect">
-            <a:avLst/>
-          </a:prstGeom>
-          <a:solidFill>
-            <a:srgbClr val="4F46E5"/>
-          </a:solidFill>
-          <a:ln>
-            <a:noFill/>
-          </a:ln>
-        </p:spPr>
-        <p:txBody>
-          <a:bodyPr spcFirstLastPara="1" wrap="square" lIns="91425" tIns="45700" rIns="91425" bIns="45700" anchor="ctr" anchorCtr="0">
-            <a:noAutofit/>
-          </a:bodyPr>
-          <a:lstStyle/>
-          <a:p>
-            <a:pPr marL="0" marR="0" lvl="0" indent="0" algn="ctr" rtl="0">
-              <a:spcBef>
-                <a:spcPts val="0"/>
-              </a:spcBef>
-              <a:spcAft>
-                <a:spcPts val="0"/>
-              </a:spcAft>
-              <a:buNone/>
-            </a:pPr>
-            <a:endParaRPr sz="1800" b="0" i="0" u="none" strike="noStrike" cap="none">
+            <a:endParaRPr sz="4000" b="1" dirty="0">
               <a:solidFill>
-                <a:schemeClr val="dk1"/>
+                <a:srgbClr val="0F172A"/>
               </a:solidFill>
-              <a:latin typeface="Calibri"/>
-              <a:ea typeface="Calibri"/>
-              <a:cs typeface="Calibri"/>
-              <a:sym typeface="Calibri"/>
+              <a:latin typeface="Times New Roman" panose="02020603050405020304" pitchFamily="18" charset="0"/>
+              <a:cs typeface="Times New Roman" panose="02020603050405020304" pitchFamily="18" charset="0"/>
             </a:endParaRPr>
           </a:p>
         </p:txBody>
@@ -13401,7 +13809,7 @@
         <p:spPr>
           <a:xfrm>
             <a:off x="5659395" y="2125362"/>
-            <a:ext cx="1954381" cy="307777"/>
+            <a:ext cx="1853392" cy="307777"/>
           </a:xfrm>
           <a:prstGeom prst="rect">
             <a:avLst/>
@@ -13415,22 +13823,91 @@
           <a:lstStyle/>
           <a:p>
             <a:r>
-              <a:rPr lang="ru-RU" dirty="0"/>
+              <a:rPr lang="ru-RU" dirty="0">
+                <a:latin typeface="Times New Roman" panose="02020603050405020304" pitchFamily="18" charset="0"/>
+                <a:cs typeface="Times New Roman" panose="02020603050405020304" pitchFamily="18" charset="0"/>
+              </a:rPr>
               <a:t>ТЕСТ </a:t>
             </a:r>
             <a:r>
-              <a:rPr lang="ru-RU" dirty="0" err="1"/>
+              <a:rPr lang="ru-RU" dirty="0" err="1">
+                <a:latin typeface="Times New Roman" panose="02020603050405020304" pitchFamily="18" charset="0"/>
+                <a:cs typeface="Times New Roman" panose="02020603050405020304" pitchFamily="18" charset="0"/>
+              </a:rPr>
               <a:t>ит</a:t>
             </a:r>
             <a:r>
-              <a:rPr lang="ru-RU" dirty="0"/>
+              <a:rPr lang="ru-RU" dirty="0">
+                <a:latin typeface="Times New Roman" panose="02020603050405020304" pitchFamily="18" charset="0"/>
+                <a:cs typeface="Times New Roman" panose="02020603050405020304" pitchFamily="18" charset="0"/>
+              </a:rPr>
               <a:t> и </a:t>
             </a:r>
             <a:r>
-              <a:rPr lang="ru-RU" dirty="0" err="1"/>
+              <a:rPr lang="ru-RU" dirty="0" err="1">
+                <a:latin typeface="Times New Roman" panose="02020603050405020304" pitchFamily="18" charset="0"/>
+                <a:cs typeface="Times New Roman" panose="02020603050405020304" pitchFamily="18" charset="0"/>
+              </a:rPr>
               <a:t>покртытие</a:t>
             </a:r>
-            <a:endParaRPr lang="ru-RU" dirty="0"/>
+            <a:endParaRPr lang="ru-RU" dirty="0">
+              <a:latin typeface="Times New Roman" panose="02020603050405020304" pitchFamily="18" charset="0"/>
+              <a:cs typeface="Times New Roman" panose="02020603050405020304" pitchFamily="18" charset="0"/>
+            </a:endParaRPr>
+          </a:p>
+        </p:txBody>
+      </p:sp>
+      <p:sp>
+        <p:nvSpPr>
+          <p:cNvPr id="5" name="Google Shape;107;p14">
+            <a:extLst>
+              <a:ext uri="{FF2B5EF4-FFF2-40B4-BE49-F238E27FC236}">
+                <a16:creationId xmlns:a16="http://schemas.microsoft.com/office/drawing/2014/main" id="{245A2A05-F583-4148-A15C-29FF35C7D6FB}"/>
+              </a:ext>
+            </a:extLst>
+          </p:cNvPr>
+          <p:cNvSpPr/>
+          <p:nvPr/>
+        </p:nvSpPr>
+        <p:spPr>
+          <a:xfrm>
+            <a:off x="628650" y="476250"/>
+            <a:ext cx="59530" cy="597694"/>
+          </a:xfrm>
+          <a:prstGeom prst="rect">
+            <a:avLst/>
+          </a:prstGeom>
+          <a:solidFill>
+            <a:srgbClr val="4F46E5"/>
+          </a:solidFill>
+          <a:ln>
+            <a:noFill/>
+          </a:ln>
+        </p:spPr>
+        <p:txBody>
+          <a:bodyPr spcFirstLastPara="1" wrap="square" lIns="91425" tIns="45700" rIns="91425" bIns="45700" anchor="ctr" anchorCtr="0">
+            <a:noAutofit/>
+          </a:bodyPr>
+          <a:lstStyle/>
+          <a:p>
+            <a:pPr marL="0" marR="0" lvl="0" indent="0" algn="ctr" rtl="0">
+              <a:spcBef>
+                <a:spcPts val="0"/>
+              </a:spcBef>
+              <a:spcAft>
+                <a:spcPts val="0"/>
+              </a:spcAft>
+              <a:buNone/>
+            </a:pPr>
+            <a:endParaRPr sz="2800" b="0" i="0" u="none" strike="noStrike" cap="none">
+              <a:solidFill>
+                <a:schemeClr val="dk1"/>
+              </a:solidFill>
+              <a:latin typeface="Times New Roman" panose="02020603050405020304" pitchFamily="18" charset="0"/>
+              <a:ea typeface="Calibri"/>
+              <a:cs typeface="Times New Roman" panose="02020603050405020304" pitchFamily="18" charset="0"/>
+              <a:sym typeface="Calibri"/>
+            </a:endParaRPr>
           </a:p>
         </p:txBody>
       </p:sp>
@@ -13468,7 +13945,7 @@
         <p:spPr>
           <a:xfrm>
             <a:off x="714375" y="476250"/>
-            <a:ext cx="11451431" cy="419100"/>
+            <a:ext cx="11451431" cy="615553"/>
           </a:xfrm>
           <a:prstGeom prst="rect">
             <a:avLst/>
@@ -13484,75 +13961,23 @@
           </a:bodyPr>
           <a:lstStyle/>
           <a:p>
-            <a:pPr marL="0" marR="0" lvl="0" indent="0" algn="l" rtl="0">
-              <a:spcBef>
-                <a:spcPts val="0"/>
-              </a:spcBef>
-              <a:spcAft>
-                <a:spcPts val="0"/>
-              </a:spcAft>
-              <a:buNone/>
-            </a:pPr>
             <a:r>
-              <a:rPr lang="en-US" sz="2700" b="1" i="0" u="none" strike="noStrike" cap="none">
+              <a:rPr lang="ru-RU" sz="4000" b="1" dirty="0">
                 <a:solidFill>
                   <a:srgbClr val="0F172A"/>
                 </a:solidFill>
-                <a:latin typeface="Montserrat"/>
-                <a:ea typeface="Montserrat"/>
-                <a:cs typeface="Montserrat"/>
+                <a:latin typeface="Times New Roman" panose="02020603050405020304" pitchFamily="18" charset="0"/>
+                <a:cs typeface="Times New Roman" panose="02020603050405020304" pitchFamily="18" charset="0"/>
                 <a:sym typeface="Montserrat"/>
               </a:rPr>
-              <a:t>Выводы и Перспективы Проекта</a:t>
+              <a:t>Вывод и перспективы</a:t>
             </a:r>
-            <a:endParaRPr/>
-          </a:p>
-        </p:txBody>
-      </p:sp>
-      <p:sp>
-        <p:nvSpPr>
-          <p:cNvPr id="305" name="Google Shape;305;p24"/>
-          <p:cNvSpPr/>
-          <p:nvPr/>
-        </p:nvSpPr>
-        <p:spPr>
-          <a:xfrm>
-            <a:off x="571500" y="476250"/>
-            <a:ext cx="57150" cy="419100"/>
-          </a:xfrm>
-          <a:prstGeom prst="rect">
-            <a:avLst/>
-          </a:prstGeom>
-          <a:solidFill>
-            <a:srgbClr val="4F46E5"/>
-          </a:solidFill>
-          <a:ln>
-            <a:noFill/>
-          </a:ln>
-        </p:spPr>
-        <p:txBody>
-          <a:bodyPr spcFirstLastPara="1" wrap="square" lIns="91425" tIns="45700" rIns="91425" bIns="45700" anchor="ctr" anchorCtr="0">
-            <a:noAutofit/>
-          </a:bodyPr>
-          <a:lstStyle/>
-          <a:p>
-            <a:pPr marL="0" marR="0" lvl="0" indent="0" algn="ctr" rtl="0">
-              <a:spcBef>
-                <a:spcPts val="0"/>
-              </a:spcBef>
-              <a:spcAft>
-                <a:spcPts val="0"/>
-              </a:spcAft>
-              <a:buNone/>
-            </a:pPr>
-            <a:endParaRPr sz="1800" b="0" i="0" u="none" strike="noStrike" cap="none">
+            <a:endParaRPr sz="4000" b="1" dirty="0">
               <a:solidFill>
-                <a:schemeClr val="dk1"/>
+                <a:srgbClr val="0F172A"/>
               </a:solidFill>
-              <a:latin typeface="Calibri"/>
-              <a:ea typeface="Calibri"/>
-              <a:cs typeface="Calibri"/>
-              <a:sym typeface="Calibri"/>
+              <a:latin typeface="Times New Roman" panose="02020603050405020304" pitchFamily="18" charset="0"/>
+              <a:cs typeface="Times New Roman" panose="02020603050405020304" pitchFamily="18" charset="0"/>
             </a:endParaRPr>
           </a:p>
         </p:txBody>
@@ -13586,77 +14011,39 @@
           <a:lstStyle/>
           <a:p>
             <a:r>
-              <a:rPr lang="ru-RU" dirty="0"/>
+              <a:rPr lang="ru-RU" dirty="0">
+                <a:latin typeface="Times New Roman" panose="02020603050405020304" pitchFamily="18" charset="0"/>
+                <a:cs typeface="Times New Roman" panose="02020603050405020304" pitchFamily="18" charset="0"/>
+              </a:rPr>
               <a:t>Стадия готовности</a:t>
             </a:r>
           </a:p>
           <a:p>
             <a:r>
-              <a:rPr lang="ru-RU" dirty="0"/>
+              <a:rPr lang="ru-RU" dirty="0">
+                <a:latin typeface="Times New Roman" panose="02020603050405020304" pitchFamily="18" charset="0"/>
+                <a:cs typeface="Times New Roman" panose="02020603050405020304" pitchFamily="18" charset="0"/>
+              </a:rPr>
               <a:t>Что удалось сделать</a:t>
             </a:r>
           </a:p>
           <a:p>
             <a:r>
-              <a:rPr lang="ru-RU" dirty="0"/>
+              <a:rPr lang="ru-RU" dirty="0">
+                <a:latin typeface="Times New Roman" panose="02020603050405020304" pitchFamily="18" charset="0"/>
+                <a:cs typeface="Times New Roman" panose="02020603050405020304" pitchFamily="18" charset="0"/>
+              </a:rPr>
               <a:t>Что хотелось бы реализовать по другому </a:t>
             </a:r>
           </a:p>
           <a:p>
             <a:r>
-              <a:rPr lang="ru-RU" dirty="0"/>
+              <a:rPr lang="ru-RU" dirty="0">
+                <a:latin typeface="Times New Roman" panose="02020603050405020304" pitchFamily="18" charset="0"/>
+                <a:cs typeface="Times New Roman" panose="02020603050405020304" pitchFamily="18" charset="0"/>
+              </a:rPr>
               <a:t>Перспективность </a:t>
             </a:r>
-          </a:p>
-        </p:txBody>
-      </p:sp>
-      <p:sp>
-        <p:nvSpPr>
-          <p:cNvPr id="3" name="Прямоугольник 2">
-            <a:extLst>
-              <a:ext uri="{FF2B5EF4-FFF2-40B4-BE49-F238E27FC236}">
-                <a16:creationId xmlns:a16="http://schemas.microsoft.com/office/drawing/2014/main" id="{8629707A-6DE2-D97B-F147-F17C5CF89B82}"/>
-              </a:ext>
-            </a:extLst>
-          </p:cNvPr>
-          <p:cNvSpPr/>
-          <p:nvPr/>
-        </p:nvSpPr>
-        <p:spPr>
-          <a:xfrm>
-            <a:off x="495298" y="3429000"/>
-            <a:ext cx="2374899" cy="2400300"/>
-          </a:xfrm>
-          <a:prstGeom prst="rect">
-            <a:avLst/>
-          </a:prstGeom>
-        </p:spPr>
-        <p:style>
-          <a:lnRef idx="2">
-            <a:schemeClr val="accent1">
-              <a:shade val="15000"/>
-            </a:schemeClr>
-          </a:lnRef>
-          <a:fillRef idx="1">
-            <a:schemeClr val="accent1"/>
-          </a:fillRef>
-          <a:effectRef idx="0">
-            <a:schemeClr val="accent1"/>
-          </a:effectRef>
-          <a:fontRef idx="minor">
-            <a:schemeClr val="lt1"/>
-          </a:fontRef>
-        </p:style>
-        <p:txBody>
-          <a:bodyPr rtlCol="0" anchor="ctr"/>
-          <a:lstStyle/>
-          <a:p>
-            <a:pPr algn="ctr"/>
-            <a:endParaRPr lang="ru-RU">
-              <a:solidFill>
-                <a:schemeClr val="tx1"/>
-              </a:solidFill>
-            </a:endParaRPr>
           </a:p>
         </p:txBody>
       </p:sp>
@@ -13706,6 +14093,8 @@
               <a:solidFill>
                 <a:schemeClr val="tx1"/>
               </a:solidFill>
+              <a:latin typeface="Times New Roman" panose="02020603050405020304" pitchFamily="18" charset="0"/>
+              <a:cs typeface="Times New Roman" panose="02020603050405020304" pitchFamily="18" charset="0"/>
             </a:endParaRPr>
           </a:p>
         </p:txBody>
@@ -13801,6 +14190,172 @@
           </a:p>
         </p:txBody>
       </p:sp>
+      <p:pic>
+        <p:nvPicPr>
+          <p:cNvPr id="8" name="Рисунок 7">
+            <a:extLst>
+              <a:ext uri="{FF2B5EF4-FFF2-40B4-BE49-F238E27FC236}">
+                <a16:creationId xmlns:a16="http://schemas.microsoft.com/office/drawing/2014/main" id="{9C1E1B80-D77D-40C7-8B35-1BD03A93AC7C}"/>
+              </a:ext>
+            </a:extLst>
+          </p:cNvPr>
+          <p:cNvPicPr>
+            <a:picLocks noChangeAspect="1"/>
+          </p:cNvPicPr>
+          <p:nvPr/>
+        </p:nvPicPr>
+        <p:blipFill>
+          <a:blip r:embed="rId3"/>
+          <a:stretch>
+            <a:fillRect/>
+          </a:stretch>
+        </p:blipFill>
+        <p:spPr>
+          <a:xfrm>
+            <a:off x="9253453" y="3636995"/>
+            <a:ext cx="2359194" cy="2266312"/>
+          </a:xfrm>
+          <a:prstGeom prst="rect">
+            <a:avLst/>
+          </a:prstGeom>
+        </p:spPr>
+      </p:pic>
+      <p:sp>
+        <p:nvSpPr>
+          <p:cNvPr id="13" name="Google Shape;107;p14">
+            <a:extLst>
+              <a:ext uri="{FF2B5EF4-FFF2-40B4-BE49-F238E27FC236}">
+                <a16:creationId xmlns:a16="http://schemas.microsoft.com/office/drawing/2014/main" id="{368CC448-9031-4AF6-9A71-523F0BBA1C36}"/>
+              </a:ext>
+            </a:extLst>
+          </p:cNvPr>
+          <p:cNvSpPr/>
+          <p:nvPr/>
+        </p:nvSpPr>
+        <p:spPr>
+          <a:xfrm>
+            <a:off x="628650" y="476250"/>
+            <a:ext cx="59530" cy="597694"/>
+          </a:xfrm>
+          <a:prstGeom prst="rect">
+            <a:avLst/>
+          </a:prstGeom>
+          <a:solidFill>
+            <a:srgbClr val="4F46E5"/>
+          </a:solidFill>
+          <a:ln>
+            <a:noFill/>
+          </a:ln>
+        </p:spPr>
+        <p:txBody>
+          <a:bodyPr spcFirstLastPara="1" wrap="square" lIns="91425" tIns="45700" rIns="91425" bIns="45700" anchor="ctr" anchorCtr="0">
+            <a:noAutofit/>
+          </a:bodyPr>
+          <a:lstStyle/>
+          <a:p>
+            <a:pPr marL="0" marR="0" lvl="0" indent="0" algn="ctr" rtl="0">
+              <a:spcBef>
+                <a:spcPts val="0"/>
+              </a:spcBef>
+              <a:spcAft>
+                <a:spcPts val="0"/>
+              </a:spcAft>
+              <a:buNone/>
+            </a:pPr>
+            <a:endParaRPr sz="2800" b="0" i="0" u="none" strike="noStrike" cap="none">
+              <a:solidFill>
+                <a:schemeClr val="dk1"/>
+              </a:solidFill>
+              <a:latin typeface="Times New Roman" panose="02020603050405020304" pitchFamily="18" charset="0"/>
+              <a:ea typeface="Calibri"/>
+              <a:cs typeface="Times New Roman" panose="02020603050405020304" pitchFamily="18" charset="0"/>
+              <a:sym typeface="Calibri"/>
+            </a:endParaRPr>
+          </a:p>
+        </p:txBody>
+      </p:sp>
+      <p:sp>
+        <p:nvSpPr>
+          <p:cNvPr id="14" name="Прямоугольник 13">
+            <a:extLst>
+              <a:ext uri="{FF2B5EF4-FFF2-40B4-BE49-F238E27FC236}">
+                <a16:creationId xmlns:a16="http://schemas.microsoft.com/office/drawing/2014/main" id="{3B0DB236-AE29-4AAA-9CD5-92C2BD79E1CE}"/>
+              </a:ext>
+            </a:extLst>
+          </p:cNvPr>
+          <p:cNvSpPr/>
+          <p:nvPr/>
+        </p:nvSpPr>
+        <p:spPr>
+          <a:xfrm>
+            <a:off x="579352" y="3581400"/>
+            <a:ext cx="2443247" cy="2377503"/>
+          </a:xfrm>
+          <a:prstGeom prst="rect">
+            <a:avLst/>
+          </a:prstGeom>
+        </p:spPr>
+        <p:style>
+          <a:lnRef idx="2">
+            <a:schemeClr val="accent1">
+              <a:shade val="15000"/>
+            </a:schemeClr>
+          </a:lnRef>
+          <a:fillRef idx="1">
+            <a:schemeClr val="accent1"/>
+          </a:fillRef>
+          <a:effectRef idx="0">
+            <a:schemeClr val="accent1"/>
+          </a:effectRef>
+          <a:fontRef idx="minor">
+            <a:schemeClr val="lt1"/>
+          </a:fontRef>
+        </p:style>
+        <p:txBody>
+          <a:bodyPr rtlCol="0" anchor="ctr"/>
+          <a:lstStyle/>
+          <a:p>
+            <a:pPr algn="ctr"/>
+            <a:endParaRPr lang="ru-RU">
+              <a:solidFill>
+                <a:schemeClr val="tx1"/>
+              </a:solidFill>
+              <a:latin typeface="Times New Roman" panose="02020603050405020304" pitchFamily="18" charset="0"/>
+              <a:cs typeface="Times New Roman" panose="02020603050405020304" pitchFamily="18" charset="0"/>
+            </a:endParaRPr>
+          </a:p>
+        </p:txBody>
+      </p:sp>
+      <p:pic>
+        <p:nvPicPr>
+          <p:cNvPr id="15" name="Рисунок 14">
+            <a:extLst>
+              <a:ext uri="{FF2B5EF4-FFF2-40B4-BE49-F238E27FC236}">
+                <a16:creationId xmlns:a16="http://schemas.microsoft.com/office/drawing/2014/main" id="{4F1A0611-9048-438A-83FC-A3849244FE6D}"/>
+              </a:ext>
+            </a:extLst>
+          </p:cNvPr>
+          <p:cNvPicPr>
+            <a:picLocks noChangeAspect="1"/>
+          </p:cNvPicPr>
+          <p:nvPr/>
+        </p:nvPicPr>
+        <p:blipFill>
+          <a:blip r:embed="rId4"/>
+          <a:stretch>
+            <a:fillRect/>
+          </a:stretch>
+        </p:blipFill>
+        <p:spPr>
+          <a:xfrm>
+            <a:off x="624629" y="3636995"/>
+            <a:ext cx="2349552" cy="2266312"/>
+          </a:xfrm>
+          <a:prstGeom prst="rect">
+            <a:avLst/>
+          </a:prstGeom>
+        </p:spPr>
+      </p:pic>
     </p:spTree>
   </p:cSld>
   <p:clrMapOvr>
@@ -13875,78 +14430,21 @@
               <a:buNone/>
             </a:pPr>
             <a:r>
-              <a:rPr lang="en-US" sz="4800" b="1" i="0" u="none" strike="noStrike" cap="none" dirty="0" err="1">
+              <a:rPr lang="ru-RU" sz="4800" b="1" i="0" u="none" strike="noStrike" cap="none" dirty="0">
                 <a:solidFill>
                   <a:srgbClr val="FFFFFF"/>
                 </a:solidFill>
-                <a:latin typeface="Montserrat"/>
+                <a:latin typeface="Times New Roman" panose="02020603050405020304" pitchFamily="18" charset="0"/>
                 <a:ea typeface="Montserrat"/>
-                <a:cs typeface="Montserrat"/>
+                <a:cs typeface="Times New Roman" panose="02020603050405020304" pitchFamily="18" charset="0"/>
                 <a:sym typeface="Montserrat"/>
               </a:rPr>
-              <a:t>Спасибо</a:t>
+              <a:t>Спасибо за Внимание!</a:t>
             </a:r>
-            <a:r>
-              <a:rPr lang="en-US" sz="4800" b="1" i="0" u="none" strike="noStrike" cap="none" dirty="0">
-                <a:solidFill>
-                  <a:srgbClr val="FFFFFF"/>
-                </a:solidFill>
-                <a:latin typeface="Montserrat"/>
-                <a:ea typeface="Montserrat"/>
-                <a:cs typeface="Montserrat"/>
-                <a:sym typeface="Montserrat"/>
-              </a:rPr>
-              <a:t> </a:t>
-            </a:r>
-            <a:r>
-              <a:rPr lang="en-US" sz="4800" b="1" i="0" u="none" strike="noStrike" cap="none" dirty="0" err="1">
-                <a:solidFill>
-                  <a:srgbClr val="FFFFFF"/>
-                </a:solidFill>
-                <a:latin typeface="Montserrat"/>
-                <a:ea typeface="Montserrat"/>
-                <a:cs typeface="Montserrat"/>
-                <a:sym typeface="Montserrat"/>
-              </a:rPr>
-              <a:t>за</a:t>
-            </a:r>
-            <a:r>
-              <a:rPr lang="en-US" sz="4800" b="1" i="0" u="none" strike="noStrike" cap="none" dirty="0">
-                <a:solidFill>
-                  <a:srgbClr val="FFFFFF"/>
-                </a:solidFill>
-                <a:latin typeface="Montserrat"/>
-                <a:ea typeface="Montserrat"/>
-                <a:cs typeface="Montserrat"/>
-                <a:sym typeface="Montserrat"/>
-              </a:rPr>
-              <a:t> </a:t>
-            </a:r>
-            <a:r>
-              <a:rPr lang="en-US" sz="4800" b="1" i="0" u="none" strike="noStrike" cap="none" dirty="0" err="1">
-                <a:solidFill>
-                  <a:srgbClr val="FFFFFF"/>
-                </a:solidFill>
-                <a:latin typeface="Montserrat"/>
-                <a:ea typeface="Montserrat"/>
-                <a:cs typeface="Montserrat"/>
-                <a:sym typeface="Montserrat"/>
-              </a:rPr>
-              <a:t>Внимание</a:t>
-            </a:r>
-            <a:r>
-              <a:rPr lang="en-US" sz="4800" b="1" i="0" u="none" strike="noStrike" cap="none" dirty="0">
-                <a:solidFill>
-                  <a:srgbClr val="FFFFFF"/>
-                </a:solidFill>
-                <a:latin typeface="Montserrat"/>
-                <a:ea typeface="Montserrat"/>
-                <a:cs typeface="Montserrat"/>
-                <a:sym typeface="Montserrat"/>
-              </a:rPr>
-              <a:t>!</a:t>
-            </a:r>
-            <a:endParaRPr dirty="0"/>
+            <a:endParaRPr dirty="0">
+              <a:latin typeface="Times New Roman" panose="02020603050405020304" pitchFamily="18" charset="0"/>
+              <a:cs typeface="Times New Roman" panose="02020603050405020304" pitchFamily="18" charset="0"/>
+            </a:endParaRPr>
           </a:p>
         </p:txBody>
       </p:sp>
@@ -13959,7 +14457,7 @@
         <p:spPr>
           <a:xfrm>
             <a:off x="4257674" y="2658070"/>
-            <a:ext cx="3676650" cy="923330"/>
+            <a:ext cx="3676650" cy="461665"/>
           </a:xfrm>
           <a:prstGeom prst="rect">
             <a:avLst/>
@@ -13988,206 +14486,21 @@
               <a:buNone/>
             </a:pPr>
             <a:r>
-              <a:rPr lang="en-US" sz="2000" b="0" i="0" u="none" strike="noStrike" cap="none" dirty="0" err="1">
+              <a:rPr lang="ru-RU" sz="2000" b="0" i="0" u="none" strike="noStrike" cap="none" dirty="0">
                 <a:solidFill>
                   <a:srgbClr val="38BDF8"/>
                 </a:solidFill>
-                <a:latin typeface="Inter"/>
+                <a:latin typeface="Times New Roman" panose="02020603050405020304" pitchFamily="18" charset="0"/>
                 <a:ea typeface="Inter"/>
-                <a:cs typeface="Inter"/>
+                <a:cs typeface="Times New Roman" panose="02020603050405020304" pitchFamily="18" charset="0"/>
                 <a:sym typeface="Inter"/>
               </a:rPr>
-              <a:t>Готов</a:t>
+              <a:t>Готов ответить на ваши вопросы</a:t>
             </a:r>
-            <a:r>
-              <a:rPr lang="en-US" sz="2000" b="0" i="0" u="none" strike="noStrike" cap="none" dirty="0">
-                <a:solidFill>
-                  <a:srgbClr val="38BDF8"/>
-                </a:solidFill>
-                <a:latin typeface="Inter"/>
-                <a:ea typeface="Inter"/>
-                <a:cs typeface="Inter"/>
-                <a:sym typeface="Inter"/>
-              </a:rPr>
-              <a:t> </a:t>
-            </a:r>
-            <a:r>
-              <a:rPr lang="en-US" sz="2000" b="0" i="0" u="none" strike="noStrike" cap="none" dirty="0" err="1">
-                <a:solidFill>
-                  <a:srgbClr val="38BDF8"/>
-                </a:solidFill>
-                <a:latin typeface="Inter"/>
-                <a:ea typeface="Inter"/>
-                <a:cs typeface="Inter"/>
-                <a:sym typeface="Inter"/>
-              </a:rPr>
-              <a:t>ответить</a:t>
-            </a:r>
-            <a:r>
-              <a:rPr lang="en-US" sz="2000" b="0" i="0" u="none" strike="noStrike" cap="none" dirty="0">
-                <a:solidFill>
-                  <a:srgbClr val="38BDF8"/>
-                </a:solidFill>
-                <a:latin typeface="Inter"/>
-                <a:ea typeface="Inter"/>
-                <a:cs typeface="Inter"/>
-                <a:sym typeface="Inter"/>
-              </a:rPr>
-              <a:t> </a:t>
-            </a:r>
-            <a:r>
-              <a:rPr lang="en-US" sz="2000" b="0" i="0" u="none" strike="noStrike" cap="none" dirty="0" err="1">
-                <a:solidFill>
-                  <a:srgbClr val="38BDF8"/>
-                </a:solidFill>
-                <a:latin typeface="Inter"/>
-                <a:ea typeface="Inter"/>
-                <a:cs typeface="Inter"/>
-                <a:sym typeface="Inter"/>
-              </a:rPr>
-              <a:t>на</a:t>
-            </a:r>
-            <a:r>
-              <a:rPr lang="en-US" sz="2000" b="0" i="0" u="none" strike="noStrike" cap="none" dirty="0">
-                <a:solidFill>
-                  <a:srgbClr val="38BDF8"/>
-                </a:solidFill>
-                <a:latin typeface="Inter"/>
-                <a:ea typeface="Inter"/>
-                <a:cs typeface="Inter"/>
-                <a:sym typeface="Inter"/>
-              </a:rPr>
-              <a:t> </a:t>
-            </a:r>
-            <a:r>
-              <a:rPr lang="en-US" sz="2000" b="0" i="0" u="none" strike="noStrike" cap="none" dirty="0" err="1">
-                <a:solidFill>
-                  <a:srgbClr val="38BDF8"/>
-                </a:solidFill>
-                <a:latin typeface="Inter"/>
-                <a:ea typeface="Inter"/>
-                <a:cs typeface="Inter"/>
-                <a:sym typeface="Inter"/>
-              </a:rPr>
-              <a:t>ваши</a:t>
-            </a:r>
-            <a:r>
-              <a:rPr lang="en-US" sz="2000" b="0" i="0" u="none" strike="noStrike" cap="none" dirty="0">
-                <a:solidFill>
-                  <a:srgbClr val="38BDF8"/>
-                </a:solidFill>
-                <a:latin typeface="Inter"/>
-                <a:ea typeface="Inter"/>
-                <a:cs typeface="Inter"/>
-                <a:sym typeface="Inter"/>
-              </a:rPr>
-              <a:t> </a:t>
-            </a:r>
-            <a:r>
-              <a:rPr lang="en-US" sz="2000" b="0" i="0" u="none" strike="noStrike" cap="none" dirty="0" err="1">
-                <a:solidFill>
-                  <a:srgbClr val="38BDF8"/>
-                </a:solidFill>
-                <a:latin typeface="Inter"/>
-                <a:ea typeface="Inter"/>
-                <a:cs typeface="Inter"/>
-                <a:sym typeface="Inter"/>
-              </a:rPr>
-              <a:t>вопросы</a:t>
-            </a:r>
-            <a:endParaRPr sz="1600" dirty="0"/>
-          </a:p>
-        </p:txBody>
-      </p:sp>
-      <p:sp>
-        <p:nvSpPr>
-          <p:cNvPr id="2" name="Прямоугольник 1">
-            <a:extLst>
-              <a:ext uri="{FF2B5EF4-FFF2-40B4-BE49-F238E27FC236}">
-                <a16:creationId xmlns:a16="http://schemas.microsoft.com/office/drawing/2014/main" id="{51CA8A69-4007-5602-EFB9-941DD06C7D96}"/>
-              </a:ext>
-            </a:extLst>
-          </p:cNvPr>
-          <p:cNvSpPr/>
-          <p:nvPr/>
-        </p:nvSpPr>
-        <p:spPr>
-          <a:xfrm>
-            <a:off x="495298" y="3429000"/>
-            <a:ext cx="2374899" cy="2400300"/>
-          </a:xfrm>
-          <a:prstGeom prst="rect">
-            <a:avLst/>
-          </a:prstGeom>
-        </p:spPr>
-        <p:style>
-          <a:lnRef idx="2">
-            <a:schemeClr val="accent1">
-              <a:shade val="15000"/>
-            </a:schemeClr>
-          </a:lnRef>
-          <a:fillRef idx="1">
-            <a:schemeClr val="accent1"/>
-          </a:fillRef>
-          <a:effectRef idx="0">
-            <a:schemeClr val="accent1"/>
-          </a:effectRef>
-          <a:fontRef idx="minor">
-            <a:schemeClr val="lt1"/>
-          </a:fontRef>
-        </p:style>
-        <p:txBody>
-          <a:bodyPr rtlCol="0" anchor="ctr"/>
-          <a:lstStyle/>
-          <a:p>
-            <a:pPr algn="ctr"/>
-            <a:endParaRPr lang="ru-RU"/>
-          </a:p>
-        </p:txBody>
-      </p:sp>
-      <p:sp>
-        <p:nvSpPr>
-          <p:cNvPr id="3" name="Прямоугольник 2">
-            <a:extLst>
-              <a:ext uri="{FF2B5EF4-FFF2-40B4-BE49-F238E27FC236}">
-                <a16:creationId xmlns:a16="http://schemas.microsoft.com/office/drawing/2014/main" id="{C395DAF0-3FF1-5738-35D3-A11DDB46615C}"/>
-              </a:ext>
-            </a:extLst>
-          </p:cNvPr>
-          <p:cNvSpPr/>
-          <p:nvPr/>
-        </p:nvSpPr>
-        <p:spPr>
-          <a:xfrm>
-            <a:off x="9169400" y="3581400"/>
-            <a:ext cx="2527300" cy="2377503"/>
-          </a:xfrm>
-          <a:prstGeom prst="rect">
-            <a:avLst/>
-          </a:prstGeom>
-        </p:spPr>
-        <p:style>
-          <a:lnRef idx="2">
-            <a:schemeClr val="accent1">
-              <a:shade val="15000"/>
-            </a:schemeClr>
-          </a:lnRef>
-          <a:fillRef idx="1">
-            <a:schemeClr val="accent1"/>
-          </a:fillRef>
-          <a:effectRef idx="0">
-            <a:schemeClr val="accent1"/>
-          </a:effectRef>
-          <a:fontRef idx="minor">
-            <a:schemeClr val="lt1"/>
-          </a:fontRef>
-        </p:style>
-        <p:txBody>
-          <a:bodyPr rtlCol="0" anchor="ctr"/>
-          <a:lstStyle/>
-          <a:p>
-            <a:pPr algn="ctr"/>
-            <a:endParaRPr lang="ru-RU"/>
+            <a:endParaRPr sz="1600" dirty="0">
+              <a:latin typeface="Times New Roman" panose="02020603050405020304" pitchFamily="18" charset="0"/>
+              <a:cs typeface="Times New Roman" panose="02020603050405020304" pitchFamily="18" charset="0"/>
+            </a:endParaRPr>
           </a:p>
         </p:txBody>
       </p:sp>
@@ -14246,10 +14559,62 @@
       </p:sp>
       <p:sp>
         <p:nvSpPr>
-          <p:cNvPr id="5" name="TextBox 4">
+          <p:cNvPr id="11" name="Прямоугольник 10">
             <a:extLst>
               <a:ext uri="{FF2B5EF4-FFF2-40B4-BE49-F238E27FC236}">
-                <a16:creationId xmlns:a16="http://schemas.microsoft.com/office/drawing/2014/main" id="{12E70F2F-31FD-2E36-A011-2B557741C000}"/>
+                <a16:creationId xmlns:a16="http://schemas.microsoft.com/office/drawing/2014/main" id="{8B05C209-43DE-48DE-824E-E61F5FA3421A}"/>
+              </a:ext>
+            </a:extLst>
+          </p:cNvPr>
+          <p:cNvSpPr/>
+          <p:nvPr/>
+        </p:nvSpPr>
+        <p:spPr>
+          <a:xfrm>
+            <a:off x="9169400" y="3581400"/>
+            <a:ext cx="2527300" cy="2377503"/>
+          </a:xfrm>
+          <a:prstGeom prst="rect">
+            <a:avLst/>
+          </a:prstGeom>
+        </p:spPr>
+        <p:style>
+          <a:lnRef idx="2">
+            <a:schemeClr val="accent1">
+              <a:shade val="15000"/>
+            </a:schemeClr>
+          </a:lnRef>
+          <a:fillRef idx="1">
+            <a:schemeClr val="accent1"/>
+          </a:fillRef>
+          <a:effectRef idx="0">
+            <a:schemeClr val="accent1"/>
+          </a:effectRef>
+          <a:fontRef idx="minor">
+            <a:schemeClr val="lt1"/>
+          </a:fontRef>
+        </p:style>
+        <p:txBody>
+          <a:bodyPr rtlCol="0" anchor="ctr"/>
+          <a:lstStyle/>
+          <a:p>
+            <a:pPr algn="ctr"/>
+            <a:endParaRPr lang="ru-RU">
+              <a:solidFill>
+                <a:schemeClr val="tx1"/>
+              </a:solidFill>
+              <a:latin typeface="Times New Roman" panose="02020603050405020304" pitchFamily="18" charset="0"/>
+              <a:cs typeface="Times New Roman" panose="02020603050405020304" pitchFamily="18" charset="0"/>
+            </a:endParaRPr>
+          </a:p>
+        </p:txBody>
+      </p:sp>
+      <p:sp>
+        <p:nvSpPr>
+          <p:cNvPr id="12" name="TextBox 11">
+            <a:extLst>
+              <a:ext uri="{FF2B5EF4-FFF2-40B4-BE49-F238E27FC236}">
+                <a16:creationId xmlns:a16="http://schemas.microsoft.com/office/drawing/2014/main" id="{CE82F8AD-5961-4B62-9DF9-5E2F5EEAD767}"/>
               </a:ext>
             </a:extLst>
           </p:cNvPr>
@@ -14276,9 +14641,7 @@
             <a:r>
               <a:rPr lang="ru-RU" sz="2400" dirty="0">
                 <a:solidFill>
-                  <a:schemeClr val="bg1">
-                    <a:lumMod val="95000"/>
-                  </a:schemeClr>
+                  <a:schemeClr val="bg1"/>
                 </a:solidFill>
                 <a:latin typeface="Times New Roman" panose="02020603050405020304" pitchFamily="18" charset="0"/>
                 <a:cs typeface="Times New Roman" panose="02020603050405020304" pitchFamily="18" charset="0"/>
@@ -14288,6 +14651,118 @@
           </a:p>
         </p:txBody>
       </p:sp>
+      <p:pic>
+        <p:nvPicPr>
+          <p:cNvPr id="13" name="Рисунок 12">
+            <a:extLst>
+              <a:ext uri="{FF2B5EF4-FFF2-40B4-BE49-F238E27FC236}">
+                <a16:creationId xmlns:a16="http://schemas.microsoft.com/office/drawing/2014/main" id="{3ADA0886-8270-4EC5-BF97-F13FF0929F75}"/>
+              </a:ext>
+            </a:extLst>
+          </p:cNvPr>
+          <p:cNvPicPr>
+            <a:picLocks noChangeAspect="1"/>
+          </p:cNvPicPr>
+          <p:nvPr/>
+        </p:nvPicPr>
+        <p:blipFill>
+          <a:blip r:embed="rId4"/>
+          <a:stretch>
+            <a:fillRect/>
+          </a:stretch>
+        </p:blipFill>
+        <p:spPr>
+          <a:xfrm>
+            <a:off x="9253453" y="3636995"/>
+            <a:ext cx="2359194" cy="2266312"/>
+          </a:xfrm>
+          <a:prstGeom prst="rect">
+            <a:avLst/>
+          </a:prstGeom>
+        </p:spPr>
+      </p:pic>
+      <p:sp>
+        <p:nvSpPr>
+          <p:cNvPr id="16" name="Прямоугольник 15">
+            <a:extLst>
+              <a:ext uri="{FF2B5EF4-FFF2-40B4-BE49-F238E27FC236}">
+                <a16:creationId xmlns:a16="http://schemas.microsoft.com/office/drawing/2014/main" id="{AF103A71-8679-4180-BF5C-B37EE4B54585}"/>
+              </a:ext>
+            </a:extLst>
+          </p:cNvPr>
+          <p:cNvSpPr/>
+          <p:nvPr/>
+        </p:nvSpPr>
+        <p:spPr>
+          <a:xfrm>
+            <a:off x="579352" y="3581400"/>
+            <a:ext cx="2443247" cy="2377503"/>
+          </a:xfrm>
+          <a:prstGeom prst="rect">
+            <a:avLst/>
+          </a:prstGeom>
+        </p:spPr>
+        <p:style>
+          <a:lnRef idx="2">
+            <a:schemeClr val="accent1">
+              <a:shade val="15000"/>
+            </a:schemeClr>
+          </a:lnRef>
+          <a:fillRef idx="1">
+            <a:schemeClr val="accent1"/>
+          </a:fillRef>
+          <a:effectRef idx="0">
+            <a:schemeClr val="accent1"/>
+          </a:effectRef>
+          <a:fontRef idx="minor">
+            <a:schemeClr val="lt1"/>
+          </a:fontRef>
+        </p:style>
+        <p:txBody>
+          <a:bodyPr rtlCol="0" anchor="ctr"/>
+          <a:lstStyle/>
+          <a:p>
+            <a:pPr algn="ctr"/>
+            <a:endParaRPr lang="ru-RU">
+              <a:solidFill>
+                <a:schemeClr val="tx1"/>
+              </a:solidFill>
+              <a:latin typeface="Times New Roman" panose="02020603050405020304" pitchFamily="18" charset="0"/>
+              <a:cs typeface="Times New Roman" panose="02020603050405020304" pitchFamily="18" charset="0"/>
+            </a:endParaRPr>
+          </a:p>
+        </p:txBody>
+      </p:sp>
+      <p:pic>
+        <p:nvPicPr>
+          <p:cNvPr id="17" name="Рисунок 16">
+            <a:extLst>
+              <a:ext uri="{FF2B5EF4-FFF2-40B4-BE49-F238E27FC236}">
+                <a16:creationId xmlns:a16="http://schemas.microsoft.com/office/drawing/2014/main" id="{4C77EA93-B31E-4B59-AFB3-09C2CD42C9EE}"/>
+              </a:ext>
+            </a:extLst>
+          </p:cNvPr>
+          <p:cNvPicPr>
+            <a:picLocks noChangeAspect="1"/>
+          </p:cNvPicPr>
+          <p:nvPr/>
+        </p:nvPicPr>
+        <p:blipFill>
+          <a:blip r:embed="rId5"/>
+          <a:stretch>
+            <a:fillRect/>
+          </a:stretch>
+        </p:blipFill>
+        <p:spPr>
+          <a:xfrm>
+            <a:off x="624629" y="3636995"/>
+            <a:ext cx="2349552" cy="2266312"/>
+          </a:xfrm>
+          <a:prstGeom prst="rect">
+            <a:avLst/>
+          </a:prstGeom>
+        </p:spPr>
+      </p:pic>
     </p:spTree>
   </p:cSld>
   <p:clrMapOvr>
@@ -14322,7 +14797,7 @@
         <p:spPr>
           <a:xfrm>
             <a:off x="628650" y="1736921"/>
-            <a:ext cx="5600700" cy="307777"/>
+            <a:ext cx="2670810" cy="307777"/>
           </a:xfrm>
           <a:prstGeom prst="rect">
             <a:avLst/>
@@ -14348,14 +14823,6 @@
               <a:buNone/>
             </a:pPr>
             <a:r>
-              <a:rPr lang="en-US" sz="2000" dirty="0" err="1">
-                <a:latin typeface="Times New Roman" panose="02020603050405020304" pitchFamily="18" charset="0"/>
-                <a:cs typeface="Times New Roman" panose="02020603050405020304" pitchFamily="18" charset="0"/>
-                <a:sym typeface="Montserrat SemiBold"/>
-              </a:rPr>
-              <a:t>Назначение</a:t>
-            </a:r>
-            <a:r>
               <a:rPr lang="ru-RU" sz="2000" dirty="0">
                 <a:solidFill>
                   <a:srgbClr val="0F172A"/>
@@ -14364,210 +14831,7 @@
                 <a:cs typeface="Times New Roman" panose="02020603050405020304" pitchFamily="18" charset="0"/>
                 <a:sym typeface="Montserrat SemiBold"/>
               </a:rPr>
-              <a:t> сайта</a:t>
-            </a:r>
-            <a:endParaRPr sz="2000" dirty="0">
-              <a:latin typeface="Times New Roman" panose="02020603050405020304" pitchFamily="18" charset="0"/>
-              <a:cs typeface="Times New Roman" panose="02020603050405020304" pitchFamily="18" charset="0"/>
-            </a:endParaRPr>
-          </a:p>
-        </p:txBody>
-      </p:sp>
-      <p:sp>
-        <p:nvSpPr>
-          <p:cNvPr id="99" name="Google Shape;99;p14"/>
-          <p:cNvSpPr txBox="1"/>
-          <p:nvPr/>
-        </p:nvSpPr>
-        <p:spPr>
-          <a:xfrm>
-            <a:off x="6300788" y="3055315"/>
-            <a:ext cx="5334000" cy="461665"/>
-          </a:xfrm>
-          <a:prstGeom prst="rect">
-            <a:avLst/>
-          </a:prstGeom>
-          <a:noFill/>
-          <a:ln>
-            <a:noFill/>
-          </a:ln>
-        </p:spPr>
-        <p:txBody>
-          <a:bodyPr spcFirstLastPara="1" wrap="square" lIns="885825" tIns="0" rIns="0" bIns="0" anchor="t" anchorCtr="0">
-            <a:spAutoFit/>
-          </a:bodyPr>
-          <a:lstStyle/>
-          <a:p>
-            <a:pPr marL="0" marR="0" lvl="0" indent="0" rtl="0">
-              <a:lnSpc>
-                <a:spcPct val="150000"/>
-              </a:lnSpc>
-              <a:spcBef>
-                <a:spcPts val="0"/>
-              </a:spcBef>
-              <a:spcAft>
-                <a:spcPts val="0"/>
-              </a:spcAft>
-              <a:buNone/>
-            </a:pPr>
-            <a:r>
-              <a:rPr lang="en-US" sz="2000" dirty="0">
-                <a:latin typeface="Times New Roman" panose="02020603050405020304" pitchFamily="18" charset="0"/>
-                <a:cs typeface="Times New Roman" panose="02020603050405020304" pitchFamily="18" charset="0"/>
-                <a:sym typeface="Inter"/>
-              </a:rPr>
-              <a:t> </a:t>
-            </a:r>
-            <a:r>
-              <a:rPr lang="en-US" sz="2000" dirty="0" err="1">
-                <a:latin typeface="Times New Roman" panose="02020603050405020304" pitchFamily="18" charset="0"/>
-                <a:cs typeface="Times New Roman" panose="02020603050405020304" pitchFamily="18" charset="0"/>
-                <a:sym typeface="Inter"/>
-              </a:rPr>
-              <a:t>Защита</a:t>
-            </a:r>
-            <a:r>
-              <a:rPr lang="en-US" sz="2000" dirty="0">
-                <a:latin typeface="Times New Roman" panose="02020603050405020304" pitchFamily="18" charset="0"/>
-                <a:cs typeface="Times New Roman" panose="02020603050405020304" pitchFamily="18" charset="0"/>
-                <a:sym typeface="Inter"/>
-              </a:rPr>
-              <a:t>:</a:t>
-            </a:r>
-            <a:endParaRPr sz="2000" dirty="0">
-              <a:latin typeface="Times New Roman" panose="02020603050405020304" pitchFamily="18" charset="0"/>
-              <a:cs typeface="Times New Roman" panose="02020603050405020304" pitchFamily="18" charset="0"/>
-            </a:endParaRPr>
-          </a:p>
-        </p:txBody>
-      </p:sp>
-      <p:sp>
-        <p:nvSpPr>
-          <p:cNvPr id="100" name="Google Shape;100;p14"/>
-          <p:cNvSpPr txBox="1"/>
-          <p:nvPr/>
-        </p:nvSpPr>
-        <p:spPr>
-          <a:xfrm>
-            <a:off x="5566767" y="4683611"/>
-            <a:ext cx="5847159" cy="461665"/>
-          </a:xfrm>
-          <a:prstGeom prst="rect">
-            <a:avLst/>
-          </a:prstGeom>
-          <a:noFill/>
-          <a:ln>
-            <a:noFill/>
-          </a:ln>
-        </p:spPr>
-        <p:txBody>
-          <a:bodyPr spcFirstLastPara="1" wrap="square" lIns="1676400" tIns="0" rIns="0" bIns="0" anchor="t" anchorCtr="0">
-            <a:spAutoFit/>
-          </a:bodyPr>
-          <a:lstStyle/>
-          <a:p>
-            <a:pPr marR="0" lvl="0" rtl="0">
-              <a:lnSpc>
-                <a:spcPct val="150000"/>
-              </a:lnSpc>
-              <a:spcBef>
-                <a:spcPts val="0"/>
-              </a:spcBef>
-              <a:spcAft>
-                <a:spcPts val="0"/>
-              </a:spcAft>
-              <a:buNone/>
-            </a:pPr>
-            <a:r>
-              <a:rPr lang="ru-RU" sz="2000" dirty="0">
-                <a:latin typeface="Times New Roman" panose="02020603050405020304" pitchFamily="18" charset="0"/>
-                <a:cs typeface="Times New Roman" panose="02020603050405020304" pitchFamily="18" charset="0"/>
-              </a:rPr>
-              <a:t>Нагрузка</a:t>
-            </a:r>
-            <a:endParaRPr sz="2000" dirty="0">
-              <a:latin typeface="Times New Roman" panose="02020603050405020304" pitchFamily="18" charset="0"/>
-              <a:cs typeface="Times New Roman" panose="02020603050405020304" pitchFamily="18" charset="0"/>
-            </a:endParaRPr>
-          </a:p>
-        </p:txBody>
-      </p:sp>
-      <p:sp>
-        <p:nvSpPr>
-          <p:cNvPr id="101" name="Google Shape;101;p14"/>
-          <p:cNvSpPr txBox="1"/>
-          <p:nvPr/>
-        </p:nvSpPr>
-        <p:spPr>
-          <a:xfrm>
-            <a:off x="5360194" y="1736921"/>
-            <a:ext cx="6260306" cy="461665"/>
-          </a:xfrm>
-          <a:prstGeom prst="rect">
-            <a:avLst/>
-          </a:prstGeom>
-          <a:noFill/>
-          <a:ln>
-            <a:noFill/>
-          </a:ln>
-        </p:spPr>
-        <p:txBody>
-          <a:bodyPr spcFirstLastPara="1" wrap="square" lIns="1666875" tIns="0" rIns="0" bIns="0" anchor="t" anchorCtr="0">
-            <a:spAutoFit/>
-          </a:bodyPr>
-          <a:lstStyle/>
-          <a:p>
-            <a:pPr marL="0" marR="0" lvl="0" indent="0" rtl="0">
-              <a:lnSpc>
-                <a:spcPct val="150000"/>
-              </a:lnSpc>
-              <a:spcBef>
-                <a:spcPts val="0"/>
-              </a:spcBef>
-              <a:spcAft>
-                <a:spcPts val="0"/>
-              </a:spcAft>
-              <a:buNone/>
-            </a:pPr>
-            <a:r>
-              <a:rPr lang="en-US" sz="2000" dirty="0">
-                <a:latin typeface="Times New Roman" panose="02020603050405020304" pitchFamily="18" charset="0"/>
-                <a:cs typeface="Times New Roman" panose="02020603050405020304" pitchFamily="18" charset="0"/>
-                <a:sym typeface="Inter"/>
-              </a:rPr>
-              <a:t> </a:t>
-            </a:r>
-            <a:r>
-              <a:rPr lang="en-US" sz="2000" dirty="0" err="1">
-                <a:latin typeface="Times New Roman" panose="02020603050405020304" pitchFamily="18" charset="0"/>
-                <a:cs typeface="Times New Roman" panose="02020603050405020304" pitchFamily="18" charset="0"/>
-                <a:sym typeface="Inter"/>
-              </a:rPr>
-              <a:t>Срок</a:t>
-            </a:r>
-            <a:r>
-              <a:rPr lang="en-US" sz="2000" dirty="0">
-                <a:latin typeface="Times New Roman" panose="02020603050405020304" pitchFamily="18" charset="0"/>
-                <a:cs typeface="Times New Roman" panose="02020603050405020304" pitchFamily="18" charset="0"/>
-                <a:sym typeface="Inter"/>
-              </a:rPr>
-              <a:t> </a:t>
-            </a:r>
-            <a:r>
-              <a:rPr lang="en-US" sz="2000" dirty="0" err="1">
-                <a:latin typeface="Times New Roman" panose="02020603050405020304" pitchFamily="18" charset="0"/>
-                <a:cs typeface="Times New Roman" panose="02020603050405020304" pitchFamily="18" charset="0"/>
-                <a:sym typeface="Inter"/>
-              </a:rPr>
-              <a:t>исполнения</a:t>
-            </a:r>
-            <a:r>
-              <a:rPr lang="en-US" sz="2000" dirty="0">
-                <a:latin typeface="Times New Roman" panose="02020603050405020304" pitchFamily="18" charset="0"/>
-                <a:cs typeface="Times New Roman" panose="02020603050405020304" pitchFamily="18" charset="0"/>
-                <a:sym typeface="Inter"/>
-              </a:rPr>
-              <a:t>:</a:t>
+              <a:t>Назначение сайта</a:t>
             </a:r>
             <a:endParaRPr sz="2000" dirty="0">
               <a:latin typeface="Times New Roman" panose="02020603050405020304" pitchFamily="18" charset="0"/>
@@ -14611,7 +14875,10 @@
               <a:buNone/>
             </a:pPr>
             <a:r>
-              <a:rPr lang="en-US" sz="4000" dirty="0" err="1">
+              <a:rPr lang="ru-RU" sz="4000" b="1" dirty="0">
+                <a:solidFill>
+                  <a:srgbClr val="0F172A"/>
+                </a:solidFill>
                 <a:latin typeface="Times New Roman" panose="02020603050405020304" pitchFamily="18" charset="0"/>
                 <a:cs typeface="Times New Roman" panose="02020603050405020304" pitchFamily="18" charset="0"/>
                 <a:sym typeface="Montserrat"/>
@@ -14619,7 +14886,7 @@
               <a:t>Предметная</a:t>
             </a:r>
             <a:r>
-              <a:rPr lang="en-US" sz="4000" dirty="0">
+              <a:rPr lang="ru-RU" sz="4000" dirty="0">
                 <a:latin typeface="Times New Roman" panose="02020603050405020304" pitchFamily="18" charset="0"/>
                 <a:cs typeface="Times New Roman" panose="02020603050405020304" pitchFamily="18" charset="0"/>
                 <a:sym typeface="Montserrat"/>
@@ -14627,22 +14894,20 @@
               <a:t> </a:t>
             </a:r>
             <a:r>
-              <a:rPr lang="en-US" sz="4000" dirty="0" err="1">
+              <a:rPr lang="ru-RU" sz="4000" b="1" dirty="0">
+                <a:solidFill>
+                  <a:srgbClr val="0F172A"/>
+                </a:solidFill>
                 <a:latin typeface="Times New Roman" panose="02020603050405020304" pitchFamily="18" charset="0"/>
                 <a:cs typeface="Times New Roman" panose="02020603050405020304" pitchFamily="18" charset="0"/>
                 <a:sym typeface="Montserrat"/>
               </a:rPr>
-              <a:t>област</a:t>
+              <a:t>область</a:t>
             </a:r>
-            <a:r>
-              <a:rPr lang="ru-RU" sz="4000" dirty="0">
-                <a:latin typeface="Times New Roman" panose="02020603050405020304" pitchFamily="18" charset="0"/>
-                <a:cs typeface="Times New Roman" panose="02020603050405020304" pitchFamily="18" charset="0"/>
-                <a:sym typeface="Montserrat"/>
-              </a:rPr>
-              <a:t>ь</a:t>
-            </a:r>
-            <a:endParaRPr sz="4000" dirty="0">
+            <a:endParaRPr sz="4000" b="1" dirty="0">
+              <a:solidFill>
+                <a:srgbClr val="0F172A"/>
+              </a:solidFill>
               <a:latin typeface="Times New Roman" panose="02020603050405020304" pitchFamily="18" charset="0"/>
               <a:cs typeface="Times New Roman" panose="02020603050405020304" pitchFamily="18" charset="0"/>
             </a:endParaRPr>
@@ -14658,7 +14923,7 @@
         <p:spPr>
           <a:xfrm>
             <a:off x="628650" y="476250"/>
-            <a:ext cx="59530" cy="502444"/>
+            <a:ext cx="59530" cy="597694"/>
           </a:xfrm>
           <a:prstGeom prst="rect">
             <a:avLst/>
@@ -14689,11 +14954,320 @@
               <a:solidFill>
                 <a:schemeClr val="dk1"/>
               </a:solidFill>
-              <a:latin typeface="Calibri"/>
+              <a:latin typeface="Times New Roman" panose="02020603050405020304" pitchFamily="18" charset="0"/>
               <a:ea typeface="Calibri"/>
-              <a:cs typeface="Calibri"/>
+              <a:cs typeface="Times New Roman" panose="02020603050405020304" pitchFamily="18" charset="0"/>
               <a:sym typeface="Calibri"/>
             </a:endParaRPr>
+          </a:p>
+        </p:txBody>
+      </p:sp>
+      <p:sp>
+        <p:nvSpPr>
+          <p:cNvPr id="5" name="TextBox 4">
+            <a:extLst>
+              <a:ext uri="{FF2B5EF4-FFF2-40B4-BE49-F238E27FC236}">
+                <a16:creationId xmlns:a16="http://schemas.microsoft.com/office/drawing/2014/main" id="{47C00234-493A-4528-839C-2AEF42B6BAF4}"/>
+              </a:ext>
+            </a:extLst>
+          </p:cNvPr>
+          <p:cNvSpPr txBox="1"/>
+          <p:nvPr/>
+        </p:nvSpPr>
+        <p:spPr>
+          <a:xfrm>
+            <a:off x="4985314" y="1694453"/>
+            <a:ext cx="987771" cy="400110"/>
+          </a:xfrm>
+          <a:prstGeom prst="rect">
+            <a:avLst/>
+          </a:prstGeom>
+          <a:noFill/>
+        </p:spPr>
+        <p:txBody>
+          <a:bodyPr wrap="none" rtlCol="0">
+            <a:spAutoFit/>
+          </a:bodyPr>
+          <a:lstStyle/>
+          <a:p>
+            <a:r>
+              <a:rPr lang="ru-RU" sz="2000" dirty="0">
+                <a:latin typeface="Times New Roman" panose="02020603050405020304" pitchFamily="18" charset="0"/>
+                <a:cs typeface="Times New Roman" panose="02020603050405020304" pitchFamily="18" charset="0"/>
+              </a:rPr>
+              <a:t>Защита</a:t>
+            </a:r>
+          </a:p>
+        </p:txBody>
+      </p:sp>
+      <p:sp>
+        <p:nvSpPr>
+          <p:cNvPr id="7" name="TextBox 6">
+            <a:extLst>
+              <a:ext uri="{FF2B5EF4-FFF2-40B4-BE49-F238E27FC236}">
+                <a16:creationId xmlns:a16="http://schemas.microsoft.com/office/drawing/2014/main" id="{0205B239-1BDC-488C-A649-1C9682D15C18}"/>
+              </a:ext>
+            </a:extLst>
+          </p:cNvPr>
+          <p:cNvSpPr txBox="1"/>
+          <p:nvPr/>
+        </p:nvSpPr>
+        <p:spPr>
+          <a:xfrm>
+            <a:off x="628650" y="2284562"/>
+            <a:ext cx="4527550" cy="3170099"/>
+          </a:xfrm>
+          <a:prstGeom prst="rect">
+            <a:avLst/>
+          </a:prstGeom>
+          <a:noFill/>
+        </p:spPr>
+        <p:txBody>
+          <a:bodyPr wrap="square" rtlCol="0">
+            <a:spAutoFit/>
+          </a:bodyPr>
+          <a:lstStyle/>
+          <a:p>
+            <a:pPr algn="l"/>
+            <a:r>
+              <a:rPr lang="ru-RU" sz="2000" dirty="0">
+                <a:latin typeface="Times New Roman" panose="02020603050405020304" pitchFamily="18" charset="0"/>
+                <a:cs typeface="Times New Roman" panose="02020603050405020304" pitchFamily="18" charset="0"/>
+              </a:rPr>
+              <a:t>Сайт «</a:t>
+            </a:r>
+            <a:r>
+              <a:rPr lang="ru-RU" sz="2000" dirty="0" err="1">
+                <a:latin typeface="Times New Roman" panose="02020603050405020304" pitchFamily="18" charset="0"/>
+                <a:cs typeface="Times New Roman" panose="02020603050405020304" pitchFamily="18" charset="0"/>
+              </a:rPr>
+              <a:t>ГосБанк</a:t>
+            </a:r>
+            <a:r>
+              <a:rPr lang="ru-RU" sz="2000" dirty="0">
+                <a:latin typeface="Times New Roman" panose="02020603050405020304" pitchFamily="18" charset="0"/>
+                <a:cs typeface="Times New Roman" panose="02020603050405020304" pitchFamily="18" charset="0"/>
+              </a:rPr>
+              <a:t>» представляет собой финансовую платформу, предназначенную для:</a:t>
+            </a:r>
+          </a:p>
+          <a:p>
+            <a:pPr algn="l"/>
+            <a:endParaRPr lang="ru-RU" sz="2000" dirty="0">
+              <a:latin typeface="Times New Roman" panose="02020603050405020304" pitchFamily="18" charset="0"/>
+              <a:cs typeface="Times New Roman" panose="02020603050405020304" pitchFamily="18" charset="0"/>
+            </a:endParaRPr>
+          </a:p>
+          <a:p>
+            <a:pPr marL="342900" indent="-342900" algn="l">
+              <a:buFont typeface="+mj-lt"/>
+              <a:buAutoNum type="arabicPeriod"/>
+            </a:pPr>
+            <a:r>
+              <a:rPr lang="ru-RU" sz="2000" dirty="0">
+                <a:latin typeface="Times New Roman" panose="02020603050405020304" pitchFamily="18" charset="0"/>
+                <a:cs typeface="Times New Roman" panose="02020603050405020304" pitchFamily="18" charset="0"/>
+              </a:rPr>
+              <a:t>Одобрения и оформления карт </a:t>
+            </a:r>
+          </a:p>
+          <a:p>
+            <a:pPr marL="342900" indent="-342900" algn="l">
+              <a:buFont typeface="+mj-lt"/>
+              <a:buAutoNum type="arabicPeriod"/>
+            </a:pPr>
+            <a:r>
+              <a:rPr lang="ru-RU" sz="2000" dirty="0">
+                <a:latin typeface="Times New Roman" panose="02020603050405020304" pitchFamily="18" charset="0"/>
+                <a:cs typeface="Times New Roman" panose="02020603050405020304" pitchFamily="18" charset="0"/>
+              </a:rPr>
+              <a:t>Выдачи кредитов и овердрафта ;</a:t>
+            </a:r>
+          </a:p>
+          <a:p>
+            <a:pPr marL="342900" indent="-342900" algn="l">
+              <a:buFont typeface="+mj-lt"/>
+              <a:buAutoNum type="arabicPeriod"/>
+            </a:pPr>
+            <a:r>
+              <a:rPr lang="ru-RU" sz="2000" dirty="0">
+                <a:latin typeface="Times New Roman" panose="02020603050405020304" pitchFamily="18" charset="0"/>
+                <a:cs typeface="Times New Roman" panose="02020603050405020304" pitchFamily="18" charset="0"/>
+              </a:rPr>
+              <a:t>Входа и верификации через Госуслуги;</a:t>
+            </a:r>
+          </a:p>
+          <a:p>
+            <a:pPr marL="342900" indent="-342900" algn="l">
+              <a:buFont typeface="+mj-lt"/>
+              <a:buAutoNum type="arabicPeriod"/>
+            </a:pPr>
+            <a:r>
+              <a:rPr lang="ru-RU" sz="2000" dirty="0">
+                <a:latin typeface="Times New Roman" panose="02020603050405020304" pitchFamily="18" charset="0"/>
+                <a:cs typeface="Times New Roman" panose="02020603050405020304" pitchFamily="18" charset="0"/>
+              </a:rPr>
+              <a:t>Администрирования одобрение новых администраторов</a:t>
+            </a:r>
+          </a:p>
+        </p:txBody>
+      </p:sp>
+      <p:sp>
+        <p:nvSpPr>
+          <p:cNvPr id="8" name="TextBox 7">
+            <a:extLst>
+              <a:ext uri="{FF2B5EF4-FFF2-40B4-BE49-F238E27FC236}">
+                <a16:creationId xmlns:a16="http://schemas.microsoft.com/office/drawing/2014/main" id="{2086B469-C63B-43DB-8AC7-92E9CEF53924}"/>
+              </a:ext>
+            </a:extLst>
+          </p:cNvPr>
+          <p:cNvSpPr txBox="1"/>
+          <p:nvPr/>
+        </p:nvSpPr>
+        <p:spPr>
+          <a:xfrm>
+            <a:off x="5023873" y="3777791"/>
+            <a:ext cx="4023858" cy="400110"/>
+          </a:xfrm>
+          <a:prstGeom prst="rect">
+            <a:avLst/>
+          </a:prstGeom>
+          <a:noFill/>
+        </p:spPr>
+        <p:txBody>
+          <a:bodyPr wrap="none" rtlCol="0">
+            <a:spAutoFit/>
+          </a:bodyPr>
+          <a:lstStyle/>
+          <a:p>
+            <a:r>
+              <a:rPr lang="ru-RU" sz="2000" dirty="0">
+                <a:latin typeface="Times New Roman" panose="02020603050405020304" pitchFamily="18" charset="0"/>
+                <a:cs typeface="Times New Roman" panose="02020603050405020304" pitchFamily="18" charset="0"/>
+              </a:rPr>
+              <a:t>Общий срок разработки: 5 месяцев</a:t>
+            </a:r>
+          </a:p>
+        </p:txBody>
+      </p:sp>
+      <p:sp>
+        <p:nvSpPr>
+          <p:cNvPr id="9" name="TextBox 8">
+            <a:extLst>
+              <a:ext uri="{FF2B5EF4-FFF2-40B4-BE49-F238E27FC236}">
+                <a16:creationId xmlns:a16="http://schemas.microsoft.com/office/drawing/2014/main" id="{6534EEA4-B8A4-426E-8579-E9E421C52835}"/>
+              </a:ext>
+            </a:extLst>
+          </p:cNvPr>
+          <p:cNvSpPr txBox="1"/>
+          <p:nvPr/>
+        </p:nvSpPr>
+        <p:spPr>
+          <a:xfrm>
+            <a:off x="4985314" y="2238396"/>
+            <a:ext cx="6192721" cy="1631216"/>
+          </a:xfrm>
+          <a:prstGeom prst="rect">
+            <a:avLst/>
+          </a:prstGeom>
+          <a:noFill/>
+        </p:spPr>
+        <p:txBody>
+          <a:bodyPr wrap="none" rtlCol="0">
+            <a:spAutoFit/>
+          </a:bodyPr>
+          <a:lstStyle/>
+          <a:p>
+            <a:pPr marL="457200" indent="-457200">
+              <a:buFont typeface="+mj-lt"/>
+              <a:buAutoNum type="arabicPeriod"/>
+            </a:pPr>
+            <a:r>
+              <a:rPr lang="ru-RU" sz="2000" dirty="0">
+                <a:latin typeface="Times New Roman" panose="02020603050405020304" pitchFamily="18" charset="0"/>
+                <a:cs typeface="Times New Roman" panose="02020603050405020304" pitchFamily="18" charset="0"/>
+              </a:rPr>
+              <a:t>Удалённость серверов</a:t>
+            </a:r>
+          </a:p>
+          <a:p>
+            <a:pPr marL="457200" indent="-457200">
+              <a:buFont typeface="+mj-lt"/>
+              <a:buAutoNum type="arabicPeriod"/>
+            </a:pPr>
+            <a:r>
+              <a:rPr lang="ru-RU" sz="2000" dirty="0">
+                <a:latin typeface="Times New Roman" panose="02020603050405020304" pitchFamily="18" charset="0"/>
+                <a:cs typeface="Times New Roman" panose="02020603050405020304" pitchFamily="18" charset="0"/>
+              </a:rPr>
+              <a:t>Удаление данных и создание резервных копий</a:t>
+            </a:r>
+          </a:p>
+          <a:p>
+            <a:pPr marL="457200" indent="-457200">
+              <a:buFont typeface="+mj-lt"/>
+              <a:buAutoNum type="arabicPeriod"/>
+            </a:pPr>
+            <a:r>
+              <a:rPr lang="ru-RU" sz="2000" dirty="0">
+                <a:latin typeface="Times New Roman" panose="02020603050405020304" pitchFamily="18" charset="0"/>
+                <a:cs typeface="Times New Roman" panose="02020603050405020304" pitchFamily="18" charset="0"/>
+              </a:rPr>
+              <a:t>Верификация только через Госуслуги</a:t>
+            </a:r>
+          </a:p>
+          <a:p>
+            <a:r>
+              <a:rPr lang="ru-RU" sz="2000" dirty="0">
+                <a:latin typeface="Times New Roman" panose="02020603050405020304" pitchFamily="18" charset="0"/>
+                <a:cs typeface="Times New Roman" panose="02020603050405020304" pitchFamily="18" charset="0"/>
+              </a:rPr>
+              <a:t>Доступность 	Конфиденциальность	Целостность</a:t>
+            </a:r>
+          </a:p>
+          <a:p>
+            <a:endParaRPr lang="ru-RU" sz="2000" dirty="0">
+              <a:latin typeface="Times New Roman" panose="02020603050405020304" pitchFamily="18" charset="0"/>
+              <a:cs typeface="Times New Roman" panose="02020603050405020304" pitchFamily="18" charset="0"/>
+            </a:endParaRPr>
+          </a:p>
+        </p:txBody>
+      </p:sp>
+      <p:sp>
+        <p:nvSpPr>
+          <p:cNvPr id="12" name="TextBox 11">
+            <a:extLst>
+              <a:ext uri="{FF2B5EF4-FFF2-40B4-BE49-F238E27FC236}">
+                <a16:creationId xmlns:a16="http://schemas.microsoft.com/office/drawing/2014/main" id="{2771BC5D-A3C0-45C2-AA34-A9EDED39F64E}"/>
+              </a:ext>
+            </a:extLst>
+          </p:cNvPr>
+          <p:cNvSpPr txBox="1"/>
+          <p:nvPr/>
+        </p:nvSpPr>
+        <p:spPr>
+          <a:xfrm>
+            <a:off x="4985314" y="4455742"/>
+            <a:ext cx="5885886" cy="1015663"/>
+          </a:xfrm>
+          <a:prstGeom prst="rect">
+            <a:avLst/>
+          </a:prstGeom>
+          <a:noFill/>
+        </p:spPr>
+        <p:txBody>
+          <a:bodyPr wrap="square" rtlCol="0">
+            <a:spAutoFit/>
+          </a:bodyPr>
+          <a:lstStyle/>
+          <a:p>
+            <a:r>
+              <a:rPr lang="ru-RU" sz="2000" dirty="0">
+                <a:latin typeface="Times New Roman" panose="02020603050405020304" pitchFamily="18" charset="0"/>
+                <a:cs typeface="Times New Roman" panose="02020603050405020304" pitchFamily="18" charset="0"/>
+              </a:rPr>
+              <a:t>Предполагаемая нагрузка: до 1 млн пользователей, а доступ к сервису предоставляется только гражданам РФ.</a:t>
+            </a:r>
           </a:p>
         </p:txBody>
       </p:sp>
@@ -14731,7 +15305,7 @@
         <p:spPr>
           <a:xfrm>
             <a:off x="714375" y="476250"/>
-            <a:ext cx="11451431" cy="419100"/>
+            <a:ext cx="11451431" cy="615553"/>
           </a:xfrm>
           <a:prstGeom prst="rect">
             <a:avLst/>
@@ -14757,31 +15331,39 @@
               <a:buNone/>
             </a:pPr>
             <a:r>
-              <a:rPr lang="en-US" sz="2700" b="1" i="0" u="none" strike="noStrike" cap="none">
+              <a:rPr lang="ru-RU" sz="4000" b="1" dirty="0">
                 <a:solidFill>
                   <a:srgbClr val="0F172A"/>
                 </a:solidFill>
-                <a:latin typeface="Montserrat"/>
-                <a:ea typeface="Montserrat"/>
-                <a:cs typeface="Montserrat"/>
+                <a:latin typeface="Times New Roman" panose="02020603050405020304" pitchFamily="18" charset="0"/>
+                <a:cs typeface="Times New Roman" panose="02020603050405020304" pitchFamily="18" charset="0"/>
                 <a:sym typeface="Montserrat"/>
               </a:rPr>
-              <a:t>Модель жизненного цикла (МЖЦ)</a:t>
+              <a:t>Модель Жизненно Цикла</a:t>
             </a:r>
-            <a:endParaRPr/>
+            <a:endParaRPr dirty="0">
+              <a:latin typeface="Times New Roman" panose="02020603050405020304" pitchFamily="18" charset="0"/>
+              <a:cs typeface="Times New Roman" panose="02020603050405020304" pitchFamily="18" charset="0"/>
+            </a:endParaRPr>
           </a:p>
         </p:txBody>
       </p:sp>
       <p:sp>
         <p:nvSpPr>
-          <p:cNvPr id="128" name="Google Shape;128;p15"/>
+          <p:cNvPr id="5" name="Google Shape;107;p14">
+            <a:extLst>
+              <a:ext uri="{FF2B5EF4-FFF2-40B4-BE49-F238E27FC236}">
+                <a16:creationId xmlns:a16="http://schemas.microsoft.com/office/drawing/2014/main" id="{65CF65BB-6228-4929-9CB8-0DDA0250CBED}"/>
+              </a:ext>
+            </a:extLst>
+          </p:cNvPr>
           <p:cNvSpPr/>
           <p:nvPr/>
         </p:nvSpPr>
         <p:spPr>
           <a:xfrm>
-            <a:off x="571500" y="476250"/>
-            <a:ext cx="57150" cy="419100"/>
+            <a:off x="628650" y="476250"/>
+            <a:ext cx="59530" cy="597694"/>
           </a:xfrm>
           <a:prstGeom prst="rect">
             <a:avLst/>
@@ -14808,24 +15390,54 @@
               </a:spcAft>
               <a:buNone/>
             </a:pPr>
-            <a:endParaRPr sz="1800" b="0" i="0" u="none" strike="noStrike" cap="none">
+            <a:endParaRPr sz="2800" b="0" i="0" u="none" strike="noStrike" cap="none">
               <a:solidFill>
                 <a:schemeClr val="dk1"/>
               </a:solidFill>
-              <a:latin typeface="Calibri"/>
+              <a:latin typeface="Times New Roman" panose="02020603050405020304" pitchFamily="18" charset="0"/>
               <a:ea typeface="Calibri"/>
-              <a:cs typeface="Calibri"/>
+              <a:cs typeface="Times New Roman" panose="02020603050405020304" pitchFamily="18" charset="0"/>
               <a:sym typeface="Calibri"/>
             </a:endParaRPr>
           </a:p>
         </p:txBody>
       </p:sp>
+      <p:pic>
+        <p:nvPicPr>
+          <p:cNvPr id="6" name="Рисунок 5">
+            <a:extLst>
+              <a:ext uri="{FF2B5EF4-FFF2-40B4-BE49-F238E27FC236}">
+                <a16:creationId xmlns:a16="http://schemas.microsoft.com/office/drawing/2014/main" id="{548ABA66-2FFB-4DAE-AD52-A50C28283043}"/>
+              </a:ext>
+            </a:extLst>
+          </p:cNvPr>
+          <p:cNvPicPr>
+            <a:picLocks noChangeAspect="1"/>
+          </p:cNvPicPr>
+          <p:nvPr/>
+        </p:nvPicPr>
+        <p:blipFill>
+          <a:blip r:embed="rId3"/>
+          <a:stretch>
+            <a:fillRect/>
+          </a:stretch>
+        </p:blipFill>
+        <p:spPr>
+          <a:xfrm>
+            <a:off x="4051300" y="784026"/>
+            <a:ext cx="7048500" cy="5873750"/>
+          </a:xfrm>
+          <a:prstGeom prst="rect">
+            <a:avLst/>
+          </a:prstGeom>
+        </p:spPr>
+      </p:pic>
       <p:sp>
         <p:nvSpPr>
-          <p:cNvPr id="2" name="TextBox 1">
+          <p:cNvPr id="8" name="TextBox 7">
             <a:extLst>
               <a:ext uri="{FF2B5EF4-FFF2-40B4-BE49-F238E27FC236}">
-                <a16:creationId xmlns:a16="http://schemas.microsoft.com/office/drawing/2014/main" id="{CFADB34C-7F72-AF5D-4E12-2D89ACFCC99A}"/>
+                <a16:creationId xmlns:a16="http://schemas.microsoft.com/office/drawing/2014/main" id="{5C2D40EB-C371-4BB0-B1B1-83ECF42FBA45}"/>
               </a:ext>
             </a:extLst>
           </p:cNvPr>
@@ -14834,8 +15446,8 @@
         </p:nvSpPr>
         <p:spPr>
           <a:xfrm>
-            <a:off x="6324600" y="2800350"/>
-            <a:ext cx="631904" cy="307777"/>
+            <a:off x="152401" y="2135851"/>
+            <a:ext cx="4191000" cy="3170099"/>
           </a:xfrm>
           <a:prstGeom prst="rect">
             <a:avLst/>
@@ -14843,15 +15455,94 @@
           <a:noFill/>
         </p:spPr>
         <p:txBody>
-          <a:bodyPr wrap="none" rtlCol="0">
+          <a:bodyPr wrap="square" rtlCol="0">
             <a:spAutoFit/>
           </a:bodyPr>
           <a:lstStyle/>
           <a:p>
+            <a:pPr algn="l"/>
             <a:r>
-              <a:rPr lang="ru-RU" dirty="0"/>
-              <a:t>МЖЦ</a:t>
+              <a:rPr lang="ru-RU" sz="2000" dirty="0">
+                <a:latin typeface="Times New Roman" panose="02020603050405020304" pitchFamily="18" charset="0"/>
+                <a:cs typeface="Times New Roman" panose="02020603050405020304" pitchFamily="18" charset="0"/>
+              </a:rPr>
+              <a:t>Почему выбрана спиральная модель?</a:t>
             </a:r>
+          </a:p>
+          <a:p>
+            <a:pPr algn="l"/>
+            <a:endParaRPr lang="ru-RU" sz="2000" dirty="0">
+              <a:latin typeface="Times New Roman" panose="02020603050405020304" pitchFamily="18" charset="0"/>
+              <a:cs typeface="Times New Roman" panose="02020603050405020304" pitchFamily="18" charset="0"/>
+            </a:endParaRPr>
+          </a:p>
+          <a:p>
+            <a:pPr algn="l"/>
+            <a:r>
+              <a:rPr lang="ru-RU" sz="2000" dirty="0">
+                <a:latin typeface="Times New Roman" panose="02020603050405020304" pitchFamily="18" charset="0"/>
+                <a:cs typeface="Times New Roman" panose="02020603050405020304" pitchFamily="18" charset="0"/>
+              </a:rPr>
+              <a:t>Так как она:</a:t>
+            </a:r>
+          </a:p>
+          <a:p>
+            <a:pPr marL="457200" indent="-457200" algn="l">
+              <a:buFont typeface="+mj-lt"/>
+              <a:buAutoNum type="arabicPeriod"/>
+            </a:pPr>
+            <a:r>
+              <a:rPr lang="ru-RU" sz="2000" dirty="0">
+                <a:latin typeface="Times New Roman" panose="02020603050405020304" pitchFamily="18" charset="0"/>
+                <a:cs typeface="Times New Roman" panose="02020603050405020304" pitchFamily="18" charset="0"/>
+              </a:rPr>
+              <a:t>Позволяет управлять рисками </a:t>
+            </a:r>
+          </a:p>
+          <a:p>
+            <a:pPr marL="457200" indent="-457200" algn="l">
+              <a:buFont typeface="+mj-lt"/>
+              <a:buAutoNum type="arabicPeriod"/>
+            </a:pPr>
+            <a:r>
+              <a:rPr lang="ru-RU" sz="2000" dirty="0">
+                <a:latin typeface="Times New Roman" panose="02020603050405020304" pitchFamily="18" charset="0"/>
+                <a:cs typeface="Times New Roman" panose="02020603050405020304" pitchFamily="18" charset="0"/>
+              </a:rPr>
+              <a:t>Обеспечивает гибкость</a:t>
+            </a:r>
+          </a:p>
+          <a:p>
+            <a:pPr marL="457200" indent="-457200" algn="l">
+              <a:buFont typeface="+mj-lt"/>
+              <a:buAutoNum type="arabicPeriod"/>
+            </a:pPr>
+            <a:r>
+              <a:rPr lang="ru-RU" sz="2000" dirty="0">
+                <a:latin typeface="Times New Roman" panose="02020603050405020304" pitchFamily="18" charset="0"/>
+                <a:cs typeface="Times New Roman" panose="02020603050405020304" pitchFamily="18" charset="0"/>
+              </a:rPr>
+              <a:t>Даёт заказчику раннее представление продукта </a:t>
+            </a:r>
+          </a:p>
+          <a:p>
+            <a:pPr marL="457200" indent="-457200" algn="l">
+              <a:buFont typeface="+mj-lt"/>
+              <a:buAutoNum type="arabicPeriod"/>
+            </a:pPr>
+            <a:r>
+              <a:rPr lang="ru-RU" sz="2000" dirty="0">
+                <a:latin typeface="Times New Roman" panose="02020603050405020304" pitchFamily="18" charset="0"/>
+                <a:cs typeface="Times New Roman" panose="02020603050405020304" pitchFamily="18" charset="0"/>
+              </a:rPr>
+              <a:t>Снижает риск провала</a:t>
+            </a:r>
+          </a:p>
+          <a:p>
+            <a:endParaRPr lang="ru-RU" sz="2000" dirty="0">
+              <a:latin typeface="Times New Roman" panose="02020603050405020304" pitchFamily="18" charset="0"/>
+              <a:cs typeface="Times New Roman" panose="02020603050405020304" pitchFamily="18" charset="0"/>
+            </a:endParaRPr>
           </a:p>
         </p:txBody>
       </p:sp>
@@ -14889,7 +15580,7 @@
         <p:spPr>
           <a:xfrm>
             <a:off x="714375" y="476250"/>
-            <a:ext cx="11451431" cy="419100"/>
+            <a:ext cx="11451431" cy="615553"/>
           </a:xfrm>
           <a:prstGeom prst="rect">
             <a:avLst/>
@@ -14915,31 +15606,77 @@
               <a:buNone/>
             </a:pPr>
             <a:r>
-              <a:rPr lang="en-US" sz="2700" b="1" i="0" u="none" strike="noStrike" cap="none">
+              <a:rPr lang="ru-RU" sz="4000" b="1" dirty="0">
                 <a:solidFill>
                   <a:srgbClr val="0F172A"/>
                 </a:solidFill>
-                <a:latin typeface="Montserrat"/>
-                <a:ea typeface="Montserrat"/>
-                <a:cs typeface="Montserrat"/>
+                <a:latin typeface="Times New Roman" panose="02020603050405020304" pitchFamily="18" charset="0"/>
+                <a:cs typeface="Times New Roman" panose="02020603050405020304" pitchFamily="18" charset="0"/>
                 <a:sym typeface="Montserrat"/>
               </a:rPr>
-              <a:t>Модель жизненного цикла (МЖЦ)</a:t>
+              <a:t>Модель Жизненно Цикла</a:t>
             </a:r>
-            <a:endParaRPr/>
+            <a:endParaRPr lang="ru-RU" sz="4000" dirty="0">
+              <a:latin typeface="Times New Roman" panose="02020603050405020304" pitchFamily="18" charset="0"/>
+              <a:cs typeface="Times New Roman" panose="02020603050405020304" pitchFamily="18" charset="0"/>
+            </a:endParaRPr>
           </a:p>
         </p:txBody>
       </p:sp>
       <p:sp>
         <p:nvSpPr>
-          <p:cNvPr id="128" name="Google Shape;128;p15"/>
+          <p:cNvPr id="2" name="TextBox 1">
+            <a:extLst>
+              <a:ext uri="{FF2B5EF4-FFF2-40B4-BE49-F238E27FC236}">
+                <a16:creationId xmlns:a16="http://schemas.microsoft.com/office/drawing/2014/main" id="{753FC8F1-A31B-881A-EB7A-8FFD6EEC3721}"/>
+              </a:ext>
+            </a:extLst>
+          </p:cNvPr>
+          <p:cNvSpPr txBox="1"/>
+          <p:nvPr/>
+        </p:nvSpPr>
+        <p:spPr>
+          <a:xfrm>
+            <a:off x="628650" y="1390650"/>
+            <a:ext cx="4875053" cy="400110"/>
+          </a:xfrm>
+          <a:prstGeom prst="rect">
+            <a:avLst/>
+          </a:prstGeom>
+          <a:noFill/>
+        </p:spPr>
+        <p:txBody>
+          <a:bodyPr wrap="none" rtlCol="0">
+            <a:spAutoFit/>
+          </a:bodyPr>
+          <a:lstStyle/>
+          <a:p>
+            <a:r>
+              <a:rPr lang="ru-RU" sz="2000" dirty="0">
+                <a:latin typeface="Times New Roman" panose="02020603050405020304" pitchFamily="18" charset="0"/>
+                <a:cs typeface="Times New Roman" panose="02020603050405020304" pitchFamily="18" charset="0"/>
+              </a:rPr>
+              <a:t>Итерация 1: Базовый каркас и архитектура</a:t>
+            </a:r>
+          </a:p>
+        </p:txBody>
+      </p:sp>
+      <p:sp>
+        <p:nvSpPr>
+          <p:cNvPr id="5" name="Google Shape;107;p14">
+            <a:extLst>
+              <a:ext uri="{FF2B5EF4-FFF2-40B4-BE49-F238E27FC236}">
+                <a16:creationId xmlns:a16="http://schemas.microsoft.com/office/drawing/2014/main" id="{C19EC165-C6D4-482F-8596-A67B792DD88B}"/>
+              </a:ext>
+            </a:extLst>
+          </p:cNvPr>
           <p:cNvSpPr/>
           <p:nvPr/>
         </p:nvSpPr>
         <p:spPr>
           <a:xfrm>
-            <a:off x="571500" y="476250"/>
-            <a:ext cx="57150" cy="419100"/>
+            <a:off x="628650" y="476250"/>
+            <a:ext cx="59530" cy="597694"/>
           </a:xfrm>
           <a:prstGeom prst="rect">
             <a:avLst/>
@@ -14966,13 +15703,13 @@
               </a:spcAft>
               <a:buNone/>
             </a:pPr>
-            <a:endParaRPr sz="1800" b="0" i="0" u="none" strike="noStrike" cap="none">
+            <a:endParaRPr sz="2800" b="0" i="0" u="none" strike="noStrike" cap="none">
               <a:solidFill>
                 <a:schemeClr val="dk1"/>
               </a:solidFill>
-              <a:latin typeface="Calibri"/>
+              <a:latin typeface="Times New Roman" panose="02020603050405020304" pitchFamily="18" charset="0"/>
               <a:ea typeface="Calibri"/>
-              <a:cs typeface="Calibri"/>
+              <a:cs typeface="Times New Roman" panose="02020603050405020304" pitchFamily="18" charset="0"/>
               <a:sym typeface="Calibri"/>
             </a:endParaRPr>
           </a:p>
@@ -14980,10 +15717,10 @@
       </p:sp>
       <p:sp>
         <p:nvSpPr>
-          <p:cNvPr id="2" name="TextBox 1">
+          <p:cNvPr id="6" name="TextBox 5">
             <a:extLst>
               <a:ext uri="{FF2B5EF4-FFF2-40B4-BE49-F238E27FC236}">
-                <a16:creationId xmlns:a16="http://schemas.microsoft.com/office/drawing/2014/main" id="{753FC8F1-A31B-881A-EB7A-8FFD6EEC3721}"/>
+                <a16:creationId xmlns:a16="http://schemas.microsoft.com/office/drawing/2014/main" id="{D21FA198-161B-4515-83DF-FFCB23681ECE}"/>
               </a:ext>
             </a:extLst>
           </p:cNvPr>
@@ -14992,8 +15729,8 @@
         </p:nvSpPr>
         <p:spPr>
           <a:xfrm>
-            <a:off x="5334000" y="2743200"/>
-            <a:ext cx="832279" cy="307777"/>
+            <a:off x="1238250" y="2952750"/>
+            <a:ext cx="558166" cy="307777"/>
           </a:xfrm>
           <a:prstGeom prst="rect">
             <a:avLst/>
@@ -15007,16 +15744,621 @@
           <a:lstStyle/>
           <a:p>
             <a:r>
-              <a:rPr lang="ru-RU" dirty="0"/>
-              <a:t>ЭТАПЫ</a:t>
+              <a:rPr lang="ru-RU" b="0" i="0" dirty="0">
+                <a:solidFill>
+                  <a:srgbClr val="F9FAFB"/>
+                </a:solidFill>
+                <a:effectLst/>
+                <a:latin typeface="Times New Roman" panose="02020603050405020304" pitchFamily="18" charset="0"/>
+                <a:cs typeface="Times New Roman" panose="02020603050405020304" pitchFamily="18" charset="0"/>
+              </a:rPr>
+              <a:t>Этап</a:t>
+            </a:r>
+            <a:endParaRPr lang="ru-RU" dirty="0">
+              <a:latin typeface="Times New Roman" panose="02020603050405020304" pitchFamily="18" charset="0"/>
+              <a:cs typeface="Times New Roman" panose="02020603050405020304" pitchFamily="18" charset="0"/>
+            </a:endParaRPr>
+          </a:p>
+        </p:txBody>
+      </p:sp>
+      <p:graphicFrame>
+        <p:nvGraphicFramePr>
+          <p:cNvPr id="3" name="Таблица 2">
+            <a:extLst>
+              <a:ext uri="{FF2B5EF4-FFF2-40B4-BE49-F238E27FC236}">
+                <a16:creationId xmlns:a16="http://schemas.microsoft.com/office/drawing/2014/main" id="{7B100FD9-A05E-4D21-B7EE-DDAFB09AFE3B}"/>
+              </a:ext>
+            </a:extLst>
+          </p:cNvPr>
+          <p:cNvGraphicFramePr>
+            <a:graphicFrameLocks noGrp="1"/>
+          </p:cNvGraphicFramePr>
+          <p:nvPr>
+            <p:extLst>
+              <p:ext uri="{D42A27DB-BD31-4B8C-83A1-F6EECF244321}">
+                <p14:modId xmlns:p14="http://schemas.microsoft.com/office/powerpoint/2010/main" val="688747254"/>
+              </p:ext>
+            </p:extLst>
+          </p:nvPr>
+        </p:nvGraphicFramePr>
+        <p:xfrm>
+          <a:off x="952500" y="2107466"/>
+          <a:ext cx="3662860" cy="4157200"/>
+        </p:xfrm>
+        <a:graphic>
+          <a:graphicData uri="http://schemas.openxmlformats.org/drawingml/2006/table">
+            <a:tbl>
+              <a:tblPr/>
+              <a:tblGrid>
+                <a:gridCol w="3662860">
+                  <a:extLst>
+                    <a:ext uri="{9D8B030D-6E8A-4147-A177-3AD203B41FA5}">
+                      <a16:colId xmlns:a16="http://schemas.microsoft.com/office/drawing/2014/main" val="3598824791"/>
+                    </a:ext>
+                  </a:extLst>
+                </a:gridCol>
+              </a:tblGrid>
+              <a:tr h="841847">
+                <a:tc>
+                  <a:txBody>
+                    <a:bodyPr/>
+                    <a:lstStyle/>
+                    <a:p>
+                      <a:pPr marL="457200" indent="-457200">
+                        <a:buFont typeface="Arial" panose="020B0604020202020204" pitchFamily="34" charset="0"/>
+                        <a:buChar char="•"/>
+                      </a:pPr>
+                      <a:r>
+                        <a:rPr lang="ru-RU" sz="2000" dirty="0">
+                          <a:latin typeface="Times New Roman" panose="02020603050405020304" pitchFamily="18" charset="0"/>
+                          <a:cs typeface="Times New Roman" panose="02020603050405020304" pitchFamily="18" charset="0"/>
+                        </a:rPr>
+                        <a:t>Сбор и анализ требований</a:t>
+                      </a:r>
+                    </a:p>
+                  </a:txBody>
+                  <a:tcPr marL="73593" marR="122655" marT="76659" marB="76659" anchor="ctr">
+                    <a:lnL>
+                      <a:noFill/>
+                    </a:lnL>
+                    <a:lnR>
+                      <a:noFill/>
+                    </a:lnR>
+                    <a:lnT>
+                      <a:noFill/>
+                    </a:lnT>
+                    <a:lnB>
+                      <a:noFill/>
+                    </a:lnB>
+                    <a:solidFill>
+                      <a:schemeClr val="bg1"/>
+                    </a:solidFill>
+                  </a:tcPr>
+                </a:tc>
+                <a:extLst>
+                  <a:ext uri="{0D108BD9-81ED-4DB2-BD59-A6C34878D82A}">
+                    <a16:rowId xmlns:a16="http://schemas.microsoft.com/office/drawing/2014/main" val="4248294907"/>
+                  </a:ext>
+                </a:extLst>
+              </a:tr>
+              <a:tr h="1008748">
+                <a:tc>
+                  <a:txBody>
+                    <a:bodyPr/>
+                    <a:lstStyle/>
+                    <a:p>
+                      <a:pPr marL="457200" indent="-457200">
+                        <a:buFont typeface="Arial" panose="020B0604020202020204" pitchFamily="34" charset="0"/>
+                        <a:buChar char="•"/>
+                      </a:pPr>
+                      <a:r>
+                        <a:rPr lang="ru-RU" sz="2000" dirty="0">
+                          <a:latin typeface="Times New Roman" panose="02020603050405020304" pitchFamily="18" charset="0"/>
+                          <a:cs typeface="Times New Roman" panose="02020603050405020304" pitchFamily="18" charset="0"/>
+                        </a:rPr>
+                        <a:t>Проектирование архитектуры</a:t>
+                      </a:r>
+                    </a:p>
+                  </a:txBody>
+                  <a:tcPr marL="73593" marR="122655" marT="76659" marB="76659" anchor="ctr">
+                    <a:lnL>
+                      <a:noFill/>
+                    </a:lnL>
+                    <a:lnR>
+                      <a:noFill/>
+                    </a:lnR>
+                    <a:lnT>
+                      <a:noFill/>
+                    </a:lnT>
+                    <a:lnB>
+                      <a:noFill/>
+                    </a:lnB>
+                    <a:solidFill>
+                      <a:schemeClr val="bg1"/>
+                    </a:solidFill>
+                  </a:tcPr>
+                </a:tc>
+                <a:extLst>
+                  <a:ext uri="{0D108BD9-81ED-4DB2-BD59-A6C34878D82A}">
+                    <a16:rowId xmlns:a16="http://schemas.microsoft.com/office/drawing/2014/main" val="821610971"/>
+                  </a:ext>
+                </a:extLst>
+              </a:tr>
+              <a:tr h="841847">
+                <a:tc>
+                  <a:txBody>
+                    <a:bodyPr/>
+                    <a:lstStyle/>
+                    <a:p>
+                      <a:pPr marL="457200" indent="-457200">
+                        <a:buFont typeface="Arial" panose="020B0604020202020204" pitchFamily="34" charset="0"/>
+                        <a:buChar char="•"/>
+                      </a:pPr>
+                      <a:r>
+                        <a:rPr lang="ru-RU" sz="2000" dirty="0">
+                          <a:latin typeface="Times New Roman" panose="02020603050405020304" pitchFamily="18" charset="0"/>
+                          <a:cs typeface="Times New Roman" panose="02020603050405020304" pitchFamily="18" charset="0"/>
+                        </a:rPr>
+                        <a:t>Настройка инфраструктуры</a:t>
+                      </a:r>
+                    </a:p>
+                  </a:txBody>
+                  <a:tcPr marL="73593" marR="122655" marT="76659" marB="76659" anchor="ctr">
+                    <a:lnL>
+                      <a:noFill/>
+                    </a:lnL>
+                    <a:lnR>
+                      <a:noFill/>
+                    </a:lnR>
+                    <a:lnT>
+                      <a:noFill/>
+                    </a:lnT>
+                    <a:lnB>
+                      <a:noFill/>
+                    </a:lnB>
+                    <a:solidFill>
+                      <a:schemeClr val="bg1"/>
+                    </a:solidFill>
+                  </a:tcPr>
+                </a:tc>
+                <a:extLst>
+                  <a:ext uri="{0D108BD9-81ED-4DB2-BD59-A6C34878D82A}">
+                    <a16:rowId xmlns:a16="http://schemas.microsoft.com/office/drawing/2014/main" val="4224328359"/>
+                  </a:ext>
+                </a:extLst>
+              </a:tr>
+              <a:tr h="794967">
+                <a:tc>
+                  <a:txBody>
+                    <a:bodyPr/>
+                    <a:lstStyle/>
+                    <a:p>
+                      <a:pPr marL="457200" indent="-457200">
+                        <a:buFont typeface="Arial" panose="020B0604020202020204" pitchFamily="34" charset="0"/>
+                        <a:buChar char="•"/>
+                      </a:pPr>
+                      <a:r>
+                        <a:rPr lang="ru-RU" sz="2000" dirty="0">
+                          <a:latin typeface="Times New Roman" panose="02020603050405020304" pitchFamily="18" charset="0"/>
+                          <a:cs typeface="Times New Roman" panose="02020603050405020304" pitchFamily="18" charset="0"/>
+                        </a:rPr>
+                        <a:t>Прототип системы</a:t>
+                      </a:r>
+                    </a:p>
+                  </a:txBody>
+                  <a:tcPr marL="73593" marR="122655" marT="76659" marB="76659" anchor="ctr">
+                    <a:lnL>
+                      <a:noFill/>
+                    </a:lnL>
+                    <a:lnR>
+                      <a:noFill/>
+                    </a:lnR>
+                    <a:lnT>
+                      <a:noFill/>
+                    </a:lnT>
+                    <a:lnB>
+                      <a:noFill/>
+                    </a:lnB>
+                    <a:solidFill>
+                      <a:schemeClr val="bg1"/>
+                    </a:solidFill>
+                  </a:tcPr>
+                </a:tc>
+                <a:extLst>
+                  <a:ext uri="{0D108BD9-81ED-4DB2-BD59-A6C34878D82A}">
+                    <a16:rowId xmlns:a16="http://schemas.microsoft.com/office/drawing/2014/main" val="2117409972"/>
+                  </a:ext>
+                </a:extLst>
+              </a:tr>
+              <a:tr h="669791">
+                <a:tc>
+                  <a:txBody>
+                    <a:bodyPr/>
+                    <a:lstStyle/>
+                    <a:p>
+                      <a:pPr marL="457200" indent="-457200">
+                        <a:buFont typeface="Arial" panose="020B0604020202020204" pitchFamily="34" charset="0"/>
+                        <a:buChar char="•"/>
+                      </a:pPr>
+                      <a:r>
+                        <a:rPr lang="ru-RU" sz="2000" dirty="0">
+                          <a:latin typeface="Times New Roman" panose="02020603050405020304" pitchFamily="18" charset="0"/>
+                          <a:cs typeface="Times New Roman" panose="02020603050405020304" pitchFamily="18" charset="0"/>
+                        </a:rPr>
+                        <a:t>Оценка рисков</a:t>
+                      </a:r>
+                    </a:p>
+                  </a:txBody>
+                  <a:tcPr marL="73593" marR="122655" marT="76659" marB="76659" anchor="ctr">
+                    <a:lnL>
+                      <a:noFill/>
+                    </a:lnL>
+                    <a:lnR>
+                      <a:noFill/>
+                    </a:lnR>
+                    <a:lnT>
+                      <a:noFill/>
+                    </a:lnT>
+                    <a:lnB>
+                      <a:noFill/>
+                    </a:lnB>
+                    <a:solidFill>
+                      <a:schemeClr val="bg1"/>
+                    </a:solidFill>
+                  </a:tcPr>
+                </a:tc>
+                <a:extLst>
+                  <a:ext uri="{0D108BD9-81ED-4DB2-BD59-A6C34878D82A}">
+                    <a16:rowId xmlns:a16="http://schemas.microsoft.com/office/drawing/2014/main" val="3201861370"/>
+                  </a:ext>
+                </a:extLst>
+              </a:tr>
+            </a:tbl>
+          </a:graphicData>
+        </a:graphic>
+      </p:graphicFrame>
+      <p:sp>
+        <p:nvSpPr>
+          <p:cNvPr id="9" name="TextBox 8">
+            <a:extLst>
+              <a:ext uri="{FF2B5EF4-FFF2-40B4-BE49-F238E27FC236}">
+                <a16:creationId xmlns:a16="http://schemas.microsoft.com/office/drawing/2014/main" id="{1C8F5EA6-4D02-4DFC-87B3-2B84C6507322}"/>
+              </a:ext>
+            </a:extLst>
+          </p:cNvPr>
+          <p:cNvSpPr txBox="1"/>
+          <p:nvPr/>
+        </p:nvSpPr>
+        <p:spPr>
+          <a:xfrm>
+            <a:off x="5810250" y="1390650"/>
+            <a:ext cx="6096000" cy="400110"/>
+          </a:xfrm>
+          <a:prstGeom prst="rect">
+            <a:avLst/>
+          </a:prstGeom>
+          <a:noFill/>
+        </p:spPr>
+        <p:txBody>
+          <a:bodyPr wrap="square">
+            <a:spAutoFit/>
+          </a:bodyPr>
+          <a:lstStyle/>
+          <a:p>
+            <a:pPr algn="l"/>
+            <a:r>
+              <a:rPr lang="ru-RU" sz="2000" dirty="0">
+                <a:latin typeface="Times New Roman" panose="02020603050405020304" pitchFamily="18" charset="0"/>
+                <a:cs typeface="Times New Roman" panose="02020603050405020304" pitchFamily="18" charset="0"/>
+              </a:rPr>
+              <a:t>Итерация 2: Система аутентификации и безопасности</a:t>
             </a:r>
           </a:p>
         </p:txBody>
       </p:sp>
+      <p:graphicFrame>
+        <p:nvGraphicFramePr>
+          <p:cNvPr id="10" name="Таблица 9">
+            <a:extLst>
+              <a:ext uri="{FF2B5EF4-FFF2-40B4-BE49-F238E27FC236}">
+                <a16:creationId xmlns:a16="http://schemas.microsoft.com/office/drawing/2014/main" id="{513A0CE0-959C-4965-B274-C35BA8F0249C}"/>
+              </a:ext>
+            </a:extLst>
+          </p:cNvPr>
+          <p:cNvGraphicFramePr>
+            <a:graphicFrameLocks noGrp="1"/>
+          </p:cNvGraphicFramePr>
+          <p:nvPr>
+            <p:extLst>
+              <p:ext uri="{D42A27DB-BD31-4B8C-83A1-F6EECF244321}">
+                <p14:modId xmlns:p14="http://schemas.microsoft.com/office/powerpoint/2010/main" val="4253796205"/>
+              </p:ext>
+            </p:extLst>
+          </p:nvPr>
+        </p:nvGraphicFramePr>
+        <p:xfrm>
+          <a:off x="7164489" y="2107466"/>
+          <a:ext cx="3755428" cy="4157201"/>
+        </p:xfrm>
+        <a:graphic>
+          <a:graphicData uri="http://schemas.openxmlformats.org/drawingml/2006/table">
+            <a:tbl>
+              <a:tblPr/>
+              <a:tblGrid>
+                <a:gridCol w="3755428">
+                  <a:extLst>
+                    <a:ext uri="{9D8B030D-6E8A-4147-A177-3AD203B41FA5}">
+                      <a16:colId xmlns:a16="http://schemas.microsoft.com/office/drawing/2014/main" val="1532813397"/>
+                    </a:ext>
+                  </a:extLst>
+                </a:gridCol>
+              </a:tblGrid>
+              <a:tr h="630103">
+                <a:tc>
+                  <a:txBody>
+                    <a:bodyPr/>
+                    <a:lstStyle/>
+                    <a:p>
+                      <a:pPr marL="342900" indent="-342900">
+                        <a:buFont typeface="Arial" panose="020B0604020202020204" pitchFamily="34" charset="0"/>
+                        <a:buChar char="•"/>
+                      </a:pPr>
+                      <a:r>
+                        <a:rPr lang="ru-RU" sz="2000" dirty="0">
+                          <a:latin typeface="Times New Roman" panose="02020603050405020304" pitchFamily="18" charset="0"/>
+                          <a:cs typeface="Times New Roman" panose="02020603050405020304" pitchFamily="18" charset="0"/>
+                        </a:rPr>
+                        <a:t>Интеграция с Госуслугами</a:t>
+                      </a:r>
+                    </a:p>
+                  </a:txBody>
+                  <a:tcPr marL="62284" marR="103806" marT="64879" marB="64879" anchor="ctr">
+                    <a:lnL>
+                      <a:noFill/>
+                    </a:lnL>
+                    <a:lnR>
+                      <a:noFill/>
+                    </a:lnR>
+                    <a:lnT>
+                      <a:noFill/>
+                    </a:lnT>
+                    <a:lnB>
+                      <a:noFill/>
+                    </a:lnB>
+                    <a:solidFill>
+                      <a:schemeClr val="bg1"/>
+                    </a:solidFill>
+                  </a:tcPr>
+                </a:tc>
+                <a:extLst>
+                  <a:ext uri="{0D108BD9-81ED-4DB2-BD59-A6C34878D82A}">
+                    <a16:rowId xmlns:a16="http://schemas.microsoft.com/office/drawing/2014/main" val="2482659138"/>
+                  </a:ext>
+                </a:extLst>
+              </a:tr>
+              <a:tr h="804014">
+                <a:tc>
+                  <a:txBody>
+                    <a:bodyPr/>
+                    <a:lstStyle/>
+                    <a:p>
+                      <a:pPr marL="342900" indent="-342900">
+                        <a:buFont typeface="Arial" panose="020B0604020202020204" pitchFamily="34" charset="0"/>
+                        <a:buChar char="•"/>
+                      </a:pPr>
+                      <a:r>
+                        <a:rPr lang="ru-RU" sz="2000" dirty="0">
+                          <a:latin typeface="Times New Roman" panose="02020603050405020304" pitchFamily="18" charset="0"/>
+                          <a:cs typeface="Times New Roman" panose="02020603050405020304" pitchFamily="18" charset="0"/>
+                        </a:rPr>
+                        <a:t>Разработка системы ролей</a:t>
+                      </a:r>
+                    </a:p>
+                  </a:txBody>
+                  <a:tcPr marL="62284" marR="103806" marT="64879" marB="64879" anchor="ctr">
+                    <a:lnL>
+                      <a:noFill/>
+                    </a:lnL>
+                    <a:lnR>
+                      <a:noFill/>
+                    </a:lnR>
+                    <a:lnT>
+                      <a:noFill/>
+                    </a:lnT>
+                    <a:lnB>
+                      <a:noFill/>
+                    </a:lnB>
+                    <a:solidFill>
+                      <a:schemeClr val="bg1"/>
+                    </a:solidFill>
+                  </a:tcPr>
+                </a:tc>
+                <a:extLst>
+                  <a:ext uri="{0D108BD9-81ED-4DB2-BD59-A6C34878D82A}">
+                    <a16:rowId xmlns:a16="http://schemas.microsoft.com/office/drawing/2014/main" val="2314610859"/>
+                  </a:ext>
+                </a:extLst>
+              </a:tr>
+              <a:tr h="804014">
+                <a:tc>
+                  <a:txBody>
+                    <a:bodyPr/>
+                    <a:lstStyle/>
+                    <a:p>
+                      <a:pPr marL="342900" indent="-342900">
+                        <a:buFont typeface="Arial" panose="020B0604020202020204" pitchFamily="34" charset="0"/>
+                        <a:buChar char="•"/>
+                      </a:pPr>
+                      <a:r>
+                        <a:rPr lang="ru-RU" sz="2000" dirty="0">
+                          <a:latin typeface="Times New Roman" panose="02020603050405020304" pitchFamily="18" charset="0"/>
+                          <a:cs typeface="Times New Roman" panose="02020603050405020304" pitchFamily="18" charset="0"/>
+                        </a:rPr>
+                        <a:t>Реализация механизмов защиты</a:t>
+                      </a:r>
+                    </a:p>
+                  </a:txBody>
+                  <a:tcPr marL="62284" marR="103806" marT="64879" marB="64879" anchor="ctr">
+                    <a:lnL>
+                      <a:noFill/>
+                    </a:lnL>
+                    <a:lnR>
+                      <a:noFill/>
+                    </a:lnR>
+                    <a:lnT>
+                      <a:noFill/>
+                    </a:lnT>
+                    <a:lnB>
+                      <a:noFill/>
+                    </a:lnB>
+                    <a:solidFill>
+                      <a:schemeClr val="bg1"/>
+                    </a:solidFill>
+                  </a:tcPr>
+                </a:tc>
+                <a:extLst>
+                  <a:ext uri="{0D108BD9-81ED-4DB2-BD59-A6C34878D82A}">
+                    <a16:rowId xmlns:a16="http://schemas.microsoft.com/office/drawing/2014/main" val="890143256"/>
+                  </a:ext>
+                </a:extLst>
+              </a:tr>
+              <a:tr h="804014">
+                <a:tc>
+                  <a:txBody>
+                    <a:bodyPr/>
+                    <a:lstStyle/>
+                    <a:p>
+                      <a:pPr marL="342900" indent="-342900">
+                        <a:buFont typeface="Arial" panose="020B0604020202020204" pitchFamily="34" charset="0"/>
+                        <a:buChar char="•"/>
+                      </a:pPr>
+                      <a:r>
+                        <a:rPr lang="ru-RU" sz="2000" dirty="0">
+                          <a:latin typeface="Times New Roman" panose="02020603050405020304" pitchFamily="18" charset="0"/>
+                          <a:cs typeface="Times New Roman" panose="02020603050405020304" pitchFamily="18" charset="0"/>
+                        </a:rPr>
+                        <a:t>Прототип формы входа</a:t>
+                      </a:r>
+                    </a:p>
+                  </a:txBody>
+                  <a:tcPr marL="62284" marR="103806" marT="64879" marB="64879" anchor="ctr">
+                    <a:lnL>
+                      <a:noFill/>
+                    </a:lnL>
+                    <a:lnR>
+                      <a:noFill/>
+                    </a:lnR>
+                    <a:lnT>
+                      <a:noFill/>
+                    </a:lnT>
+                    <a:lnB>
+                      <a:noFill/>
+                    </a:lnB>
+                    <a:solidFill>
+                      <a:schemeClr val="bg1"/>
+                    </a:solidFill>
+                  </a:tcPr>
+                </a:tc>
+                <a:extLst>
+                  <a:ext uri="{0D108BD9-81ED-4DB2-BD59-A6C34878D82A}">
+                    <a16:rowId xmlns:a16="http://schemas.microsoft.com/office/drawing/2014/main" val="1150057677"/>
+                  </a:ext>
+                </a:extLst>
+              </a:tr>
+              <a:tr h="639690">
+                <a:tc>
+                  <a:txBody>
+                    <a:bodyPr/>
+                    <a:lstStyle/>
+                    <a:p>
+                      <a:pPr marL="342900" indent="-342900">
+                        <a:buFont typeface="Arial" panose="020B0604020202020204" pitchFamily="34" charset="0"/>
+                        <a:buChar char="•"/>
+                      </a:pPr>
+                      <a:r>
+                        <a:rPr lang="ru-RU" sz="2000" dirty="0">
+                          <a:latin typeface="Times New Roman" panose="02020603050405020304" pitchFamily="18" charset="0"/>
+                          <a:cs typeface="Times New Roman" panose="02020603050405020304" pitchFamily="18" charset="0"/>
+                        </a:rPr>
+                        <a:t>Тестирование безопасности</a:t>
+                      </a:r>
+                    </a:p>
+                  </a:txBody>
+                  <a:tcPr marL="62284" marR="103806" marT="64879" marB="64879" anchor="ctr">
+                    <a:lnL>
+                      <a:noFill/>
+                    </a:lnL>
+                    <a:lnR>
+                      <a:noFill/>
+                    </a:lnR>
+                    <a:lnT>
+                      <a:noFill/>
+                    </a:lnT>
+                    <a:lnB>
+                      <a:noFill/>
+                    </a:lnB>
+                    <a:solidFill>
+                      <a:schemeClr val="bg1"/>
+                    </a:solidFill>
+                  </a:tcPr>
+                </a:tc>
+                <a:extLst>
+                  <a:ext uri="{0D108BD9-81ED-4DB2-BD59-A6C34878D82A}">
+                    <a16:rowId xmlns:a16="http://schemas.microsoft.com/office/drawing/2014/main" val="276882050"/>
+                  </a:ext>
+                </a:extLst>
+              </a:tr>
+              <a:tr h="475366">
+                <a:tc>
+                  <a:txBody>
+                    <a:bodyPr/>
+                    <a:lstStyle/>
+                    <a:p>
+                      <a:pPr marL="342900" indent="-342900">
+                        <a:buFont typeface="Arial" panose="020B0604020202020204" pitchFamily="34" charset="0"/>
+                        <a:buChar char="•"/>
+                      </a:pPr>
+                      <a:r>
+                        <a:rPr lang="ru-RU" sz="2000" dirty="0">
+                          <a:latin typeface="Times New Roman" panose="02020603050405020304" pitchFamily="18" charset="0"/>
+                          <a:cs typeface="Times New Roman" panose="02020603050405020304" pitchFamily="18" charset="0"/>
+                        </a:rPr>
+                        <a:t>Оценка рисков</a:t>
+                      </a:r>
+                    </a:p>
+                  </a:txBody>
+                  <a:tcPr marL="62284" marR="103806" marT="64879" marB="64879" anchor="ctr">
+                    <a:lnL>
+                      <a:noFill/>
+                    </a:lnL>
+                    <a:lnR>
+                      <a:noFill/>
+                    </a:lnR>
+                    <a:lnT>
+                      <a:noFill/>
+                    </a:lnT>
+                    <a:lnB>
+                      <a:noFill/>
+                    </a:lnB>
+                    <a:solidFill>
+                      <a:schemeClr val="bg1"/>
+                    </a:solidFill>
+                  </a:tcPr>
+                </a:tc>
+                <a:extLst>
+                  <a:ext uri="{0D108BD9-81ED-4DB2-BD59-A6C34878D82A}">
+                    <a16:rowId xmlns:a16="http://schemas.microsoft.com/office/drawing/2014/main" val="3027616792"/>
+                  </a:ext>
+                </a:extLst>
+              </a:tr>
+            </a:tbl>
+          </a:graphicData>
+        </a:graphic>
+      </p:graphicFrame>
     </p:spTree>
     <p:extLst>
       <p:ext uri="{BB962C8B-B14F-4D97-AF65-F5344CB8AC3E}">
-        <p14:creationId xmlns:p14="http://schemas.microsoft.com/office/powerpoint/2010/main" val="968755262"/>
+        <p14:creationId xmlns:p14="http://schemas.microsoft.com/office/powerpoint/2010/main" val="3542809798"/>
       </p:ext>
     </p:extLst>
   </p:cSld>
@@ -15051,7 +16393,7 @@
         </p:nvSpPr>
         <p:spPr>
           <a:xfrm>
-            <a:off x="495300" y="1498600"/>
+            <a:off x="1331119" y="3204835"/>
             <a:ext cx="5600700" cy="307777"/>
           </a:xfrm>
           <a:prstGeom prst="rect">
@@ -15078,7 +16420,7 @@
               <a:buNone/>
             </a:pPr>
             <a:r>
-              <a:rPr lang="ru-RU" sz="2000">
+              <a:rPr lang="ru-RU" sz="2000" dirty="0">
                 <a:latin typeface="Times New Roman" panose="02020603050405020304" pitchFamily="18" charset="0"/>
                 <a:cs typeface="Times New Roman" panose="02020603050405020304" pitchFamily="18" charset="0"/>
                 <a:sym typeface="Montserrat SemiBold"/>
@@ -15086,12 +16428,20 @@
               <a:t>4</a:t>
             </a:r>
             <a:r>
-              <a:rPr lang="en-US" sz="2000">
+              <a:rPr lang="en-US" sz="2000" dirty="0">
                 <a:latin typeface="Times New Roman" panose="02020603050405020304" pitchFamily="18" charset="0"/>
                 <a:cs typeface="Times New Roman" panose="02020603050405020304" pitchFamily="18" charset="0"/>
                 <a:sym typeface="Montserrat SemiBold"/>
               </a:rPr>
-              <a:t> уровня доступа</a:t>
+              <a:t> </a:t>
+            </a:r>
+            <a:r>
+              <a:rPr lang="ru-RU" sz="2000" dirty="0">
+                <a:latin typeface="Times New Roman" panose="02020603050405020304" pitchFamily="18" charset="0"/>
+                <a:cs typeface="Times New Roman" panose="02020603050405020304" pitchFamily="18" charset="0"/>
+                <a:sym typeface="Montserrat SemiBold"/>
+              </a:rPr>
+              <a:t>уровня доступа</a:t>
             </a:r>
             <a:r>
               <a:rPr lang="en-US" sz="2000" dirty="0">
@@ -15116,8 +16466,8 @@
         </p:nvSpPr>
         <p:spPr>
           <a:xfrm>
-            <a:off x="923925" y="1841500"/>
-            <a:ext cx="4905375" cy="923330"/>
+            <a:off x="2217740" y="3717925"/>
+            <a:ext cx="4905375" cy="1846659"/>
           </a:xfrm>
           <a:prstGeom prst="rect">
             <a:avLst/>
@@ -15133,7 +16483,7 @@
           </a:bodyPr>
           <a:lstStyle/>
           <a:p>
-            <a:pPr marL="0" marR="0" lvl="0" indent="0" algn="l" rtl="0">
+            <a:pPr marL="457200" marR="0" lvl="0" indent="-457200" algn="l" rtl="0">
               <a:lnSpc>
                 <a:spcPct val="150000"/>
               </a:lnSpc>
@@ -15143,81 +16493,20 @@
               <a:spcAft>
                 <a:spcPts val="0"/>
               </a:spcAft>
-              <a:buNone/>
+              <a:buFont typeface="+mj-lt"/>
+              <a:buAutoNum type="arabicPeriod"/>
             </a:pPr>
             <a:r>
-              <a:rPr lang="en-US" sz="2000">
+              <a:rPr lang="ru-RU" sz="2000" dirty="0">
                 <a:latin typeface="Times New Roman" panose="02020603050405020304" pitchFamily="18" charset="0"/>
                 <a:cs typeface="Times New Roman" panose="02020603050405020304" pitchFamily="18" charset="0"/>
                 <a:sym typeface="Inter SemiBold"/>
               </a:rPr>
-              <a:t>Гость:</a:t>
+              <a:t>Гость</a:t>
             </a:r>
-            <a:r>
-              <a:rPr lang="en-US" sz="2000">
-                <a:latin typeface="Times New Roman" panose="02020603050405020304" pitchFamily="18" charset="0"/>
-                <a:cs typeface="Times New Roman" panose="02020603050405020304" pitchFamily="18" charset="0"/>
-                <a:sym typeface="Inter"/>
-              </a:rPr>
-              <a:t> Доступны только регистрация, форма входа</a:t>
-            </a:r>
-            <a:r>
-              <a:rPr lang="en-US" sz="2000" dirty="0">
-                <a:latin typeface="Times New Roman" panose="02020603050405020304" pitchFamily="18" charset="0"/>
-                <a:cs typeface="Times New Roman" panose="02020603050405020304" pitchFamily="18" charset="0"/>
-                <a:sym typeface="Inter"/>
-              </a:rPr>
-              <a:t> </a:t>
-            </a:r>
-            <a:r>
-              <a:rPr lang="en-US" sz="2000">
-                <a:latin typeface="Times New Roman" panose="02020603050405020304" pitchFamily="18" charset="0"/>
-                <a:cs typeface="Times New Roman" panose="02020603050405020304" pitchFamily="18" charset="0"/>
-                <a:sym typeface="Inter"/>
-              </a:rPr>
-              <a:t>и справочные страницы</a:t>
-            </a:r>
-            <a:r>
-              <a:rPr lang="en-US" sz="2000" dirty="0">
-                <a:latin typeface="Times New Roman" panose="02020603050405020304" pitchFamily="18" charset="0"/>
-                <a:cs typeface="Times New Roman" panose="02020603050405020304" pitchFamily="18" charset="0"/>
-                <a:sym typeface="Inter"/>
-              </a:rPr>
-              <a:t>.</a:t>
-            </a:r>
-            <a:endParaRPr sz="2000" dirty="0">
-              <a:latin typeface="Times New Roman" panose="02020603050405020304" pitchFamily="18" charset="0"/>
-              <a:cs typeface="Times New Roman" panose="02020603050405020304" pitchFamily="18" charset="0"/>
-            </a:endParaRPr>
           </a:p>
-        </p:txBody>
-      </p:sp>
-      <p:sp>
-        <p:nvSpPr>
-          <p:cNvPr id="144" name="Google Shape;144;p16"/>
-          <p:cNvSpPr txBox="1"/>
-          <p:nvPr/>
-        </p:nvSpPr>
-        <p:spPr>
-          <a:xfrm>
-            <a:off x="923925" y="2527300"/>
-            <a:ext cx="4905375" cy="1384995"/>
-          </a:xfrm>
-          <a:prstGeom prst="rect">
-            <a:avLst/>
-          </a:prstGeom>
-          <a:noFill/>
-          <a:ln>
-            <a:noFill/>
-          </a:ln>
-        </p:spPr>
-        <p:txBody>
-          <a:bodyPr spcFirstLastPara="1" wrap="square" lIns="0" tIns="0" rIns="0" bIns="0" anchor="t" anchorCtr="0">
-            <a:spAutoFit/>
-          </a:bodyPr>
-          <a:lstStyle/>
           <a:p>
-            <a:pPr marL="0" marR="0" lvl="0" indent="0" algn="l" rtl="0">
+            <a:pPr marL="457200" marR="0" lvl="0" indent="-457200" algn="l" rtl="0">
               <a:lnSpc>
                 <a:spcPct val="150000"/>
               </a:lnSpc>
@@ -15227,129 +16516,43 @@
               <a:spcAft>
                 <a:spcPts val="0"/>
               </a:spcAft>
-              <a:buNone/>
+              <a:buFont typeface="+mj-lt"/>
+              <a:buAutoNum type="arabicPeriod"/>
             </a:pPr>
             <a:r>
-              <a:rPr lang="ru-RU" sz="2000" err="1">
+              <a:rPr lang="ru-RU" sz="2000" dirty="0">
                 <a:latin typeface="Times New Roman" panose="02020603050405020304" pitchFamily="18" charset="0"/>
                 <a:cs typeface="Times New Roman" panose="02020603050405020304" pitchFamily="18" charset="0"/>
                 <a:sym typeface="Inter SemiBold"/>
               </a:rPr>
-              <a:t>Зарегестрированный</a:t>
+              <a:t>Зарегистрированный пользователь </a:t>
             </a:r>
+          </a:p>
+          <a:p>
+            <a:pPr marL="457200" marR="0" lvl="0" indent="-457200" algn="l" rtl="0">
+              <a:lnSpc>
+                <a:spcPct val="150000"/>
+              </a:lnSpc>
+              <a:spcBef>
+                <a:spcPts val="0"/>
+              </a:spcBef>
+              <a:spcAft>
+                <a:spcPts val="0"/>
+              </a:spcAft>
+              <a:buFont typeface="+mj-lt"/>
+              <a:buAutoNum type="arabicPeriod"/>
+            </a:pPr>
             <a:r>
-              <a:rPr lang="ru-RU" sz="2000">
+              <a:rPr lang="ru-RU" sz="2000" dirty="0">
                 <a:latin typeface="Times New Roman" panose="02020603050405020304" pitchFamily="18" charset="0"/>
                 <a:cs typeface="Times New Roman" panose="02020603050405020304" pitchFamily="18" charset="0"/>
                 <a:sym typeface="Inter SemiBold"/>
               </a:rPr>
-              <a:t> пользователь</a:t>
+              <a:t>Админ </a:t>
             </a:r>
-            <a:r>
-              <a:rPr lang="en-US" sz="2000">
-                <a:latin typeface="Times New Roman" panose="02020603050405020304" pitchFamily="18" charset="0"/>
-                <a:cs typeface="Times New Roman" panose="02020603050405020304" pitchFamily="18" charset="0"/>
-                <a:sym typeface="Inter SemiBold"/>
-              </a:rPr>
-              <a:t>:</a:t>
-            </a:r>
-            <a:r>
-              <a:rPr lang="en-US" sz="2000">
-                <a:latin typeface="Times New Roman" panose="02020603050405020304" pitchFamily="18" charset="0"/>
-                <a:cs typeface="Times New Roman" panose="02020603050405020304" pitchFamily="18" charset="0"/>
-                <a:sym typeface="Inter"/>
-              </a:rPr>
-              <a:t> Доступ</a:t>
-            </a:r>
-            <a:r>
-              <a:rPr lang="en-US" sz="2000" dirty="0">
-                <a:latin typeface="Times New Roman" panose="02020603050405020304" pitchFamily="18" charset="0"/>
-                <a:cs typeface="Times New Roman" panose="02020603050405020304" pitchFamily="18" charset="0"/>
-                <a:sym typeface="Inter"/>
-              </a:rPr>
-              <a:t> </a:t>
-            </a:r>
-            <a:r>
-              <a:rPr lang="en-US" sz="2000">
-                <a:latin typeface="Times New Roman" panose="02020603050405020304" pitchFamily="18" charset="0"/>
-                <a:cs typeface="Times New Roman" panose="02020603050405020304" pitchFamily="18" charset="0"/>
-                <a:sym typeface="Inter"/>
-              </a:rPr>
-              <a:t>к оперативной панели мониторинга</a:t>
-            </a:r>
-            <a:r>
-              <a:rPr lang="en-US" sz="2000" dirty="0">
-                <a:latin typeface="Times New Roman" panose="02020603050405020304" pitchFamily="18" charset="0"/>
-                <a:cs typeface="Times New Roman" panose="02020603050405020304" pitchFamily="18" charset="0"/>
-                <a:sym typeface="Inter"/>
-              </a:rPr>
-              <a:t> </a:t>
-            </a:r>
-            <a:r>
-              <a:rPr lang="en-US" sz="2000">
-                <a:latin typeface="Times New Roman" panose="02020603050405020304" pitchFamily="18" charset="0"/>
-                <a:cs typeface="Times New Roman" panose="02020603050405020304" pitchFamily="18" charset="0"/>
-                <a:sym typeface="Inter"/>
-              </a:rPr>
-              <a:t>и просмотру</a:t>
-            </a:r>
-            <a:r>
-              <a:rPr lang="en-US" sz="2000" dirty="0">
-                <a:latin typeface="Times New Roman" panose="02020603050405020304" pitchFamily="18" charset="0"/>
-                <a:cs typeface="Times New Roman" panose="02020603050405020304" pitchFamily="18" charset="0"/>
-                <a:sym typeface="Inter"/>
-              </a:rPr>
-              <a:t> </a:t>
-            </a:r>
-            <a:r>
-              <a:rPr lang="en-US" sz="2000">
-                <a:latin typeface="Times New Roman" panose="02020603050405020304" pitchFamily="18" charset="0"/>
-                <a:cs typeface="Times New Roman" panose="02020603050405020304" pitchFamily="18" charset="0"/>
-                <a:sym typeface="Inter"/>
-              </a:rPr>
-              <a:t>ЛК пользователей</a:t>
-            </a:r>
-            <a:r>
-              <a:rPr lang="en-US" sz="2000" dirty="0">
-                <a:latin typeface="Times New Roman" panose="02020603050405020304" pitchFamily="18" charset="0"/>
-                <a:cs typeface="Times New Roman" panose="02020603050405020304" pitchFamily="18" charset="0"/>
-                <a:sym typeface="Inter"/>
-              </a:rPr>
-              <a:t>.</a:t>
-            </a:r>
-            <a:endParaRPr sz="2000" dirty="0">
-              <a:latin typeface="Times New Roman" panose="02020603050405020304" pitchFamily="18" charset="0"/>
-              <a:cs typeface="Times New Roman" panose="02020603050405020304" pitchFamily="18" charset="0"/>
-            </a:endParaRPr>
           </a:p>
-        </p:txBody>
-      </p:sp>
-      <p:sp>
-        <p:nvSpPr>
-          <p:cNvPr id="145" name="Google Shape;145;p16"/>
-          <p:cNvSpPr txBox="1"/>
-          <p:nvPr/>
-        </p:nvSpPr>
-        <p:spPr>
-          <a:xfrm>
-            <a:off x="923925" y="4122116"/>
-            <a:ext cx="5172075" cy="923330"/>
-          </a:xfrm>
-          <a:prstGeom prst="rect">
-            <a:avLst/>
-          </a:prstGeom>
-          <a:noFill/>
-          <a:ln>
-            <a:noFill/>
-          </a:ln>
-        </p:spPr>
-        <p:txBody>
-          <a:bodyPr spcFirstLastPara="1" wrap="square" lIns="0" tIns="0" rIns="0" bIns="0" anchor="t" anchorCtr="0">
-            <a:spAutoFit/>
-          </a:bodyPr>
-          <a:lstStyle/>
           <a:p>
-            <a:pPr marL="0" marR="0" lvl="0" indent="0" algn="l" rtl="0">
+            <a:pPr marL="457200" marR="0" lvl="0" indent="-457200" algn="l" rtl="0">
               <a:lnSpc>
                 <a:spcPct val="150000"/>
               </a:lnSpc>
@@ -15359,95 +16562,16 @@
               <a:spcAft>
                 <a:spcPts val="0"/>
               </a:spcAft>
-              <a:buNone/>
+              <a:buFont typeface="+mj-lt"/>
+              <a:buAutoNum type="arabicPeriod"/>
             </a:pPr>
             <a:r>
-              <a:rPr lang="en-US" sz="2000" dirty="0" err="1">
+              <a:rPr lang="ru-RU" sz="2000" dirty="0" err="1">
                 <a:latin typeface="Times New Roman" panose="02020603050405020304" pitchFamily="18" charset="0"/>
                 <a:cs typeface="Times New Roman" panose="02020603050405020304" pitchFamily="18" charset="0"/>
                 <a:sym typeface="Inter SemiBold"/>
               </a:rPr>
               <a:t>Суперадмин</a:t>
-            </a:r>
-            <a:r>
-              <a:rPr lang="en-US" sz="2000" dirty="0">
-                <a:latin typeface="Times New Roman" panose="02020603050405020304" pitchFamily="18" charset="0"/>
-                <a:cs typeface="Times New Roman" panose="02020603050405020304" pitchFamily="18" charset="0"/>
-                <a:sym typeface="Inter SemiBold"/>
-              </a:rPr>
-              <a:t>:</a:t>
-            </a:r>
-            <a:r>
-              <a:rPr lang="en-US" sz="2000" dirty="0">
-                <a:latin typeface="Times New Roman" panose="02020603050405020304" pitchFamily="18" charset="0"/>
-                <a:cs typeface="Times New Roman" panose="02020603050405020304" pitchFamily="18" charset="0"/>
-                <a:sym typeface="Inter"/>
-              </a:rPr>
-              <a:t> </a:t>
-            </a:r>
-            <a:r>
-              <a:rPr lang="en-US" sz="2000" dirty="0" err="1">
-                <a:latin typeface="Times New Roman" panose="02020603050405020304" pitchFamily="18" charset="0"/>
-                <a:cs typeface="Times New Roman" panose="02020603050405020304" pitchFamily="18" charset="0"/>
-                <a:sym typeface="Inter"/>
-              </a:rPr>
-              <a:t>Полный</a:t>
-            </a:r>
-            <a:r>
-              <a:rPr lang="en-US" sz="2000" dirty="0">
-                <a:latin typeface="Times New Roman" panose="02020603050405020304" pitchFamily="18" charset="0"/>
-                <a:cs typeface="Times New Roman" panose="02020603050405020304" pitchFamily="18" charset="0"/>
-                <a:sym typeface="Inter"/>
-              </a:rPr>
-              <a:t> </a:t>
-            </a:r>
-            <a:r>
-              <a:rPr lang="en-US" sz="2000" dirty="0" err="1">
-                <a:latin typeface="Times New Roman" panose="02020603050405020304" pitchFamily="18" charset="0"/>
-                <a:cs typeface="Times New Roman" panose="02020603050405020304" pitchFamily="18" charset="0"/>
-                <a:sym typeface="Inter"/>
-              </a:rPr>
-              <a:t>доступ</a:t>
-            </a:r>
-            <a:r>
-              <a:rPr lang="en-US" sz="2000" dirty="0">
-                <a:latin typeface="Times New Roman" panose="02020603050405020304" pitchFamily="18" charset="0"/>
-                <a:cs typeface="Times New Roman" panose="02020603050405020304" pitchFamily="18" charset="0"/>
-                <a:sym typeface="Inter"/>
-              </a:rPr>
-              <a:t> к </a:t>
-            </a:r>
-            <a:r>
-              <a:rPr lang="en-US" sz="2000" dirty="0" err="1">
-                <a:latin typeface="Times New Roman" panose="02020603050405020304" pitchFamily="18" charset="0"/>
-                <a:cs typeface="Times New Roman" panose="02020603050405020304" pitchFamily="18" charset="0"/>
-                <a:sym typeface="Inter"/>
-              </a:rPr>
-              <a:t>конфигурации</a:t>
-            </a:r>
-            <a:r>
-              <a:rPr lang="en-US" sz="2000" dirty="0">
-                <a:latin typeface="Times New Roman" panose="02020603050405020304" pitchFamily="18" charset="0"/>
-                <a:cs typeface="Times New Roman" panose="02020603050405020304" pitchFamily="18" charset="0"/>
-                <a:sym typeface="Inter"/>
-              </a:rPr>
-              <a:t> </a:t>
-            </a:r>
-            <a:r>
-              <a:rPr lang="en-US" sz="2000" dirty="0" err="1">
-                <a:latin typeface="Times New Roman" panose="02020603050405020304" pitchFamily="18" charset="0"/>
-                <a:cs typeface="Times New Roman" panose="02020603050405020304" pitchFamily="18" charset="0"/>
-                <a:sym typeface="Inter"/>
-              </a:rPr>
-              <a:t>безопасности</a:t>
-            </a:r>
-            <a:r>
-              <a:rPr lang="en-US" sz="2000" dirty="0">
-                <a:latin typeface="Times New Roman" panose="02020603050405020304" pitchFamily="18" charset="0"/>
-                <a:cs typeface="Times New Roman" panose="02020603050405020304" pitchFamily="18" charset="0"/>
-                <a:sym typeface="Inter"/>
-              </a:rPr>
-              <a:t> ИС.</a:t>
             </a:r>
             <a:endParaRPr sz="2000" dirty="0">
               <a:latin typeface="Times New Roman" panose="02020603050405020304" pitchFamily="18" charset="0"/>
@@ -15464,7 +16588,7 @@
         </p:nvSpPr>
         <p:spPr>
           <a:xfrm>
-            <a:off x="714375" y="476250"/>
+            <a:off x="740569" y="428625"/>
             <a:ext cx="11451431" cy="615553"/>
           </a:xfrm>
           <a:prstGeom prst="rect">
@@ -15481,17 +16605,11 @@
           </a:bodyPr>
           <a:lstStyle/>
           <a:p>
-            <a:pPr marL="0" marR="0" lvl="0" indent="0" algn="l" rtl="0">
-              <a:spcBef>
-                <a:spcPts val="0"/>
-              </a:spcBef>
-              <a:spcAft>
-                <a:spcPts val="0"/>
-              </a:spcAft>
-              <a:buNone/>
-            </a:pPr>
             <a:r>
-              <a:rPr lang="en-US" sz="4000" dirty="0" err="1">
+              <a:rPr lang="ru-RU" sz="4000" b="1" dirty="0">
+                <a:solidFill>
+                  <a:srgbClr val="0F172A"/>
+                </a:solidFill>
                 <a:latin typeface="Times New Roman" panose="02020603050405020304" pitchFamily="18" charset="0"/>
                 <a:cs typeface="Times New Roman" panose="02020603050405020304" pitchFamily="18" charset="0"/>
                 <a:sym typeface="Montserrat"/>
@@ -15499,7 +16617,10 @@
               <a:t>Интерфейс</a:t>
             </a:r>
             <a:r>
-              <a:rPr lang="en-US" sz="4000" dirty="0">
+              <a:rPr lang="en-US" sz="4000" b="1" dirty="0">
+                <a:solidFill>
+                  <a:srgbClr val="0F172A"/>
+                </a:solidFill>
                 <a:latin typeface="Times New Roman" panose="02020603050405020304" pitchFamily="18" charset="0"/>
                 <a:cs typeface="Times New Roman" panose="02020603050405020304" pitchFamily="18" charset="0"/>
                 <a:sym typeface="Montserrat"/>
@@ -15507,209 +16628,20 @@
               <a:t> и </a:t>
             </a:r>
             <a:r>
-              <a:rPr lang="en-US" sz="4000" dirty="0" err="1">
+              <a:rPr lang="ru-RU" sz="4000" b="1" dirty="0">
+                <a:solidFill>
+                  <a:srgbClr val="0F172A"/>
+                </a:solidFill>
                 <a:latin typeface="Times New Roman" panose="02020603050405020304" pitchFamily="18" charset="0"/>
                 <a:cs typeface="Times New Roman" panose="02020603050405020304" pitchFamily="18" charset="0"/>
                 <a:sym typeface="Montserrat"/>
               </a:rPr>
-              <a:t>Уровни</a:t>
+              <a:t>уровни доступа</a:t>
             </a:r>
-            <a:r>
-              <a:rPr lang="en-US" sz="4000" dirty="0">
-                <a:latin typeface="Times New Roman" panose="02020603050405020304" pitchFamily="18" charset="0"/>
-                <a:cs typeface="Times New Roman" panose="02020603050405020304" pitchFamily="18" charset="0"/>
-                <a:sym typeface="Montserrat"/>
-              </a:rPr>
-              <a:t> </a:t>
-            </a:r>
-            <a:r>
-              <a:rPr lang="en-US" sz="4000" dirty="0" err="1">
-                <a:latin typeface="Times New Roman" panose="02020603050405020304" pitchFamily="18" charset="0"/>
-                <a:cs typeface="Times New Roman" panose="02020603050405020304" pitchFamily="18" charset="0"/>
-                <a:sym typeface="Montserrat"/>
-              </a:rPr>
-              <a:t>Доступа</a:t>
-            </a:r>
-            <a:endParaRPr sz="4000" dirty="0">
-              <a:latin typeface="Times New Roman" panose="02020603050405020304" pitchFamily="18" charset="0"/>
-              <a:cs typeface="Times New Roman" panose="02020603050405020304" pitchFamily="18" charset="0"/>
-            </a:endParaRPr>
-          </a:p>
-        </p:txBody>
-      </p:sp>
-      <p:sp>
-        <p:nvSpPr>
-          <p:cNvPr id="150" name="Google Shape;150;p16"/>
-          <p:cNvSpPr/>
-          <p:nvPr/>
-        </p:nvSpPr>
-        <p:spPr>
-          <a:xfrm>
-            <a:off x="571500" y="476250"/>
-            <a:ext cx="80964" cy="507206"/>
-          </a:xfrm>
-          <a:prstGeom prst="rect">
-            <a:avLst/>
-          </a:prstGeom>
-          <a:solidFill>
-            <a:srgbClr val="4F46E5"/>
-          </a:solidFill>
-          <a:ln>
-            <a:noFill/>
-          </a:ln>
-        </p:spPr>
-        <p:txBody>
-          <a:bodyPr spcFirstLastPara="1" wrap="square" lIns="91425" tIns="45700" rIns="91425" bIns="45700" anchor="ctr" anchorCtr="0">
-            <a:noAutofit/>
-          </a:bodyPr>
-          <a:lstStyle/>
-          <a:p>
-            <a:pPr marL="0" marR="0" lvl="0" indent="0" algn="ctr" rtl="0">
-              <a:spcBef>
-                <a:spcPts val="0"/>
-              </a:spcBef>
-              <a:spcAft>
-                <a:spcPts val="0"/>
-              </a:spcAft>
-              <a:buNone/>
-            </a:pPr>
-            <a:endParaRPr sz="1800" b="0" i="0" u="none" strike="noStrike" cap="none">
+            <a:endParaRPr sz="4000" b="1" dirty="0">
               <a:solidFill>
-                <a:schemeClr val="dk1"/>
+                <a:srgbClr val="0F172A"/>
               </a:solidFill>
-              <a:latin typeface="Calibri"/>
-              <a:ea typeface="Calibri"/>
-              <a:cs typeface="Calibri"/>
-              <a:sym typeface="Calibri"/>
-            </a:endParaRPr>
-          </a:p>
-        </p:txBody>
-      </p:sp>
-      <p:sp>
-        <p:nvSpPr>
-          <p:cNvPr id="3" name="TextBox 2">
-            <a:extLst>
-              <a:ext uri="{FF2B5EF4-FFF2-40B4-BE49-F238E27FC236}">
-                <a16:creationId xmlns:a16="http://schemas.microsoft.com/office/drawing/2014/main" id="{0D208302-1E1C-CC76-5D58-A89E52EE0435}"/>
-              </a:ext>
-            </a:extLst>
-          </p:cNvPr>
-          <p:cNvSpPr txBox="1"/>
-          <p:nvPr/>
-        </p:nvSpPr>
-        <p:spPr>
-          <a:xfrm>
-            <a:off x="923925" y="5185026"/>
-            <a:ext cx="6096000" cy="707886"/>
-          </a:xfrm>
-          <a:prstGeom prst="rect">
-            <a:avLst/>
-          </a:prstGeom>
-          <a:noFill/>
-        </p:spPr>
-        <p:txBody>
-          <a:bodyPr wrap="square">
-            <a:spAutoFit/>
-          </a:bodyPr>
-          <a:lstStyle/>
-          <a:p>
-            <a:r>
-              <a:rPr lang="ru-RU" sz="2000" dirty="0">
-                <a:latin typeface="Times New Roman" panose="02020603050405020304" pitchFamily="18" charset="0"/>
-                <a:cs typeface="Times New Roman" panose="02020603050405020304" pitchFamily="18" charset="0"/>
-                <a:sym typeface="Inter SemiBold"/>
-              </a:rPr>
-              <a:t>А</a:t>
-            </a:r>
-            <a:r>
-              <a:rPr lang="en-US" sz="2000" dirty="0" err="1">
-                <a:latin typeface="Times New Roman" panose="02020603050405020304" pitchFamily="18" charset="0"/>
-                <a:cs typeface="Times New Roman" panose="02020603050405020304" pitchFamily="18" charset="0"/>
-                <a:sym typeface="Inter SemiBold"/>
-              </a:rPr>
-              <a:t>дмин</a:t>
-            </a:r>
-            <a:r>
-              <a:rPr lang="en-US" sz="2000" dirty="0">
-                <a:latin typeface="Times New Roman" panose="02020603050405020304" pitchFamily="18" charset="0"/>
-                <a:cs typeface="Times New Roman" panose="02020603050405020304" pitchFamily="18" charset="0"/>
-                <a:sym typeface="Inter SemiBold"/>
-              </a:rPr>
-              <a:t>:</a:t>
-            </a:r>
-            <a:r>
-              <a:rPr lang="en-US" sz="2000" dirty="0">
-                <a:latin typeface="Times New Roman" panose="02020603050405020304" pitchFamily="18" charset="0"/>
-                <a:cs typeface="Times New Roman" panose="02020603050405020304" pitchFamily="18" charset="0"/>
-                <a:sym typeface="Inter"/>
-              </a:rPr>
-              <a:t> </a:t>
-            </a:r>
-            <a:r>
-              <a:rPr lang="en-US" sz="2000" dirty="0" err="1">
-                <a:latin typeface="Times New Roman" panose="02020603050405020304" pitchFamily="18" charset="0"/>
-                <a:cs typeface="Times New Roman" panose="02020603050405020304" pitchFamily="18" charset="0"/>
-                <a:sym typeface="Inter"/>
-              </a:rPr>
-              <a:t>Полный</a:t>
-            </a:r>
-            <a:r>
-              <a:rPr lang="en-US" sz="2000" dirty="0">
-                <a:latin typeface="Times New Roman" panose="02020603050405020304" pitchFamily="18" charset="0"/>
-                <a:cs typeface="Times New Roman" panose="02020603050405020304" pitchFamily="18" charset="0"/>
-                <a:sym typeface="Inter"/>
-              </a:rPr>
-              <a:t> </a:t>
-            </a:r>
-            <a:r>
-              <a:rPr lang="en-US" sz="2000" dirty="0" err="1">
-                <a:latin typeface="Times New Roman" panose="02020603050405020304" pitchFamily="18" charset="0"/>
-                <a:cs typeface="Times New Roman" panose="02020603050405020304" pitchFamily="18" charset="0"/>
-                <a:sym typeface="Inter"/>
-              </a:rPr>
-              <a:t>доступ</a:t>
-            </a:r>
-            <a:r>
-              <a:rPr lang="en-US" sz="2000" dirty="0">
-                <a:latin typeface="Times New Roman" panose="02020603050405020304" pitchFamily="18" charset="0"/>
-                <a:cs typeface="Times New Roman" panose="02020603050405020304" pitchFamily="18" charset="0"/>
-                <a:sym typeface="Inter"/>
-              </a:rPr>
-              <a:t> к </a:t>
-            </a:r>
-            <a:r>
-              <a:rPr lang="en-US" sz="2000" dirty="0" err="1">
-                <a:latin typeface="Times New Roman" panose="02020603050405020304" pitchFamily="18" charset="0"/>
-                <a:cs typeface="Times New Roman" panose="02020603050405020304" pitchFamily="18" charset="0"/>
-                <a:sym typeface="Inter"/>
-              </a:rPr>
-              <a:t>конфигурации</a:t>
-            </a:r>
-            <a:r>
-              <a:rPr lang="en-US" sz="2000" dirty="0">
-                <a:latin typeface="Times New Roman" panose="02020603050405020304" pitchFamily="18" charset="0"/>
-                <a:cs typeface="Times New Roman" panose="02020603050405020304" pitchFamily="18" charset="0"/>
-                <a:sym typeface="Inter"/>
-              </a:rPr>
-              <a:t> </a:t>
-            </a:r>
-            <a:r>
-              <a:rPr lang="en-US" sz="2000" dirty="0" err="1">
-                <a:latin typeface="Times New Roman" panose="02020603050405020304" pitchFamily="18" charset="0"/>
-                <a:cs typeface="Times New Roman" panose="02020603050405020304" pitchFamily="18" charset="0"/>
-                <a:sym typeface="Inter"/>
-              </a:rPr>
-              <a:t>безопасности</a:t>
-            </a:r>
-            <a:r>
-              <a:rPr lang="en-US" sz="2000" dirty="0">
-                <a:latin typeface="Times New Roman" panose="02020603050405020304" pitchFamily="18" charset="0"/>
-                <a:cs typeface="Times New Roman" panose="02020603050405020304" pitchFamily="18" charset="0"/>
-                <a:sym typeface="Inter"/>
-              </a:rPr>
-              <a:t> ИС</a:t>
-            </a:r>
-            <a:endParaRPr lang="ru-RU" sz="2000" dirty="0">
               <a:latin typeface="Times New Roman" panose="02020603050405020304" pitchFamily="18" charset="0"/>
               <a:cs typeface="Times New Roman" panose="02020603050405020304" pitchFamily="18" charset="0"/>
             </a:endParaRPr>
@@ -15730,8 +16662,8 @@
         </p:nvSpPr>
         <p:spPr>
           <a:xfrm>
-            <a:off x="8896865" y="2026508"/>
-            <a:ext cx="1848583" cy="307777"/>
+            <a:off x="654844" y="1510639"/>
+            <a:ext cx="2238113" cy="400110"/>
           </a:xfrm>
           <a:prstGeom prst="rect">
             <a:avLst/>
@@ -15745,14 +16677,222 @@
           <a:lstStyle/>
           <a:p>
             <a:r>
-              <a:rPr lang="ru-RU" dirty="0"/>
-              <a:t>Словесное </a:t>
+              <a:rPr lang="ru-RU" sz="2000" dirty="0">
+                <a:latin typeface="Times New Roman" panose="02020603050405020304" pitchFamily="18" charset="0"/>
+                <a:cs typeface="Times New Roman" panose="02020603050405020304" pitchFamily="18" charset="0"/>
+              </a:rPr>
+              <a:t>Описания словами</a:t>
+            </a:r>
+          </a:p>
+        </p:txBody>
+      </p:sp>
+      <p:sp>
+        <p:nvSpPr>
+          <p:cNvPr id="10" name="Google Shape;107;p14">
+            <a:extLst>
+              <a:ext uri="{FF2B5EF4-FFF2-40B4-BE49-F238E27FC236}">
+                <a16:creationId xmlns:a16="http://schemas.microsoft.com/office/drawing/2014/main" id="{BD9B35EC-C90D-4A30-89A9-40BB49CF84C6}"/>
+              </a:ext>
+            </a:extLst>
+          </p:cNvPr>
+          <p:cNvSpPr/>
+          <p:nvPr/>
+        </p:nvSpPr>
+        <p:spPr>
+          <a:xfrm>
+            <a:off x="654844" y="428625"/>
+            <a:ext cx="59530" cy="597694"/>
+          </a:xfrm>
+          <a:prstGeom prst="rect">
+            <a:avLst/>
+          </a:prstGeom>
+          <a:solidFill>
+            <a:srgbClr val="4F46E5"/>
+          </a:solidFill>
+          <a:ln>
+            <a:noFill/>
+          </a:ln>
+        </p:spPr>
+        <p:txBody>
+          <a:bodyPr spcFirstLastPara="1" wrap="square" lIns="91425" tIns="45700" rIns="91425" bIns="45700" anchor="ctr" anchorCtr="0">
+            <a:noAutofit/>
+          </a:bodyPr>
+          <a:lstStyle/>
+          <a:p>
+            <a:pPr marL="0" marR="0" lvl="0" indent="0" algn="ctr" rtl="0">
+              <a:spcBef>
+                <a:spcPts val="0"/>
+              </a:spcBef>
+              <a:spcAft>
+                <a:spcPts val="0"/>
+              </a:spcAft>
+              <a:buNone/>
+            </a:pPr>
+            <a:endParaRPr sz="2800" b="0" i="0" u="none" strike="noStrike" cap="none">
+              <a:solidFill>
+                <a:schemeClr val="dk1"/>
+              </a:solidFill>
+              <a:latin typeface="Times New Roman" panose="02020603050405020304" pitchFamily="18" charset="0"/>
+              <a:ea typeface="Calibri"/>
+              <a:cs typeface="Times New Roman" panose="02020603050405020304" pitchFamily="18" charset="0"/>
+              <a:sym typeface="Calibri"/>
+            </a:endParaRPr>
+          </a:p>
+        </p:txBody>
+      </p:sp>
+      <p:sp>
+        <p:nvSpPr>
+          <p:cNvPr id="2" name="TextBox 1">
+            <a:extLst>
+              <a:ext uri="{FF2B5EF4-FFF2-40B4-BE49-F238E27FC236}">
+                <a16:creationId xmlns:a16="http://schemas.microsoft.com/office/drawing/2014/main" id="{8921D803-0416-4AB1-9AAB-E36CFDF15B01}"/>
+              </a:ext>
+            </a:extLst>
+          </p:cNvPr>
+          <p:cNvSpPr txBox="1"/>
+          <p:nvPr/>
+        </p:nvSpPr>
+        <p:spPr>
+          <a:xfrm>
+            <a:off x="473869" y="2038095"/>
+            <a:ext cx="11833689" cy="707886"/>
+          </a:xfrm>
+          <a:prstGeom prst="rect">
+            <a:avLst/>
+          </a:prstGeom>
+          <a:noFill/>
+        </p:spPr>
+        <p:txBody>
+          <a:bodyPr wrap="none" rtlCol="0">
+            <a:spAutoFit/>
+          </a:bodyPr>
+          <a:lstStyle/>
+          <a:p>
+            <a:r>
+              <a:rPr lang="ru-RU" sz="2000" dirty="0">
+                <a:latin typeface="Times New Roman" panose="02020603050405020304" pitchFamily="18" charset="0"/>
+                <a:cs typeface="Times New Roman" panose="02020603050405020304" pitchFamily="18" charset="0"/>
+              </a:rPr>
+              <a:t>Главная страница -</a:t>
             </a:r>
             <a:r>
-              <a:rPr lang="ru-RU" dirty="0" err="1"/>
-              <a:t>опиание</a:t>
+              <a:rPr lang="en-US" sz="2000" dirty="0">
+                <a:latin typeface="Times New Roman" panose="02020603050405020304" pitchFamily="18" charset="0"/>
+                <a:cs typeface="Times New Roman" panose="02020603050405020304" pitchFamily="18" charset="0"/>
+              </a:rPr>
+              <a:t>&gt;</a:t>
             </a:r>
-            <a:endParaRPr lang="ru-RU" dirty="0"/>
+            <a:r>
+              <a:rPr lang="ru-RU" sz="2000" dirty="0">
+                <a:latin typeface="Times New Roman" panose="02020603050405020304" pitchFamily="18" charset="0"/>
+                <a:cs typeface="Times New Roman" panose="02020603050405020304" pitchFamily="18" charset="0"/>
+              </a:rPr>
+              <a:t> Калькулятор овердрафта -</a:t>
+            </a:r>
+            <a:r>
+              <a:rPr lang="en-US" sz="2000" dirty="0">
+                <a:latin typeface="Times New Roman" panose="02020603050405020304" pitchFamily="18" charset="0"/>
+                <a:cs typeface="Times New Roman" panose="02020603050405020304" pitchFamily="18" charset="0"/>
+              </a:rPr>
+              <a:t>&gt;</a:t>
+            </a:r>
+            <a:r>
+              <a:rPr lang="ru-RU" sz="2000" dirty="0">
+                <a:latin typeface="Times New Roman" panose="02020603050405020304" pitchFamily="18" charset="0"/>
+                <a:cs typeface="Times New Roman" panose="02020603050405020304" pitchFamily="18" charset="0"/>
+              </a:rPr>
+              <a:t> Подать заявку -</a:t>
+            </a:r>
+            <a:r>
+              <a:rPr lang="en-US" sz="2000" dirty="0">
+                <a:latin typeface="Times New Roman" panose="02020603050405020304" pitchFamily="18" charset="0"/>
+                <a:cs typeface="Times New Roman" panose="02020603050405020304" pitchFamily="18" charset="0"/>
+              </a:rPr>
+              <a:t>&gt;</a:t>
+            </a:r>
+            <a:r>
+              <a:rPr lang="ru-RU" sz="2000" dirty="0">
+                <a:latin typeface="Times New Roman" panose="02020603050405020304" pitchFamily="18" charset="0"/>
+                <a:cs typeface="Times New Roman" panose="02020603050405020304" pitchFamily="18" charset="0"/>
+              </a:rPr>
+              <a:t> Регистрация -</a:t>
+            </a:r>
+            <a:r>
+              <a:rPr lang="en-US" sz="2000" dirty="0">
+                <a:latin typeface="Times New Roman" panose="02020603050405020304" pitchFamily="18" charset="0"/>
+                <a:cs typeface="Times New Roman" panose="02020603050405020304" pitchFamily="18" charset="0"/>
+              </a:rPr>
+              <a:t>&gt;</a:t>
+            </a:r>
+            <a:r>
+              <a:rPr lang="ru-RU" sz="2000" dirty="0">
+                <a:latin typeface="Times New Roman" panose="02020603050405020304" pitchFamily="18" charset="0"/>
+                <a:cs typeface="Times New Roman" panose="02020603050405020304" pitchFamily="18" charset="0"/>
+              </a:rPr>
+              <a:t>Вход через Госуслуги -</a:t>
+            </a:r>
+            <a:r>
+              <a:rPr lang="en-US" sz="2000" dirty="0">
+                <a:latin typeface="Times New Roman" panose="02020603050405020304" pitchFamily="18" charset="0"/>
+                <a:cs typeface="Times New Roman" panose="02020603050405020304" pitchFamily="18" charset="0"/>
+              </a:rPr>
+              <a:t>&gt;</a:t>
+            </a:r>
+            <a:endParaRPr lang="ru-RU" sz="2000" dirty="0">
+              <a:latin typeface="Times New Roman" panose="02020603050405020304" pitchFamily="18" charset="0"/>
+              <a:cs typeface="Times New Roman" panose="02020603050405020304" pitchFamily="18" charset="0"/>
+            </a:endParaRPr>
+          </a:p>
+          <a:p>
+            <a:r>
+              <a:rPr lang="ru-RU" sz="2000" dirty="0">
+                <a:latin typeface="Times New Roman" panose="02020603050405020304" pitchFamily="18" charset="0"/>
+                <a:cs typeface="Times New Roman" panose="02020603050405020304" pitchFamily="18" charset="0"/>
+              </a:rPr>
+              <a:t>-</a:t>
+            </a:r>
+            <a:r>
+              <a:rPr lang="en-US" sz="2000" dirty="0">
+                <a:latin typeface="Times New Roman" panose="02020603050405020304" pitchFamily="18" charset="0"/>
+                <a:cs typeface="Times New Roman" panose="02020603050405020304" pitchFamily="18" charset="0"/>
+              </a:rPr>
+              <a:t>&gt;</a:t>
+            </a:r>
+            <a:r>
+              <a:rPr lang="ru-RU" sz="2000" dirty="0">
+                <a:latin typeface="Times New Roman" panose="02020603050405020304" pitchFamily="18" charset="0"/>
+                <a:cs typeface="Times New Roman" panose="02020603050405020304" pitchFamily="18" charset="0"/>
+              </a:rPr>
+              <a:t>Калькулятор овердрафта -</a:t>
+            </a:r>
+            <a:r>
+              <a:rPr lang="en-US" sz="2000" dirty="0">
+                <a:latin typeface="Times New Roman" panose="02020603050405020304" pitchFamily="18" charset="0"/>
+                <a:cs typeface="Times New Roman" panose="02020603050405020304" pitchFamily="18" charset="0"/>
+              </a:rPr>
+              <a:t>&gt;</a:t>
+            </a:r>
+            <a:r>
+              <a:rPr lang="ru-RU" sz="2000" dirty="0">
+                <a:latin typeface="Times New Roman" panose="02020603050405020304" pitchFamily="18" charset="0"/>
+                <a:cs typeface="Times New Roman" panose="02020603050405020304" pitchFamily="18" charset="0"/>
+              </a:rPr>
+              <a:t> Подать заявку -</a:t>
+            </a:r>
+            <a:r>
+              <a:rPr lang="en-US" sz="2000" dirty="0">
+                <a:latin typeface="Times New Roman" panose="02020603050405020304" pitchFamily="18" charset="0"/>
+                <a:cs typeface="Times New Roman" panose="02020603050405020304" pitchFamily="18" charset="0"/>
+              </a:rPr>
+              <a:t>&gt;</a:t>
+            </a:r>
+            <a:r>
+              <a:rPr lang="ru-RU" sz="2000" dirty="0">
+                <a:latin typeface="Times New Roman" panose="02020603050405020304" pitchFamily="18" charset="0"/>
+                <a:cs typeface="Times New Roman" panose="02020603050405020304" pitchFamily="18" charset="0"/>
+              </a:rPr>
+              <a:t> Ожидания подтверждения Администрации </a:t>
+            </a:r>
           </a:p>
         </p:txBody>
       </p:sp>
@@ -15794,8 +16934,8 @@
         </p:nvSpPr>
         <p:spPr>
           <a:xfrm>
-            <a:off x="714375" y="476250"/>
-            <a:ext cx="11451431" cy="615553"/>
+            <a:off x="554830" y="314325"/>
+            <a:ext cx="11451431" cy="553998"/>
           </a:xfrm>
           <a:prstGeom prst="rect">
             <a:avLst/>
@@ -15821,13 +16961,19 @@
               <a:buNone/>
             </a:pPr>
             <a:r>
-              <a:rPr lang="ru-RU" sz="4000" dirty="0">
+              <a:rPr lang="ru-RU" sz="3600" b="1" dirty="0">
+                <a:solidFill>
+                  <a:srgbClr val="0F172A"/>
+                </a:solidFill>
                 <a:latin typeface="Times New Roman" panose="02020603050405020304" pitchFamily="18" charset="0"/>
                 <a:cs typeface="Times New Roman" panose="02020603050405020304" pitchFamily="18" charset="0"/>
               </a:rPr>
-              <a:t>Интерфейс</a:t>
+              <a:t>Интерфейс - Макет</a:t>
             </a:r>
-            <a:endParaRPr sz="4000" dirty="0">
+            <a:endParaRPr sz="3600" b="1" dirty="0">
+              <a:solidFill>
+                <a:srgbClr val="0F172A"/>
+              </a:solidFill>
               <a:latin typeface="Times New Roman" panose="02020603050405020304" pitchFamily="18" charset="0"/>
               <a:cs typeface="Times New Roman" panose="02020603050405020304" pitchFamily="18" charset="0"/>
             </a:endParaRPr>
@@ -15836,14 +16982,20 @@
       </p:sp>
       <p:sp>
         <p:nvSpPr>
-          <p:cNvPr id="169" name="Google Shape;169;p17"/>
+          <p:cNvPr id="4" name="Google Shape;107;p14">
+            <a:extLst>
+              <a:ext uri="{FF2B5EF4-FFF2-40B4-BE49-F238E27FC236}">
+                <a16:creationId xmlns:a16="http://schemas.microsoft.com/office/drawing/2014/main" id="{AFB9E480-E7A8-4661-92BE-C577736F642D}"/>
+              </a:ext>
+            </a:extLst>
+          </p:cNvPr>
           <p:cNvSpPr/>
           <p:nvPr/>
         </p:nvSpPr>
         <p:spPr>
           <a:xfrm>
-            <a:off x="571500" y="476250"/>
-            <a:ext cx="57150" cy="419100"/>
+            <a:off x="495300" y="314325"/>
+            <a:ext cx="59530" cy="597694"/>
           </a:xfrm>
           <a:prstGeom prst="rect">
             <a:avLst/>
@@ -15870,18 +17022,48 @@
               </a:spcAft>
               <a:buNone/>
             </a:pPr>
-            <a:endParaRPr sz="1800" b="0" i="0" u="none" strike="noStrike" cap="none">
+            <a:endParaRPr sz="2800" b="0" i="0" u="none" strike="noStrike" cap="none">
               <a:solidFill>
                 <a:schemeClr val="dk1"/>
               </a:solidFill>
-              <a:latin typeface="Calibri"/>
+              <a:latin typeface="Times New Roman" panose="02020603050405020304" pitchFamily="18" charset="0"/>
               <a:ea typeface="Calibri"/>
-              <a:cs typeface="Calibri"/>
+              <a:cs typeface="Times New Roman" panose="02020603050405020304" pitchFamily="18" charset="0"/>
               <a:sym typeface="Calibri"/>
             </a:endParaRPr>
           </a:p>
         </p:txBody>
       </p:sp>
+      <p:pic>
+        <p:nvPicPr>
+          <p:cNvPr id="8" name="Рисунок 7">
+            <a:extLst>
+              <a:ext uri="{FF2B5EF4-FFF2-40B4-BE49-F238E27FC236}">
+                <a16:creationId xmlns:a16="http://schemas.microsoft.com/office/drawing/2014/main" id="{5E0A1F8D-C6D9-4149-A141-A3217378DE0A}"/>
+              </a:ext>
+            </a:extLst>
+          </p:cNvPr>
+          <p:cNvPicPr>
+            <a:picLocks noChangeAspect="1"/>
+          </p:cNvPicPr>
+          <p:nvPr/>
+        </p:nvPicPr>
+        <p:blipFill>
+          <a:blip r:embed="rId3"/>
+          <a:stretch>
+            <a:fillRect/>
+          </a:stretch>
+        </p:blipFill>
+        <p:spPr>
+          <a:xfrm>
+            <a:off x="680281" y="1866659"/>
+            <a:ext cx="10831437" cy="3448531"/>
+          </a:xfrm>
+          <a:prstGeom prst="rect">
+            <a:avLst/>
+          </a:prstGeom>
+        </p:spPr>
+      </p:pic>
     </p:spTree>
   </p:cSld>
   <p:clrMapOvr>
@@ -15932,80 +17114,32 @@
           </a:bodyPr>
           <a:lstStyle/>
           <a:p>
-            <a:pPr marL="0" marR="0" lvl="0" indent="0" algn="l" rtl="0">
-              <a:spcBef>
-                <a:spcPts val="0"/>
-              </a:spcBef>
-              <a:spcAft>
-                <a:spcPts val="0"/>
-              </a:spcAft>
-              <a:buNone/>
-            </a:pPr>
             <a:r>
-              <a:rPr lang="ru-RU" sz="4000" dirty="0">
+              <a:rPr lang="ru-RU" sz="4000" b="1" dirty="0">
+                <a:solidFill>
+                  <a:srgbClr val="0F172A"/>
+                </a:solidFill>
                 <a:latin typeface="Times New Roman" panose="02020603050405020304" pitchFamily="18" charset="0"/>
                 <a:cs typeface="Times New Roman" panose="02020603050405020304" pitchFamily="18" charset="0"/>
               </a:rPr>
               <a:t>Видео </a:t>
             </a:r>
             <a:r>
-              <a:rPr lang="ru-RU" sz="4000" dirty="0" err="1">
+              <a:rPr lang="ru-RU" sz="4000" b="1" dirty="0" err="1">
+                <a:solidFill>
+                  <a:srgbClr val="0F172A"/>
+                </a:solidFill>
                 <a:latin typeface="Times New Roman" panose="02020603050405020304" pitchFamily="18" charset="0"/>
                 <a:cs typeface="Times New Roman" panose="02020603050405020304" pitchFamily="18" charset="0"/>
               </a:rPr>
-              <a:t>гифка</a:t>
+              <a:t>Гифка</a:t>
             </a:r>
-            <a:endParaRPr sz="4000" dirty="0">
+            <a:endParaRPr sz="4000" b="1" dirty="0">
+              <a:solidFill>
+                <a:srgbClr val="0F172A"/>
+              </a:solidFill>
               <a:latin typeface="Times New Roman" panose="02020603050405020304" pitchFamily="18" charset="0"/>
               <a:cs typeface="Times New Roman" panose="02020603050405020304" pitchFamily="18" charset="0"/>
-            </a:endParaRPr>
-          </a:p>
-        </p:txBody>
-      </p:sp>
-      <p:sp>
-        <p:nvSpPr>
-          <p:cNvPr id="169" name="Google Shape;169;p17"/>
-          <p:cNvSpPr/>
-          <p:nvPr/>
-        </p:nvSpPr>
-        <p:spPr>
-          <a:xfrm>
-            <a:off x="571500" y="476250"/>
-            <a:ext cx="57150" cy="419100"/>
-          </a:xfrm>
-          <a:prstGeom prst="rect">
-            <a:avLst/>
-          </a:prstGeom>
-          <a:solidFill>
-            <a:srgbClr val="4F46E5"/>
-          </a:solidFill>
-          <a:ln>
-            <a:noFill/>
-          </a:ln>
-        </p:spPr>
-        <p:txBody>
-          <a:bodyPr spcFirstLastPara="1" wrap="square" lIns="91425" tIns="45700" rIns="91425" bIns="45700" anchor="ctr" anchorCtr="0">
-            <a:noAutofit/>
-          </a:bodyPr>
-          <a:lstStyle/>
-          <a:p>
-            <a:pPr marL="0" marR="0" lvl="0" indent="0" algn="ctr" rtl="0">
-              <a:spcBef>
-                <a:spcPts val="0"/>
-              </a:spcBef>
-              <a:spcAft>
-                <a:spcPts val="0"/>
-              </a:spcAft>
-              <a:buNone/>
-            </a:pPr>
-            <a:endParaRPr sz="1800" b="0" i="0" u="none" strike="noStrike" cap="none">
-              <a:solidFill>
-                <a:schemeClr val="dk1"/>
-              </a:solidFill>
-              <a:latin typeface="Calibri"/>
-              <a:ea typeface="Calibri"/>
-              <a:cs typeface="Calibri"/>
-              <a:sym typeface="Calibri"/>
             </a:endParaRPr>
           </a:p>
         </p:txBody>
@@ -16024,7 +17158,7 @@
         </p:nvSpPr>
         <p:spPr>
           <a:xfrm>
-            <a:off x="803876" y="3429000"/>
+            <a:off x="306571" y="3963197"/>
             <a:ext cx="2527300" cy="2377503"/>
           </a:xfrm>
           <a:prstGeom prst="rect">
@@ -16056,6 +17190,8 @@
               <a:solidFill>
                 <a:schemeClr val="tx1"/>
               </a:solidFill>
+              <a:latin typeface="Times New Roman" panose="02020603050405020304" pitchFamily="18" charset="0"/>
+              <a:cs typeface="Times New Roman" panose="02020603050405020304" pitchFamily="18" charset="0"/>
             </a:endParaRPr>
           </a:p>
         </p:txBody>
@@ -16074,7 +17210,7 @@
         </p:nvSpPr>
         <p:spPr>
           <a:xfrm>
-            <a:off x="1451576" y="5862138"/>
+            <a:off x="954271" y="6396335"/>
             <a:ext cx="1231900" cy="461665"/>
           </a:xfrm>
           <a:prstGeom prst="rect">
@@ -16099,6 +17235,90 @@
               </a:rPr>
               <a:t>Сайт</a:t>
             </a:r>
+          </a:p>
+        </p:txBody>
+      </p:sp>
+      <p:pic>
+        <p:nvPicPr>
+          <p:cNvPr id="4" name="Рисунок 3">
+            <a:extLst>
+              <a:ext uri="{FF2B5EF4-FFF2-40B4-BE49-F238E27FC236}">
+                <a16:creationId xmlns:a16="http://schemas.microsoft.com/office/drawing/2014/main" id="{F177E0A0-3114-458F-B29B-E1ECD91B7E9C}"/>
+              </a:ext>
+            </a:extLst>
+          </p:cNvPr>
+          <p:cNvPicPr>
+            <a:picLocks noChangeAspect="1"/>
+          </p:cNvPicPr>
+          <p:nvPr/>
+        </p:nvPicPr>
+        <p:blipFill>
+          <a:blip r:embed="rId3"/>
+          <a:stretch>
+            <a:fillRect/>
+          </a:stretch>
+        </p:blipFill>
+        <p:spPr>
+          <a:xfrm>
+            <a:off x="410745" y="4038121"/>
+            <a:ext cx="2318952" cy="2227654"/>
+          </a:xfrm>
+          <a:prstGeom prst="rect">
+            <a:avLst/>
+          </a:prstGeom>
+        </p:spPr>
+      </p:pic>
+      <p:sp>
+        <p:nvSpPr>
+          <p:cNvPr id="8" name="Google Shape;107;p14">
+            <a:extLst>
+              <a:ext uri="{FF2B5EF4-FFF2-40B4-BE49-F238E27FC236}">
+                <a16:creationId xmlns:a16="http://schemas.microsoft.com/office/drawing/2014/main" id="{E7A00DB9-6AAB-4886-86BA-660176C90C01}"/>
+              </a:ext>
+            </a:extLst>
+          </p:cNvPr>
+          <p:cNvSpPr/>
+          <p:nvPr/>
+        </p:nvSpPr>
+        <p:spPr>
+          <a:xfrm>
+            <a:off x="628650" y="476250"/>
+            <a:ext cx="59530" cy="597694"/>
+          </a:xfrm>
+          <a:prstGeom prst="rect">
+            <a:avLst/>
+          </a:prstGeom>
+          <a:solidFill>
+            <a:srgbClr val="4F46E5"/>
+          </a:solidFill>
+          <a:ln>
+            <a:noFill/>
+          </a:ln>
+        </p:spPr>
+        <p:txBody>
+          <a:bodyPr spcFirstLastPara="1" wrap="square" lIns="91425" tIns="45700" rIns="91425" bIns="45700" anchor="ctr" anchorCtr="0">
+            <a:noAutofit/>
+          </a:bodyPr>
+          <a:lstStyle/>
+          <a:p>
+            <a:pPr marL="0" marR="0" lvl="0" indent="0" algn="ctr" rtl="0">
+              <a:spcBef>
+                <a:spcPts val="0"/>
+              </a:spcBef>
+              <a:spcAft>
+                <a:spcPts val="0"/>
+              </a:spcAft>
+              <a:buNone/>
+            </a:pPr>
+            <a:endParaRPr sz="2800" b="0" i="0" u="none" strike="noStrike" cap="none">
+              <a:solidFill>
+                <a:schemeClr val="dk1"/>
+              </a:solidFill>
+              <a:latin typeface="Times New Roman" panose="02020603050405020304" pitchFamily="18" charset="0"/>
+              <a:ea typeface="Calibri"/>
+              <a:cs typeface="Times New Roman" panose="02020603050405020304" pitchFamily="18" charset="0"/>
+              <a:sym typeface="Calibri"/>
+            </a:endParaRPr>
           </a:p>
         </p:txBody>
       </p:sp>
@@ -16147,7 +17367,7 @@
         </p:blipFill>
         <p:spPr>
           <a:xfrm>
-            <a:off x="571500" y="2200275"/>
+            <a:off x="714375" y="2066925"/>
             <a:ext cx="3530649" cy="3162300"/>
           </a:xfrm>
           <a:prstGeom prst="rect">
@@ -16174,34 +17394,7 @@
         </p:blipFill>
         <p:spPr>
           <a:xfrm>
-            <a:off x="4330749" y="2200275"/>
-            <a:ext cx="3530649" cy="3162300"/>
-          </a:xfrm>
-          <a:prstGeom prst="rect">
-            <a:avLst/>
-          </a:prstGeom>
-          <a:noFill/>
-          <a:ln>
-            <a:noFill/>
-          </a:ln>
-        </p:spPr>
-      </p:pic>
-      <p:pic>
-        <p:nvPicPr>
-          <p:cNvPr id="158" name="Google Shape;158;p17" descr="image.png"/>
-          <p:cNvPicPr preferRelativeResize="0"/>
-          <p:nvPr/>
-        </p:nvPicPr>
-        <p:blipFill rotWithShape="1">
-          <a:blip r:embed="rId5">
-            <a:alphaModFix/>
-          </a:blip>
-          <a:srcRect/>
-          <a:stretch/>
-        </p:blipFill>
-        <p:spPr>
-          <a:xfrm>
-            <a:off x="8089999" y="2200275"/>
+            <a:off x="8089853" y="2066925"/>
             <a:ext cx="3530649" cy="3162300"/>
           </a:xfrm>
           <a:prstGeom prst="rect">
@@ -16222,7 +17415,7 @@
         <p:spPr>
           <a:xfrm>
             <a:off x="714375" y="476250"/>
-            <a:ext cx="11451431" cy="419100"/>
+            <a:ext cx="11451431" cy="615553"/>
           </a:xfrm>
           <a:prstGeom prst="rect">
             <a:avLst/>
@@ -16248,79 +17441,63 @@
               <a:buNone/>
             </a:pPr>
             <a:r>
-              <a:rPr lang="en-US" sz="2700" b="1" i="0" u="none" strike="noStrike" cap="none" dirty="0" err="1">
+              <a:rPr lang="ru-RU" sz="4000" b="1" i="0" u="none" strike="noStrike" cap="none" dirty="0">
                 <a:solidFill>
                   <a:srgbClr val="0F172A"/>
                 </a:solidFill>
-                <a:latin typeface="Montserrat"/>
+                <a:latin typeface="Times New Roman" panose="02020603050405020304" pitchFamily="18" charset="0"/>
                 <a:ea typeface="Montserrat"/>
-                <a:cs typeface="Montserrat"/>
+                <a:cs typeface="Times New Roman" panose="02020603050405020304" pitchFamily="18" charset="0"/>
                 <a:sym typeface="Montserrat"/>
               </a:rPr>
-              <a:t>Принципы</a:t>
+              <a:t>Принципы </a:t>
             </a:r>
             <a:r>
-              <a:rPr lang="en-US" sz="2700" b="1" i="0" u="none" strike="noStrike" cap="none" dirty="0">
+              <a:rPr lang="ru-RU" sz="4000" b="1" dirty="0">
                 <a:solidFill>
                   <a:srgbClr val="0F172A"/>
                 </a:solidFill>
-                <a:latin typeface="Montserrat"/>
-                <a:ea typeface="Montserrat"/>
-                <a:cs typeface="Montserrat"/>
+                <a:latin typeface="Times New Roman" panose="02020603050405020304" pitchFamily="18" charset="0"/>
+                <a:cs typeface="Times New Roman" panose="02020603050405020304" pitchFamily="18" charset="0"/>
                 <a:sym typeface="Montserrat"/>
               </a:rPr>
-              <a:t> </a:t>
+              <a:t>удобного</a:t>
             </a:r>
             <a:r>
-              <a:rPr lang="en-US" sz="2700" b="1" i="0" u="none" strike="noStrike" cap="none" dirty="0" err="1">
+              <a:rPr lang="en-US" sz="4000" b="1" i="0" u="none" strike="noStrike" cap="none" dirty="0">
                 <a:solidFill>
                   <a:srgbClr val="0F172A"/>
                 </a:solidFill>
-                <a:latin typeface="Montserrat"/>
+                <a:latin typeface="Times New Roman" panose="02020603050405020304" pitchFamily="18" charset="0"/>
                 <a:ea typeface="Montserrat"/>
-                <a:cs typeface="Montserrat"/>
-                <a:sym typeface="Montserrat"/>
-              </a:rPr>
-              <a:t>Проектирования</a:t>
-            </a:r>
-            <a:r>
-              <a:rPr lang="ru-RU" sz="2700" b="1" i="0" u="none" strike="noStrike" cap="none" dirty="0">
-                <a:solidFill>
-                  <a:srgbClr val="0F172A"/>
-                </a:solidFill>
-                <a:latin typeface="Montserrat"/>
-                <a:ea typeface="Montserrat"/>
-                <a:cs typeface="Montserrat"/>
-                <a:sym typeface="Montserrat"/>
-              </a:rPr>
-              <a:t> удобного</a:t>
-            </a:r>
-            <a:r>
-              <a:rPr lang="en-US" sz="2700" b="1" i="0" u="none" strike="noStrike" cap="none" dirty="0">
-                <a:solidFill>
-                  <a:srgbClr val="0F172A"/>
-                </a:solidFill>
-                <a:latin typeface="Montserrat"/>
-                <a:ea typeface="Montserrat"/>
-                <a:cs typeface="Montserrat"/>
+                <a:cs typeface="Times New Roman" panose="02020603050405020304" pitchFamily="18" charset="0"/>
                 <a:sym typeface="Montserrat"/>
               </a:rPr>
               <a:t> GUI</a:t>
             </a:r>
-            <a:endParaRPr dirty="0"/>
+            <a:endParaRPr sz="4000" dirty="0">
+              <a:latin typeface="Times New Roman" panose="02020603050405020304" pitchFamily="18" charset="0"/>
+              <a:cs typeface="Times New Roman" panose="02020603050405020304" pitchFamily="18" charset="0"/>
+            </a:endParaRPr>
           </a:p>
         </p:txBody>
       </p:sp>
       <p:sp>
         <p:nvSpPr>
-          <p:cNvPr id="169" name="Google Shape;169;p17"/>
+          <p:cNvPr id="7" name="Google Shape;107;p14">
+            <a:extLst>
+              <a:ext uri="{FF2B5EF4-FFF2-40B4-BE49-F238E27FC236}">
+                <a16:creationId xmlns:a16="http://schemas.microsoft.com/office/drawing/2014/main" id="{0B192ED6-430D-41EF-9F35-3717AC15C704}"/>
+              </a:ext>
+            </a:extLst>
+          </p:cNvPr>
           <p:cNvSpPr/>
           <p:nvPr/>
         </p:nvSpPr>
         <p:spPr>
           <a:xfrm>
-            <a:off x="571500" y="476250"/>
-            <a:ext cx="57150" cy="419100"/>
+            <a:off x="628650" y="476250"/>
+            <a:ext cx="59530" cy="597694"/>
           </a:xfrm>
           <a:prstGeom prst="rect">
             <a:avLst/>
@@ -16347,15 +17524,91 @@
               </a:spcAft>
               <a:buNone/>
             </a:pPr>
-            <a:endParaRPr sz="1800" b="0" i="0" u="none" strike="noStrike" cap="none">
+            <a:endParaRPr sz="2800" b="0" i="0" u="none" strike="noStrike" cap="none">
               <a:solidFill>
                 <a:schemeClr val="dk1"/>
               </a:solidFill>
-              <a:latin typeface="Calibri"/>
+              <a:latin typeface="Times New Roman" panose="02020603050405020304" pitchFamily="18" charset="0"/>
               <a:ea typeface="Calibri"/>
-              <a:cs typeface="Calibri"/>
+              <a:cs typeface="Times New Roman" panose="02020603050405020304" pitchFamily="18" charset="0"/>
               <a:sym typeface="Calibri"/>
             </a:endParaRPr>
+          </a:p>
+        </p:txBody>
+      </p:sp>
+      <p:sp>
+        <p:nvSpPr>
+          <p:cNvPr id="2" name="TextBox 1">
+            <a:extLst>
+              <a:ext uri="{FF2B5EF4-FFF2-40B4-BE49-F238E27FC236}">
+                <a16:creationId xmlns:a16="http://schemas.microsoft.com/office/drawing/2014/main" id="{D12EA948-2EAD-4EE2-977D-E293FB6C5D5D}"/>
+              </a:ext>
+            </a:extLst>
+          </p:cNvPr>
+          <p:cNvSpPr txBox="1"/>
+          <p:nvPr/>
+        </p:nvSpPr>
+        <p:spPr>
+          <a:xfrm>
+            <a:off x="1857375" y="3429000"/>
+            <a:ext cx="1653017" cy="307777"/>
+          </a:xfrm>
+          <a:prstGeom prst="rect">
+            <a:avLst/>
+          </a:prstGeom>
+          <a:noFill/>
+        </p:spPr>
+        <p:txBody>
+          <a:bodyPr wrap="none" rtlCol="0">
+            <a:spAutoFit/>
+          </a:bodyPr>
+          <a:lstStyle/>
+          <a:p>
+            <a:r>
+              <a:rPr lang="ru-RU" dirty="0">
+                <a:latin typeface="Times New Roman" panose="02020603050405020304" pitchFamily="18" charset="0"/>
+                <a:cs typeface="Times New Roman" panose="02020603050405020304" pitchFamily="18" charset="0"/>
+              </a:rPr>
+              <a:t>Принцип простоты</a:t>
+            </a:r>
+          </a:p>
+        </p:txBody>
+      </p:sp>
+      <p:sp>
+        <p:nvSpPr>
+          <p:cNvPr id="3" name="TextBox 2">
+            <a:extLst>
+              <a:ext uri="{FF2B5EF4-FFF2-40B4-BE49-F238E27FC236}">
+                <a16:creationId xmlns:a16="http://schemas.microsoft.com/office/drawing/2014/main" id="{9AADD212-2BB6-4BFC-8644-F826C7C5BA97}"/>
+              </a:ext>
+            </a:extLst>
+          </p:cNvPr>
+          <p:cNvSpPr txBox="1"/>
+          <p:nvPr/>
+        </p:nvSpPr>
+        <p:spPr>
+          <a:xfrm>
+            <a:off x="9248775" y="3340298"/>
+            <a:ext cx="1792478" cy="307777"/>
+          </a:xfrm>
+          <a:prstGeom prst="rect">
+            <a:avLst/>
+          </a:prstGeom>
+          <a:noFill/>
+        </p:spPr>
+        <p:txBody>
+          <a:bodyPr wrap="none" rtlCol="0">
+            <a:spAutoFit/>
+          </a:bodyPr>
+          <a:lstStyle/>
+          <a:p>
+            <a:r>
+              <a:rPr lang="ru-RU" dirty="0">
+                <a:latin typeface="Times New Roman" panose="02020603050405020304" pitchFamily="18" charset="0"/>
+                <a:cs typeface="Times New Roman" panose="02020603050405020304" pitchFamily="18" charset="0"/>
+              </a:rPr>
+              <a:t>Принцип Видимости</a:t>
+            </a:r>
           </a:p>
         </p:txBody>
       </p:sp>
@@ -16398,7 +17651,7 @@
         <p:spPr>
           <a:xfrm>
             <a:off x="714375" y="476250"/>
-            <a:ext cx="11451431" cy="419100"/>
+            <a:ext cx="11451431" cy="615553"/>
           </a:xfrm>
           <a:prstGeom prst="rect">
             <a:avLst/>
@@ -16414,75 +17667,23 @@
           </a:bodyPr>
           <a:lstStyle/>
           <a:p>
-            <a:pPr marL="0" marR="0" lvl="0" indent="0" algn="l" rtl="0">
-              <a:spcBef>
-                <a:spcPts val="0"/>
-              </a:spcBef>
-              <a:spcAft>
-                <a:spcPts val="0"/>
-              </a:spcAft>
-              <a:buNone/>
-            </a:pPr>
             <a:r>
-              <a:rPr lang="en-US" sz="2700" b="1" i="0" u="none" strike="noStrike" cap="none">
+              <a:rPr lang="ru-RU" sz="4000" b="1" dirty="0">
                 <a:solidFill>
                   <a:srgbClr val="0F172A"/>
                 </a:solidFill>
-                <a:latin typeface="Montserrat"/>
-                <a:ea typeface="Montserrat"/>
-                <a:cs typeface="Montserrat"/>
+                <a:latin typeface="Times New Roman" panose="02020603050405020304" pitchFamily="18" charset="0"/>
+                <a:cs typeface="Times New Roman" panose="02020603050405020304" pitchFamily="18" charset="0"/>
                 <a:sym typeface="Montserrat"/>
               </a:rPr>
-              <a:t>Руководство Оператора и ГОСТы</a:t>
+              <a:t>Руководство Оператора и ГОСТы(ЕСПД)</a:t>
             </a:r>
-            <a:endParaRPr/>
-          </a:p>
-        </p:txBody>
-      </p:sp>
-      <p:sp>
-        <p:nvSpPr>
-          <p:cNvPr id="189" name="Google Shape;189;p18"/>
-          <p:cNvSpPr/>
-          <p:nvPr/>
-        </p:nvSpPr>
-        <p:spPr>
-          <a:xfrm>
-            <a:off x="571500" y="476250"/>
-            <a:ext cx="57150" cy="419100"/>
-          </a:xfrm>
-          <a:prstGeom prst="rect">
-            <a:avLst/>
-          </a:prstGeom>
-          <a:solidFill>
-            <a:srgbClr val="4F46E5"/>
-          </a:solidFill>
-          <a:ln>
-            <a:noFill/>
-          </a:ln>
-        </p:spPr>
-        <p:txBody>
-          <a:bodyPr spcFirstLastPara="1" wrap="square" lIns="91425" tIns="45700" rIns="91425" bIns="45700" anchor="ctr" anchorCtr="0">
-            <a:noAutofit/>
-          </a:bodyPr>
-          <a:lstStyle/>
-          <a:p>
-            <a:pPr marL="0" marR="0" lvl="0" indent="0" algn="ctr" rtl="0">
-              <a:spcBef>
-                <a:spcPts val="0"/>
-              </a:spcBef>
-              <a:spcAft>
-                <a:spcPts val="0"/>
-              </a:spcAft>
-              <a:buNone/>
-            </a:pPr>
-            <a:endParaRPr sz="1800" b="0" i="0" u="none" strike="noStrike" cap="none">
+            <a:endParaRPr sz="4000" b="1" dirty="0">
               <a:solidFill>
-                <a:schemeClr val="dk1"/>
+                <a:srgbClr val="0F172A"/>
               </a:solidFill>
-              <a:latin typeface="Calibri"/>
-              <a:ea typeface="Calibri"/>
-              <a:cs typeface="Calibri"/>
-              <a:sym typeface="Calibri"/>
+              <a:latin typeface="Times New Roman" panose="02020603050405020304" pitchFamily="18" charset="0"/>
+              <a:cs typeface="Times New Roman" panose="02020603050405020304" pitchFamily="18" charset="0"/>
             </a:endParaRPr>
           </a:p>
         </p:txBody>
@@ -16501,8 +17702,8 @@
         </p:nvSpPr>
         <p:spPr>
           <a:xfrm>
-            <a:off x="5993027" y="2199503"/>
-            <a:ext cx="2109873" cy="307777"/>
+            <a:off x="688180" y="1570940"/>
+            <a:ext cx="1141659" cy="400110"/>
           </a:xfrm>
           <a:prstGeom prst="rect">
             <a:avLst/>
@@ -16516,59 +17717,26 @@
           <a:lstStyle/>
           <a:p>
             <a:r>
-              <a:rPr lang="ru-RU" dirty="0"/>
-              <a:t>ГОСТЫ И содержание </a:t>
+              <a:rPr lang="ru-RU" sz="2000" dirty="0">
+                <a:latin typeface="Times New Roman" panose="02020603050405020304" pitchFamily="18" charset="0"/>
+                <a:cs typeface="Times New Roman" panose="02020603050405020304" pitchFamily="18" charset="0"/>
+              </a:rPr>
+              <a:t>ГОСТы</a:t>
             </a:r>
-          </a:p>
-        </p:txBody>
-      </p:sp>
-      <p:sp>
-        <p:nvSpPr>
-          <p:cNvPr id="3" name="Прямоугольник 2">
-            <a:extLst>
-              <a:ext uri="{FF2B5EF4-FFF2-40B4-BE49-F238E27FC236}">
-                <a16:creationId xmlns:a16="http://schemas.microsoft.com/office/drawing/2014/main" id="{0E7C4C2B-00C1-C512-D469-3CDBCA1E4D00}"/>
-              </a:ext>
-            </a:extLst>
-          </p:cNvPr>
-          <p:cNvSpPr/>
-          <p:nvPr/>
-        </p:nvSpPr>
-        <p:spPr>
-          <a:xfrm>
-            <a:off x="495298" y="3429000"/>
-            <a:ext cx="2374899" cy="2400300"/>
-          </a:xfrm>
-          <a:prstGeom prst="rect">
-            <a:avLst/>
-          </a:prstGeom>
-        </p:spPr>
-        <p:style>
-          <a:lnRef idx="2">
-            <a:schemeClr val="accent1">
-              <a:shade val="15000"/>
-            </a:schemeClr>
-          </a:lnRef>
-          <a:fillRef idx="1">
-            <a:schemeClr val="accent1"/>
-          </a:fillRef>
-          <a:effectRef idx="0">
-            <a:schemeClr val="accent1"/>
-          </a:effectRef>
-          <a:fontRef idx="minor">
-            <a:schemeClr val="lt1"/>
-          </a:fontRef>
-        </p:style>
-        <p:txBody>
-          <a:bodyPr rtlCol="0" anchor="ctr"/>
-          <a:lstStyle/>
-          <a:p>
-            <a:pPr algn="ctr"/>
-            <a:endParaRPr lang="ru-RU">
-              <a:solidFill>
-                <a:schemeClr val="tx1"/>
-              </a:solidFill>
-            </a:endParaRPr>
+            <a:r>
+              <a:rPr lang="en-US" sz="2000" dirty="0">
+                <a:latin typeface="Times New Roman" panose="02020603050405020304" pitchFamily="18" charset="0"/>
+                <a:cs typeface="Times New Roman" panose="02020603050405020304" pitchFamily="18" charset="0"/>
+              </a:rPr>
+              <a:t>:</a:t>
+            </a:r>
+            <a:r>
+              <a:rPr lang="ru-RU" dirty="0">
+                <a:latin typeface="Times New Roman" panose="02020603050405020304" pitchFamily="18" charset="0"/>
+                <a:cs typeface="Times New Roman" panose="02020603050405020304" pitchFamily="18" charset="0"/>
+              </a:rPr>
+              <a:t> </a:t>
+            </a:r>
           </a:p>
         </p:txBody>
       </p:sp>
@@ -16618,6 +17786,248 @@
               <a:latin typeface="Times New Roman" panose="02020603050405020304" pitchFamily="18" charset="0"/>
               <a:cs typeface="Times New Roman" panose="02020603050405020304" pitchFamily="18" charset="0"/>
             </a:endParaRPr>
+          </a:p>
+        </p:txBody>
+      </p:sp>
+      <p:sp>
+        <p:nvSpPr>
+          <p:cNvPr id="11" name="Google Shape;107;p14">
+            <a:extLst>
+              <a:ext uri="{FF2B5EF4-FFF2-40B4-BE49-F238E27FC236}">
+                <a16:creationId xmlns:a16="http://schemas.microsoft.com/office/drawing/2014/main" id="{32B9CE89-8A2B-4560-B497-6BBA438C4EF4}"/>
+              </a:ext>
+            </a:extLst>
+          </p:cNvPr>
+          <p:cNvSpPr/>
+          <p:nvPr/>
+        </p:nvSpPr>
+        <p:spPr>
+          <a:xfrm>
+            <a:off x="628650" y="476250"/>
+            <a:ext cx="59530" cy="597694"/>
+          </a:xfrm>
+          <a:prstGeom prst="rect">
+            <a:avLst/>
+          </a:prstGeom>
+          <a:solidFill>
+            <a:srgbClr val="4F46E5"/>
+          </a:solidFill>
+          <a:ln>
+            <a:noFill/>
+          </a:ln>
+        </p:spPr>
+        <p:txBody>
+          <a:bodyPr spcFirstLastPara="1" wrap="square" lIns="91425" tIns="45700" rIns="91425" bIns="45700" anchor="ctr" anchorCtr="0">
+            <a:noAutofit/>
+          </a:bodyPr>
+          <a:lstStyle/>
+          <a:p>
+            <a:pPr marL="0" marR="0" lvl="0" indent="0" algn="ctr" rtl="0">
+              <a:spcBef>
+                <a:spcPts val="0"/>
+              </a:spcBef>
+              <a:spcAft>
+                <a:spcPts val="0"/>
+              </a:spcAft>
+              <a:buNone/>
+            </a:pPr>
+            <a:endParaRPr sz="2800" b="0" i="0" u="none" strike="noStrike" cap="none">
+              <a:solidFill>
+                <a:schemeClr val="dk1"/>
+              </a:solidFill>
+              <a:latin typeface="Times New Roman" panose="02020603050405020304" pitchFamily="18" charset="0"/>
+              <a:ea typeface="Calibri"/>
+              <a:cs typeface="Times New Roman" panose="02020603050405020304" pitchFamily="18" charset="0"/>
+              <a:sym typeface="Calibri"/>
+            </a:endParaRPr>
+          </a:p>
+        </p:txBody>
+      </p:sp>
+      <p:sp>
+        <p:nvSpPr>
+          <p:cNvPr id="12" name="Прямоугольник 11">
+            <a:extLst>
+              <a:ext uri="{FF2B5EF4-FFF2-40B4-BE49-F238E27FC236}">
+                <a16:creationId xmlns:a16="http://schemas.microsoft.com/office/drawing/2014/main" id="{51BEAF95-55D6-403B-BA21-08A5C497A416}"/>
+              </a:ext>
+            </a:extLst>
+          </p:cNvPr>
+          <p:cNvSpPr/>
+          <p:nvPr/>
+        </p:nvSpPr>
+        <p:spPr>
+          <a:xfrm>
+            <a:off x="579352" y="3581400"/>
+            <a:ext cx="2443247" cy="2377503"/>
+          </a:xfrm>
+          <a:prstGeom prst="rect">
+            <a:avLst/>
+          </a:prstGeom>
+        </p:spPr>
+        <p:style>
+          <a:lnRef idx="2">
+            <a:schemeClr val="accent1">
+              <a:shade val="15000"/>
+            </a:schemeClr>
+          </a:lnRef>
+          <a:fillRef idx="1">
+            <a:schemeClr val="accent1"/>
+          </a:fillRef>
+          <a:effectRef idx="0">
+            <a:schemeClr val="accent1"/>
+          </a:effectRef>
+          <a:fontRef idx="minor">
+            <a:schemeClr val="lt1"/>
+          </a:fontRef>
+        </p:style>
+        <p:txBody>
+          <a:bodyPr rtlCol="0" anchor="ctr"/>
+          <a:lstStyle/>
+          <a:p>
+            <a:pPr algn="ctr"/>
+            <a:endParaRPr lang="ru-RU">
+              <a:solidFill>
+                <a:schemeClr val="tx1"/>
+              </a:solidFill>
+              <a:latin typeface="Times New Roman" panose="02020603050405020304" pitchFamily="18" charset="0"/>
+              <a:cs typeface="Times New Roman" panose="02020603050405020304" pitchFamily="18" charset="0"/>
+            </a:endParaRPr>
+          </a:p>
+        </p:txBody>
+      </p:sp>
+      <p:pic>
+        <p:nvPicPr>
+          <p:cNvPr id="13" name="Рисунок 12">
+            <a:extLst>
+              <a:ext uri="{FF2B5EF4-FFF2-40B4-BE49-F238E27FC236}">
+                <a16:creationId xmlns:a16="http://schemas.microsoft.com/office/drawing/2014/main" id="{205642A9-2385-49F6-B5B8-F36F4E02513A}"/>
+              </a:ext>
+            </a:extLst>
+          </p:cNvPr>
+          <p:cNvPicPr>
+            <a:picLocks noChangeAspect="1"/>
+          </p:cNvPicPr>
+          <p:nvPr/>
+        </p:nvPicPr>
+        <p:blipFill>
+          <a:blip r:embed="rId3"/>
+          <a:stretch>
+            <a:fillRect/>
+          </a:stretch>
+        </p:blipFill>
+        <p:spPr>
+          <a:xfrm>
+            <a:off x="624629" y="3636995"/>
+            <a:ext cx="2349552" cy="2266312"/>
+          </a:xfrm>
+          <a:prstGeom prst="rect">
+            <a:avLst/>
+          </a:prstGeom>
+        </p:spPr>
+      </p:pic>
+      <p:pic>
+        <p:nvPicPr>
+          <p:cNvPr id="6" name="Рисунок 5">
+            <a:extLst>
+              <a:ext uri="{FF2B5EF4-FFF2-40B4-BE49-F238E27FC236}">
+                <a16:creationId xmlns:a16="http://schemas.microsoft.com/office/drawing/2014/main" id="{FAADE1F6-FF55-49D0-BCA7-91B874528F3E}"/>
+              </a:ext>
+            </a:extLst>
+          </p:cNvPr>
+          <p:cNvPicPr>
+            <a:picLocks noChangeAspect="1"/>
+          </p:cNvPicPr>
+          <p:nvPr/>
+        </p:nvPicPr>
+        <p:blipFill>
+          <a:blip r:embed="rId4"/>
+          <a:stretch>
+            <a:fillRect/>
+          </a:stretch>
+        </p:blipFill>
+        <p:spPr>
+          <a:xfrm>
+            <a:off x="4462726" y="1583355"/>
+            <a:ext cx="7466595" cy="4618138"/>
+          </a:xfrm>
+          <a:prstGeom prst="rect">
+            <a:avLst/>
+          </a:prstGeom>
+        </p:spPr>
+      </p:pic>
+      <p:sp>
+        <p:nvSpPr>
+          <p:cNvPr id="14" name="TextBox 13">
+            <a:extLst>
+              <a:ext uri="{FF2B5EF4-FFF2-40B4-BE49-F238E27FC236}">
+                <a16:creationId xmlns:a16="http://schemas.microsoft.com/office/drawing/2014/main" id="{7226DA54-B4FF-4B51-AF98-5DBB0DABDFF9}"/>
+              </a:ext>
+            </a:extLst>
+          </p:cNvPr>
+          <p:cNvSpPr txBox="1"/>
+          <p:nvPr/>
+        </p:nvSpPr>
+        <p:spPr>
+          <a:xfrm>
+            <a:off x="828675" y="2047875"/>
+            <a:ext cx="1231427" cy="1323439"/>
+          </a:xfrm>
+          <a:prstGeom prst="rect">
+            <a:avLst/>
+          </a:prstGeom>
+          <a:noFill/>
+        </p:spPr>
+        <p:txBody>
+          <a:bodyPr wrap="none" rtlCol="0">
+            <a:spAutoFit/>
+          </a:bodyPr>
+          <a:lstStyle/>
+          <a:p>
+            <a:r>
+              <a:rPr lang="ru-RU" sz="2000" dirty="0">
+                <a:latin typeface="Times New Roman" panose="02020603050405020304" pitchFamily="18" charset="0"/>
+                <a:cs typeface="Times New Roman" panose="02020603050405020304" pitchFamily="18" charset="0"/>
+              </a:rPr>
+              <a:t>19.104-78</a:t>
+            </a:r>
+          </a:p>
+          <a:p>
+            <a:r>
+              <a:rPr lang="ru-RU" sz="2000" dirty="0">
+                <a:latin typeface="Times New Roman" panose="02020603050405020304" pitchFamily="18" charset="0"/>
+                <a:cs typeface="Times New Roman" panose="02020603050405020304" pitchFamily="18" charset="0"/>
+              </a:rPr>
+              <a:t>19.106-78</a:t>
+            </a:r>
+            <a:endParaRPr lang="en-US" sz="2000" dirty="0">
+              <a:latin typeface="Times New Roman" panose="02020603050405020304" pitchFamily="18" charset="0"/>
+              <a:cs typeface="Times New Roman" panose="02020603050405020304" pitchFamily="18" charset="0"/>
+            </a:endParaRPr>
+          </a:p>
+          <a:p>
+            <a:r>
+              <a:rPr lang="ru-RU" sz="2000" dirty="0">
+                <a:latin typeface="Times New Roman" panose="02020603050405020304" pitchFamily="18" charset="0"/>
+                <a:cs typeface="Times New Roman" panose="02020603050405020304" pitchFamily="18" charset="0"/>
+              </a:rPr>
+              <a:t>19.505-79</a:t>
+            </a:r>
+          </a:p>
+          <a:p>
+            <a:r>
+              <a:rPr lang="en-US" sz="2000" dirty="0">
+                <a:latin typeface="Times New Roman" panose="02020603050405020304" pitchFamily="18" charset="0"/>
+                <a:cs typeface="Times New Roman" panose="02020603050405020304" pitchFamily="18" charset="0"/>
+              </a:rPr>
+              <a:t>iso</a:t>
+            </a:r>
+            <a:r>
+              <a:rPr lang="ru-RU" sz="2000" dirty="0">
+                <a:latin typeface="Times New Roman" panose="02020603050405020304" pitchFamily="18" charset="0"/>
+                <a:cs typeface="Times New Roman" panose="02020603050405020304" pitchFamily="18" charset="0"/>
+              </a:rPr>
+              <a:t>9126</a:t>
+            </a:r>
           </a:p>
         </p:txBody>
       </p:sp>

--- a/GosBank.pptx
+++ b/GosBank.pptx
@@ -27,15 +27,6 @@
   </p:sldIdLst>
   <p:sldSz cx="12192000" cy="6858000"/>
   <p:notesSz cx="6858000" cy="9144000"/>
-  <p:embeddedFontLst>
-    <p:embeddedFont>
-      <p:font typeface="Calibri" panose="020F0502020204030204" pitchFamily="34" charset="0"/>
-      <p:regular r:id="rId19"/>
-      <p:bold r:id="rId20"/>
-      <p:italic r:id="rId21"/>
-      <p:boldItalic r:id="rId22"/>
-    </p:embeddedFont>
-  </p:embeddedFontLst>
   <p:defaultTextStyle>
     <a:defPPr marR="0" lvl="0" algn="l" rtl="0">
       <a:lnSpc>
@@ -13962,20 +13953,14 @@
           <a:lstStyle/>
           <a:p>
             <a:r>
-              <a:rPr lang="ru-RU" sz="4000" b="1" dirty="0">
-                <a:solidFill>
-                  <a:srgbClr val="0F172A"/>
-                </a:solidFill>
+              <a:rPr lang="ru-RU" sz="4000" dirty="0">
                 <a:latin typeface="Times New Roman" panose="02020603050405020304" pitchFamily="18" charset="0"/>
                 <a:cs typeface="Times New Roman" panose="02020603050405020304" pitchFamily="18" charset="0"/>
                 <a:sym typeface="Montserrat"/>
               </a:rPr>
               <a:t>Вывод и перспективы</a:t>
             </a:r>
-            <a:endParaRPr sz="4000" b="1" dirty="0">
-              <a:solidFill>
-                <a:srgbClr val="0F172A"/>
-              </a:solidFill>
+            <a:endParaRPr sz="4000" dirty="0">
               <a:latin typeface="Times New Roman" panose="02020603050405020304" pitchFamily="18" charset="0"/>
               <a:cs typeface="Times New Roman" panose="02020603050405020304" pitchFamily="18" charset="0"/>
             </a:endParaRPr>
@@ -13996,8 +13981,8 @@
         </p:nvSpPr>
         <p:spPr>
           <a:xfrm>
-            <a:off x="571500" y="1717589"/>
-            <a:ext cx="5270157" cy="954107"/>
+            <a:off x="4268406" y="1537958"/>
+            <a:ext cx="5270157" cy="400110"/>
           </a:xfrm>
           <a:prstGeom prst="rect">
             <a:avLst/>
@@ -14011,38 +13996,11 @@
           <a:lstStyle/>
           <a:p>
             <a:r>
-              <a:rPr lang="ru-RU" dirty="0">
+              <a:rPr lang="ru-RU" sz="2000" dirty="0">
                 <a:latin typeface="Times New Roman" panose="02020603050405020304" pitchFamily="18" charset="0"/>
                 <a:cs typeface="Times New Roman" panose="02020603050405020304" pitchFamily="18" charset="0"/>
               </a:rPr>
-              <a:t>Стадия готовности</a:t>
-            </a:r>
-          </a:p>
-          <a:p>
-            <a:r>
-              <a:rPr lang="ru-RU" dirty="0">
-                <a:latin typeface="Times New Roman" panose="02020603050405020304" pitchFamily="18" charset="0"/>
-                <a:cs typeface="Times New Roman" panose="02020603050405020304" pitchFamily="18" charset="0"/>
-              </a:rPr>
-              <a:t>Что удалось сделать</a:t>
-            </a:r>
-          </a:p>
-          <a:p>
-            <a:r>
-              <a:rPr lang="ru-RU" dirty="0">
-                <a:latin typeface="Times New Roman" panose="02020603050405020304" pitchFamily="18" charset="0"/>
-                <a:cs typeface="Times New Roman" panose="02020603050405020304" pitchFamily="18" charset="0"/>
-              </a:rPr>
-              <a:t>Что хотелось бы реализовать по другому </a:t>
-            </a:r>
-          </a:p>
-          <a:p>
-            <a:r>
-              <a:rPr lang="ru-RU" dirty="0">
-                <a:latin typeface="Times New Roman" panose="02020603050405020304" pitchFamily="18" charset="0"/>
-                <a:cs typeface="Times New Roman" panose="02020603050405020304" pitchFamily="18" charset="0"/>
-              </a:rPr>
-              <a:t>Перспективность </a:t>
+              <a:t>Проект реализован на 45%</a:t>
             </a:r>
           </a:p>
         </p:txBody>
@@ -14089,10 +14047,7 @@
           <a:lstStyle/>
           <a:p>
             <a:pPr algn="ctr"/>
-            <a:endParaRPr lang="ru-RU">
-              <a:solidFill>
-                <a:schemeClr val="tx1"/>
-              </a:solidFill>
+            <a:endParaRPr lang="ru-RU" sz="2000">
               <a:latin typeface="Times New Roman" panose="02020603050405020304" pitchFamily="18" charset="0"/>
               <a:cs typeface="Times New Roman" panose="02020603050405020304" pitchFamily="18" charset="0"/>
             </a:endParaRPr>
@@ -14114,7 +14069,7 @@
         <p:spPr>
           <a:xfrm>
             <a:off x="1066797" y="5958903"/>
-            <a:ext cx="1231900" cy="461665"/>
+            <a:ext cx="1231900" cy="400110"/>
           </a:xfrm>
           <a:prstGeom prst="rect">
             <a:avLst/>
@@ -14129,19 +14084,13 @@
           <a:p>
             <a:pPr algn="ctr"/>
             <a:r>
-              <a:rPr lang="en-US" sz="2400" dirty="0">
-                <a:solidFill>
-                  <a:schemeClr val="tx1"/>
-                </a:solidFill>
+              <a:rPr lang="en-US" sz="2000" dirty="0">
                 <a:latin typeface="Times New Roman" panose="02020603050405020304" pitchFamily="18" charset="0"/>
                 <a:cs typeface="Times New Roman" panose="02020603050405020304" pitchFamily="18" charset="0"/>
               </a:rPr>
               <a:t>GitHub</a:t>
             </a:r>
-            <a:endParaRPr lang="ru-RU" sz="2400" dirty="0">
-              <a:solidFill>
-                <a:schemeClr val="tx1"/>
-              </a:solidFill>
+            <a:endParaRPr lang="ru-RU" sz="2000" dirty="0">
               <a:latin typeface="Times New Roman" panose="02020603050405020304" pitchFamily="18" charset="0"/>
               <a:cs typeface="Times New Roman" panose="02020603050405020304" pitchFamily="18" charset="0"/>
             </a:endParaRPr>
@@ -14163,7 +14112,7 @@
         <p:spPr>
           <a:xfrm>
             <a:off x="9817100" y="6014538"/>
-            <a:ext cx="1231900" cy="461665"/>
+            <a:ext cx="1231900" cy="400110"/>
           </a:xfrm>
           <a:prstGeom prst="rect">
             <a:avLst/>
@@ -14178,10 +14127,7 @@
           <a:p>
             <a:pPr algn="ctr"/>
             <a:r>
-              <a:rPr lang="ru-RU" sz="2400" dirty="0">
-                <a:solidFill>
-                  <a:schemeClr val="tx1"/>
-                </a:solidFill>
+              <a:rPr lang="ru-RU" sz="2000" dirty="0">
                 <a:latin typeface="Times New Roman" panose="02020603050405020304" pitchFamily="18" charset="0"/>
                 <a:cs typeface="Times New Roman" panose="02020603050405020304" pitchFamily="18" charset="0"/>
               </a:rPr>
@@ -14262,12 +14208,8 @@
               </a:spcAft>
               <a:buNone/>
             </a:pPr>
-            <a:endParaRPr sz="2800" b="0" i="0" u="none" strike="noStrike" cap="none">
-              <a:solidFill>
-                <a:schemeClr val="dk1"/>
-              </a:solidFill>
+            <a:endParaRPr sz="2000">
               <a:latin typeface="Times New Roman" panose="02020603050405020304" pitchFamily="18" charset="0"/>
-              <a:ea typeface="Calibri"/>
               <a:cs typeface="Times New Roman" panose="02020603050405020304" pitchFamily="18" charset="0"/>
               <a:sym typeface="Calibri"/>
             </a:endParaRPr>
@@ -14316,10 +14258,7 @@
           <a:lstStyle/>
           <a:p>
             <a:pPr algn="ctr"/>
-            <a:endParaRPr lang="ru-RU">
-              <a:solidFill>
-                <a:schemeClr val="tx1"/>
-              </a:solidFill>
+            <a:endParaRPr lang="ru-RU" sz="2000">
               <a:latin typeface="Times New Roman" panose="02020603050405020304" pitchFamily="18" charset="0"/>
               <a:cs typeface="Times New Roman" panose="02020603050405020304" pitchFamily="18" charset="0"/>
             </a:endParaRPr>
@@ -14356,6 +14295,236 @@
           </a:prstGeom>
         </p:spPr>
       </p:pic>
+      <p:sp>
+        <p:nvSpPr>
+          <p:cNvPr id="3" name="TextBox 2">
+            <a:extLst>
+              <a:ext uri="{FF2B5EF4-FFF2-40B4-BE49-F238E27FC236}">
+                <a16:creationId xmlns:a16="http://schemas.microsoft.com/office/drawing/2014/main" id="{3C46735D-E7B0-74D3-58C1-5C3D1BBA725A}"/>
+              </a:ext>
+            </a:extLst>
+          </p:cNvPr>
+          <p:cNvSpPr txBox="1"/>
+          <p:nvPr/>
+        </p:nvSpPr>
+        <p:spPr>
+          <a:xfrm>
+            <a:off x="4160459" y="3957602"/>
+            <a:ext cx="4956806" cy="1938992"/>
+          </a:xfrm>
+          <a:prstGeom prst="rect">
+            <a:avLst/>
+          </a:prstGeom>
+          <a:noFill/>
+        </p:spPr>
+        <p:txBody>
+          <a:bodyPr wrap="none" rtlCol="0">
+            <a:spAutoFit/>
+          </a:bodyPr>
+          <a:lstStyle/>
+          <a:p>
+            <a:r>
+              <a:rPr lang="ru-RU" sz="2000" dirty="0">
+                <a:latin typeface="Times New Roman" panose="02020603050405020304" pitchFamily="18" charset="0"/>
+                <a:cs typeface="Times New Roman" panose="02020603050405020304" pitchFamily="18" charset="0"/>
+              </a:rPr>
+              <a:t>Что удалось сделать</a:t>
+            </a:r>
+          </a:p>
+          <a:p>
+            <a:pPr marL="457200" indent="-457200" algn="l">
+              <a:buFont typeface="Arial" panose="020B0604020202020204" pitchFamily="34" charset="0"/>
+              <a:buChar char="•"/>
+            </a:pPr>
+            <a:r>
+              <a:rPr lang="ru-RU" sz="2000" dirty="0">
+                <a:latin typeface="Times New Roman" panose="02020603050405020304" pitchFamily="18" charset="0"/>
+                <a:cs typeface="Times New Roman" panose="02020603050405020304" pitchFamily="18" charset="0"/>
+              </a:rPr>
+              <a:t>Концептуальная и архитектурная часть</a:t>
+            </a:r>
+          </a:p>
+          <a:p>
+            <a:pPr marL="457200" indent="-457200">
+              <a:buFont typeface="Arial" panose="020B0604020202020204" pitchFamily="34" charset="0"/>
+              <a:buChar char="•"/>
+            </a:pPr>
+            <a:r>
+              <a:rPr lang="ru-RU" sz="2000" dirty="0">
+                <a:latin typeface="Times New Roman" panose="02020603050405020304" pitchFamily="18" charset="0"/>
+                <a:cs typeface="Times New Roman" panose="02020603050405020304" pitchFamily="18" charset="0"/>
+              </a:rPr>
+              <a:t>Интерфейс и пользовательский опыт</a:t>
+            </a:r>
+          </a:p>
+          <a:p>
+            <a:pPr marL="457200" indent="-457200">
+              <a:buFont typeface="Arial" panose="020B0604020202020204" pitchFamily="34" charset="0"/>
+              <a:buChar char="•"/>
+            </a:pPr>
+            <a:r>
+              <a:rPr lang="ru-RU" sz="2000" dirty="0">
+                <a:latin typeface="Times New Roman" panose="02020603050405020304" pitchFamily="18" charset="0"/>
+                <a:cs typeface="Times New Roman" panose="02020603050405020304" pitchFamily="18" charset="0"/>
+              </a:rPr>
+              <a:t>Тестирование и качество</a:t>
+            </a:r>
+          </a:p>
+          <a:p>
+            <a:pPr marL="457200" indent="-457200">
+              <a:buFont typeface="Arial" panose="020B0604020202020204" pitchFamily="34" charset="0"/>
+              <a:buChar char="•"/>
+            </a:pPr>
+            <a:r>
+              <a:rPr lang="ru-RU" sz="2000" dirty="0">
+                <a:latin typeface="Times New Roman" panose="02020603050405020304" pitchFamily="18" charset="0"/>
+                <a:cs typeface="Times New Roman" panose="02020603050405020304" pitchFamily="18" charset="0"/>
+              </a:rPr>
+              <a:t>Документирование</a:t>
+            </a:r>
+          </a:p>
+          <a:p>
+            <a:endParaRPr lang="ru-RU" sz="2000" dirty="0">
+              <a:latin typeface="Times New Roman" panose="02020603050405020304" pitchFamily="18" charset="0"/>
+              <a:cs typeface="Times New Roman" panose="02020603050405020304" pitchFamily="18" charset="0"/>
+            </a:endParaRPr>
+          </a:p>
+        </p:txBody>
+      </p:sp>
+      <p:sp>
+        <p:nvSpPr>
+          <p:cNvPr id="7" name="TextBox 6">
+            <a:extLst>
+              <a:ext uri="{FF2B5EF4-FFF2-40B4-BE49-F238E27FC236}">
+                <a16:creationId xmlns:a16="http://schemas.microsoft.com/office/drawing/2014/main" id="{A706DD71-DB5E-4338-0926-32A1CA723565}"/>
+              </a:ext>
+            </a:extLst>
+          </p:cNvPr>
+          <p:cNvSpPr txBox="1"/>
+          <p:nvPr/>
+        </p:nvSpPr>
+        <p:spPr>
+          <a:xfrm>
+            <a:off x="7020236" y="2105560"/>
+            <a:ext cx="5145570" cy="1631216"/>
+          </a:xfrm>
+          <a:prstGeom prst="rect">
+            <a:avLst/>
+          </a:prstGeom>
+          <a:noFill/>
+        </p:spPr>
+        <p:txBody>
+          <a:bodyPr wrap="square" rtlCol="0">
+            <a:spAutoFit/>
+          </a:bodyPr>
+          <a:lstStyle/>
+          <a:p>
+            <a:r>
+              <a:rPr lang="ru-RU" sz="2000" dirty="0">
+                <a:latin typeface="Times New Roman" panose="02020603050405020304" pitchFamily="18" charset="0"/>
+                <a:cs typeface="Times New Roman" panose="02020603050405020304" pitchFamily="18" charset="0"/>
+              </a:rPr>
+              <a:t>Что хотелось бы реализовать по другому </a:t>
+            </a:r>
+          </a:p>
+          <a:p>
+            <a:pPr marL="342900" indent="-342900">
+              <a:buFont typeface="Arial" panose="020B0604020202020204" pitchFamily="34" charset="0"/>
+              <a:buChar char="•"/>
+            </a:pPr>
+            <a:r>
+              <a:rPr lang="ru-RU" sz="2000" dirty="0">
+                <a:latin typeface="Times New Roman" panose="02020603050405020304" pitchFamily="18" charset="0"/>
+                <a:cs typeface="Times New Roman" panose="02020603050405020304" pitchFamily="18" charset="0"/>
+              </a:rPr>
+              <a:t>Организационные и управленческие аспекты</a:t>
+            </a:r>
+          </a:p>
+          <a:p>
+            <a:pPr marL="342900" indent="-342900">
+              <a:buFont typeface="Arial" panose="020B0604020202020204" pitchFamily="34" charset="0"/>
+              <a:buChar char="•"/>
+            </a:pPr>
+            <a:r>
+              <a:rPr lang="ru-RU" sz="2000" dirty="0">
+                <a:latin typeface="Times New Roman" panose="02020603050405020304" pitchFamily="18" charset="0"/>
+                <a:cs typeface="Times New Roman" panose="02020603050405020304" pitchFamily="18" charset="0"/>
+              </a:rPr>
+              <a:t>Технические решения</a:t>
+            </a:r>
+          </a:p>
+          <a:p>
+            <a:endParaRPr lang="ru-RU" sz="2000" dirty="0">
+              <a:latin typeface="Times New Roman" panose="02020603050405020304" pitchFamily="18" charset="0"/>
+              <a:cs typeface="Times New Roman" panose="02020603050405020304" pitchFamily="18" charset="0"/>
+            </a:endParaRPr>
+          </a:p>
+        </p:txBody>
+      </p:sp>
+      <p:sp>
+        <p:nvSpPr>
+          <p:cNvPr id="9" name="TextBox 8">
+            <a:extLst>
+              <a:ext uri="{FF2B5EF4-FFF2-40B4-BE49-F238E27FC236}">
+                <a16:creationId xmlns:a16="http://schemas.microsoft.com/office/drawing/2014/main" id="{F8EF6137-DB04-E24B-D9E7-040C938B1835}"/>
+              </a:ext>
+            </a:extLst>
+          </p:cNvPr>
+          <p:cNvSpPr txBox="1"/>
+          <p:nvPr/>
+        </p:nvSpPr>
+        <p:spPr>
+          <a:xfrm>
+            <a:off x="624629" y="2105560"/>
+            <a:ext cx="4293163" cy="1015663"/>
+          </a:xfrm>
+          <a:prstGeom prst="rect">
+            <a:avLst/>
+          </a:prstGeom>
+          <a:noFill/>
+        </p:spPr>
+        <p:txBody>
+          <a:bodyPr wrap="none" rtlCol="0">
+            <a:spAutoFit/>
+          </a:bodyPr>
+          <a:lstStyle/>
+          <a:p>
+            <a:r>
+              <a:rPr lang="ru-RU" sz="2000" dirty="0">
+                <a:latin typeface="Times New Roman" panose="02020603050405020304" pitchFamily="18" charset="0"/>
+                <a:cs typeface="Times New Roman" panose="02020603050405020304" pitchFamily="18" charset="0"/>
+              </a:rPr>
+              <a:t>Перспективность </a:t>
+            </a:r>
+          </a:p>
+          <a:p>
+            <a:pPr marL="342900" indent="-342900">
+              <a:buFont typeface="Arial" panose="020B0604020202020204" pitchFamily="34" charset="0"/>
+              <a:buChar char="•"/>
+            </a:pPr>
+            <a:r>
+              <a:rPr lang="ru-RU" sz="2000" dirty="0">
+                <a:latin typeface="Times New Roman" panose="02020603050405020304" pitchFamily="18" charset="0"/>
+                <a:cs typeface="Times New Roman" panose="02020603050405020304" pitchFamily="18" charset="0"/>
+              </a:rPr>
+              <a:t>Государственное финансирование</a:t>
+            </a:r>
+          </a:p>
+          <a:p>
+            <a:pPr marL="342900" indent="-342900">
+              <a:buFont typeface="Arial" panose="020B0604020202020204" pitchFamily="34" charset="0"/>
+              <a:buChar char="•"/>
+            </a:pPr>
+            <a:r>
+              <a:rPr lang="ru-RU" sz="2000" dirty="0">
+                <a:latin typeface="Times New Roman" panose="02020603050405020304" pitchFamily="18" charset="0"/>
+                <a:cs typeface="Times New Roman" panose="02020603050405020304" pitchFamily="18" charset="0"/>
+              </a:rPr>
+              <a:t>Масштабируемость</a:t>
+            </a:r>
+          </a:p>
+        </p:txBody>
+      </p:sp>
     </p:spTree>
   </p:cSld>
   <p:clrMapOvr>
